--- a/report/15.3. Di động - Tuan3.pptx
+++ b/report/15.3. Di động - Tuan3.pptx
@@ -5,26 +5,27 @@
     <p:sldMasterId id="2147483648" r:id="rId1"/>
   </p:sldMasterIdLst>
   <p:notesMasterIdLst>
-    <p:notesMasterId r:id="rId16"/>
+    <p:notesMasterId r:id="rId17"/>
   </p:notesMasterIdLst>
   <p:handoutMasterIdLst>
-    <p:handoutMasterId r:id="rId17"/>
+    <p:handoutMasterId r:id="rId18"/>
   </p:handoutMasterIdLst>
   <p:sldIdLst>
     <p:sldId id="276" r:id="rId2"/>
     <p:sldId id="301" r:id="rId3"/>
     <p:sldId id="302" r:id="rId4"/>
-    <p:sldId id="305" r:id="rId5"/>
-    <p:sldId id="306" r:id="rId6"/>
-    <p:sldId id="307" r:id="rId7"/>
-    <p:sldId id="308" r:id="rId8"/>
-    <p:sldId id="309" r:id="rId9"/>
-    <p:sldId id="310" r:id="rId10"/>
-    <p:sldId id="311" r:id="rId11"/>
-    <p:sldId id="313" r:id="rId12"/>
-    <p:sldId id="312" r:id="rId13"/>
-    <p:sldId id="304" r:id="rId14"/>
-    <p:sldId id="275" r:id="rId15"/>
+    <p:sldId id="314" r:id="rId5"/>
+    <p:sldId id="305" r:id="rId6"/>
+    <p:sldId id="306" r:id="rId7"/>
+    <p:sldId id="307" r:id="rId8"/>
+    <p:sldId id="308" r:id="rId9"/>
+    <p:sldId id="309" r:id="rId10"/>
+    <p:sldId id="310" r:id="rId11"/>
+    <p:sldId id="311" r:id="rId12"/>
+    <p:sldId id="313" r:id="rId13"/>
+    <p:sldId id="312" r:id="rId14"/>
+    <p:sldId id="304" r:id="rId15"/>
+    <p:sldId id="275" r:id="rId16"/>
   </p:sldIdLst>
   <p:sldSz cx="12192000" cy="6858000"/>
   <p:notesSz cx="6858000" cy="9144000"/>
@@ -570,7 +571,7 @@
           <a:p>
             <a:fld id="{E3BC1FF4-501E-417A-B71B-CA534D31E637}" type="datetimeFigureOut">
               <a:rPr lang="en-US" smtClean="0"/>
-              <a:t>9/12/2026</a:t>
+              <a:t>9/14/2026</a:t>
             </a:fld>
             <a:endParaRPr lang="en-US"/>
           </a:p>
@@ -2983,67 +2984,1778 @@
       </p:sp>
       <p:sp>
         <p:nvSpPr>
-          <p:cNvPr id="51" name="Content Placeholder 2">
+          <p:cNvPr id="26" name="Text 0">
             <a:extLst>
               <a:ext uri="{FF2B5EF4-FFF2-40B4-BE49-F238E27FC236}">
-                <a16:creationId xmlns:a16="http://schemas.microsoft.com/office/drawing/2014/main" id="{7E3D7437-29CF-43A9-9A4E-F1201877204B}"/>
+                <a16:creationId xmlns:a16="http://schemas.microsoft.com/office/drawing/2014/main" id="{C5FE1E40-2592-4EAE-B192-39FB29C80BD2}"/>
               </a:ext>
             </a:extLst>
           </p:cNvPr>
-          <p:cNvSpPr>
-            <a:spLocks noGrp="1"/>
-          </p:cNvSpPr>
-          <p:nvPr>
-            <p:ph idx="1"/>
-          </p:nvPr>
+          <p:cNvSpPr/>
+          <p:nvPr/>
         </p:nvSpPr>
         <p:spPr>
           <a:xfrm>
-            <a:off x="508000" y="1295400"/>
-            <a:ext cx="11074400" cy="4724400"/>
+            <a:off x="305160" y="1064308"/>
+            <a:ext cx="10972440" cy="502560"/>
           </a:xfrm>
+          <a:prstGeom prst="rect">
+            <a:avLst/>
+          </a:prstGeom>
+          <a:noFill/>
+          <a:ln w="0">
+            <a:noFill/>
+          </a:ln>
         </p:spPr>
+        <p:style>
+          <a:lnRef idx="0">
+            <a:scrgbClr r="0" g="0" b="0"/>
+          </a:lnRef>
+          <a:fillRef idx="0">
+            <a:scrgbClr r="0" g="0" b="0"/>
+          </a:fillRef>
+          <a:effectRef idx="0">
+            <a:scrgbClr r="0" g="0" b="0"/>
+          </a:effectRef>
+          <a:fontRef idx="minor"/>
+        </p:style>
         <p:txBody>
-          <a:bodyPr/>
+          <a:bodyPr lIns="0" tIns="0" rIns="0" bIns="0" anchor="ctr">
+            <a:noAutofit/>
+          </a:bodyPr>
           <a:lstStyle/>
           <a:p>
-            <a:pPr marL="0" indent="0">
-              <a:buNone/>
+            <a:pPr defTabSz="914400">
+              <a:lnSpc>
+                <a:spcPct val="100000"/>
+              </a:lnSpc>
+              <a:tabLst>
+                <a:tab pos="0" algn="l"/>
+              </a:tabLst>
             </a:pPr>
             <a:r>
-              <a:rPr lang="en-US"/>
-              <a:t>Edge AI literature review</a:t>
-            </a:r>
-          </a:p>
-          <a:p>
-            <a:r>
-              <a:rPr lang="en-US"/>
-              <a:t>Cats and Dogs Classification Dataset: </a:t>
-            </a:r>
-            <a:r>
-              <a:rPr lang="en-US">
-                <a:hlinkClick r:id="rId2"/>
+              <a:rPr lang="en-US" sz="2600" b="1" u="none" strike="noStrike">
+                <a:solidFill>
+                  <a:srgbClr val="0F172A"/>
+                </a:solidFill>
+                <a:effectLst/>
+                <a:uFillTx/>
+                <a:latin typeface="Aptos"/>
               </a:rPr>
-              <a:t>https://www.kaggle.com/datasets/bhavikjikadara/dog-and-cat-classification-dataset/data</a:t>
-            </a:r>
-            <a:r>
-              <a:rPr lang="en-US"/>
-              <a:t> </a:t>
-            </a:r>
-          </a:p>
-          <a:p>
-            <a:r>
-              <a:rPr lang="vi-VN" sz="1800"/>
-              <a:t>Bộ dữ liệu Cat and Dog Classification là một bộ dữ liệu tiêu chuẩn trong lĩnh vực thị giác máy tính (Computer Vision), được sử dụng cho bài toán phân loại hình ảnh, trong đó mô hình cần xác định một hình ảnh chứa chó (Dog) hay mèo (Cat). Bộ dữ liệu này là một tập con được trích xuất từ một bộ dữ liệu lớn hơn gồm khoảng 25.000 hình ảnh.Bộ dữ liệu bao gồm 24.998 hình ảnh, được chia thành:12.499 hình ảnh mèo (Cat)12.499 hình ảnh chó (Dog)Các hình ảnh trong tập huấn luyện (training set) được phân chia đồng đều giữa hai lớp chó và mèo, trong khi các hình ảnh thuộc tập kiểm thử (test set) không được gán nhãn. Cách tổ chức này cho phép người dùng đánh giá khả năng tổng quát hóa của mô hình trên dữ liệu chưa từng xuất hiện trong quá trình huấn luyện.</a:t>
-            </a:r>
-            <a:endParaRPr lang="en-US" sz="1800"/>
+              <a:t> Tích hợp AI ở phiên bản tiếp theo</a:t>
+            </a:r>
+            <a:endParaRPr lang="en-US" sz="2600" b="0" u="none" strike="noStrike">
+              <a:solidFill>
+                <a:srgbClr val="000000"/>
+              </a:solidFill>
+              <a:effectLst/>
+              <a:uFillTx/>
+              <a:latin typeface="Arial"/>
+            </a:endParaRPr>
+          </a:p>
+        </p:txBody>
+      </p:sp>
+      <p:sp>
+        <p:nvSpPr>
+          <p:cNvPr id="27" name="Text 1">
+            <a:extLst>
+              <a:ext uri="{FF2B5EF4-FFF2-40B4-BE49-F238E27FC236}">
+                <a16:creationId xmlns:a16="http://schemas.microsoft.com/office/drawing/2014/main" id="{EC37DD4C-6257-4C54-8820-8829FD3E6DE9}"/>
+              </a:ext>
+            </a:extLst>
+          </p:cNvPr>
+          <p:cNvSpPr/>
+          <p:nvPr/>
+        </p:nvSpPr>
+        <p:spPr>
+          <a:xfrm>
+            <a:off x="323520" y="1612948"/>
+            <a:ext cx="10789560" cy="292320"/>
+          </a:xfrm>
+          <a:prstGeom prst="rect">
+            <a:avLst/>
+          </a:prstGeom>
+          <a:noFill/>
+          <a:ln w="0">
+            <a:noFill/>
+          </a:ln>
+        </p:spPr>
+        <p:style>
+          <a:lnRef idx="0">
+            <a:scrgbClr r="0" g="0" b="0"/>
+          </a:lnRef>
+          <a:fillRef idx="0">
+            <a:scrgbClr r="0" g="0" b="0"/>
+          </a:fillRef>
+          <a:effectRef idx="0">
+            <a:scrgbClr r="0" g="0" b="0"/>
+          </a:effectRef>
+          <a:fontRef idx="minor"/>
+        </p:style>
+        <p:txBody>
+          <a:bodyPr lIns="0" tIns="0" rIns="0" bIns="0" anchor="ctr">
+            <a:noAutofit/>
+          </a:bodyPr>
+          <a:lstStyle/>
+          <a:p>
+            <a:pPr defTabSz="914400">
+              <a:lnSpc>
+                <a:spcPct val="100000"/>
+              </a:lnSpc>
+              <a:tabLst>
+                <a:tab pos="0" algn="l"/>
+              </a:tabLst>
+            </a:pPr>
+            <a:r>
+              <a:rPr lang="en-US" sz="1150" b="0" u="none" strike="noStrike">
+                <a:solidFill>
+                  <a:srgbClr val="64748B"/>
+                </a:solidFill>
+                <a:effectLst/>
+                <a:uFillTx/>
+                <a:latin typeface="Aptos"/>
+              </a:rPr>
+              <a:t>Điểm mạnh của V1: AI không cần thay đổi logic cấp thức ăn hiện có.</a:t>
+            </a:r>
+            <a:endParaRPr lang="en-US" sz="1150" b="0" u="none" strike="noStrike">
+              <a:solidFill>
+                <a:srgbClr val="000000"/>
+              </a:solidFill>
+              <a:effectLst/>
+              <a:uFillTx/>
+              <a:latin typeface="Arial"/>
+            </a:endParaRPr>
+          </a:p>
+        </p:txBody>
+      </p:sp>
+      <p:sp>
+        <p:nvSpPr>
+          <p:cNvPr id="28" name="Shape 2">
+            <a:extLst>
+              <a:ext uri="{FF2B5EF4-FFF2-40B4-BE49-F238E27FC236}">
+                <a16:creationId xmlns:a16="http://schemas.microsoft.com/office/drawing/2014/main" id="{5B30E450-37C6-4F06-9C60-AE2D8DB0116F}"/>
+              </a:ext>
+            </a:extLst>
+          </p:cNvPr>
+          <p:cNvSpPr/>
+          <p:nvPr/>
+        </p:nvSpPr>
+        <p:spPr>
+          <a:xfrm>
+            <a:off x="533760" y="2188948"/>
+            <a:ext cx="2925720" cy="2011320"/>
+          </a:xfrm>
+          <a:prstGeom prst="roundRect">
+            <a:avLst>
+              <a:gd name="adj" fmla="val 3636"/>
+            </a:avLst>
+          </a:prstGeom>
+          <a:solidFill>
+            <a:srgbClr val="FEF3C7"/>
+          </a:solidFill>
+          <a:ln w="19050">
+            <a:solidFill>
+              <a:srgbClr val="F59E0B"/>
+            </a:solidFill>
+            <a:round/>
+          </a:ln>
+        </p:spPr>
+        <p:style>
+          <a:lnRef idx="0">
+            <a:scrgbClr r="0" g="0" b="0"/>
+          </a:lnRef>
+          <a:fillRef idx="0">
+            <a:scrgbClr r="0" g="0" b="0"/>
+          </a:fillRef>
+          <a:effectRef idx="0">
+            <a:scrgbClr r="0" g="0" b="0"/>
+          </a:effectRef>
+          <a:fontRef idx="minor"/>
+        </p:style>
+        <p:txBody>
+          <a:bodyPr lIns="90000" tIns="45000" rIns="90000" bIns="45000" anchor="t">
+            <a:noAutofit/>
+          </a:bodyPr>
+          <a:lstStyle/>
+          <a:p>
+            <a:endParaRPr lang="en-US" sz="1800" b="0" u="none" strike="noStrike">
+              <a:solidFill>
+                <a:srgbClr val="000000"/>
+              </a:solidFill>
+              <a:effectLst/>
+              <a:uFillTx/>
+              <a:latin typeface="Arial"/>
+            </a:endParaRPr>
+          </a:p>
+        </p:txBody>
+      </p:sp>
+      <p:sp>
+        <p:nvSpPr>
+          <p:cNvPr id="29" name="Text 3">
+            <a:extLst>
+              <a:ext uri="{FF2B5EF4-FFF2-40B4-BE49-F238E27FC236}">
+                <a16:creationId xmlns:a16="http://schemas.microsoft.com/office/drawing/2014/main" id="{A2C34E6A-84D6-4C32-9674-A6539B4E2681}"/>
+              </a:ext>
+            </a:extLst>
+          </p:cNvPr>
+          <p:cNvSpPr/>
+          <p:nvPr/>
+        </p:nvSpPr>
+        <p:spPr>
+          <a:xfrm>
+            <a:off x="1036680" y="2554708"/>
+            <a:ext cx="1919880" cy="347040"/>
+          </a:xfrm>
+          <a:prstGeom prst="rect">
+            <a:avLst/>
+          </a:prstGeom>
+          <a:noFill/>
+          <a:ln w="0">
+            <a:noFill/>
+          </a:ln>
+        </p:spPr>
+        <p:style>
+          <a:lnRef idx="0">
+            <a:scrgbClr r="0" g="0" b="0"/>
+          </a:lnRef>
+          <a:fillRef idx="0">
+            <a:scrgbClr r="0" g="0" b="0"/>
+          </a:fillRef>
+          <a:effectRef idx="0">
+            <a:scrgbClr r="0" g="0" b="0"/>
+          </a:effectRef>
+          <a:fontRef idx="minor"/>
+        </p:style>
+        <p:txBody>
+          <a:bodyPr lIns="0" tIns="0" rIns="0" bIns="0" anchor="ctr">
+            <a:noAutofit/>
+          </a:bodyPr>
+          <a:lstStyle/>
+          <a:p>
+            <a:pPr algn="ctr" defTabSz="914400">
+              <a:lnSpc>
+                <a:spcPct val="100000"/>
+              </a:lnSpc>
+              <a:tabLst>
+                <a:tab pos="0" algn="l"/>
+              </a:tabLst>
+            </a:pPr>
+            <a:r>
+              <a:rPr lang="en-US" sz="2000" b="1" u="none" strike="noStrike">
+                <a:solidFill>
+                  <a:srgbClr val="0F172A"/>
+                </a:solidFill>
+                <a:effectLst/>
+                <a:uFillTx/>
+                <a:latin typeface="Aptos"/>
+              </a:rPr>
+              <a:t>AI Classifier</a:t>
+            </a:r>
+            <a:endParaRPr lang="en-US" sz="2000" b="0" u="none" strike="noStrike">
+              <a:solidFill>
+                <a:srgbClr val="000000"/>
+              </a:solidFill>
+              <a:effectLst/>
+              <a:uFillTx/>
+              <a:latin typeface="Arial"/>
+            </a:endParaRPr>
+          </a:p>
+        </p:txBody>
+      </p:sp>
+      <p:sp>
+        <p:nvSpPr>
+          <p:cNvPr id="30" name="Text 4">
+            <a:extLst>
+              <a:ext uri="{FF2B5EF4-FFF2-40B4-BE49-F238E27FC236}">
+                <a16:creationId xmlns:a16="http://schemas.microsoft.com/office/drawing/2014/main" id="{447F667B-B94B-416D-AA9D-5AC853159872}"/>
+              </a:ext>
+            </a:extLst>
+          </p:cNvPr>
+          <p:cNvSpPr/>
+          <p:nvPr/>
+        </p:nvSpPr>
+        <p:spPr>
+          <a:xfrm>
+            <a:off x="945240" y="3075988"/>
+            <a:ext cx="2102760" cy="594000"/>
+          </a:xfrm>
+          <a:prstGeom prst="rect">
+            <a:avLst/>
+          </a:prstGeom>
+          <a:noFill/>
+          <a:ln w="0">
+            <a:noFill/>
+          </a:ln>
+        </p:spPr>
+        <p:style>
+          <a:lnRef idx="0">
+            <a:scrgbClr r="0" g="0" b="0"/>
+          </a:lnRef>
+          <a:fillRef idx="0">
+            <a:scrgbClr r="0" g="0" b="0"/>
+          </a:fillRef>
+          <a:effectRef idx="0">
+            <a:scrgbClr r="0" g="0" b="0"/>
+          </a:effectRef>
+          <a:fontRef idx="minor"/>
+        </p:style>
+        <p:txBody>
+          <a:bodyPr lIns="0" tIns="0" rIns="0" bIns="0" anchor="ctr">
+            <a:noAutofit/>
+          </a:bodyPr>
+          <a:lstStyle/>
+          <a:p>
+            <a:pPr algn="ctr" defTabSz="914400">
+              <a:lnSpc>
+                <a:spcPct val="100000"/>
+              </a:lnSpc>
+              <a:tabLst>
+                <a:tab pos="0" algn="l"/>
+              </a:tabLst>
+            </a:pPr>
+            <a:r>
+              <a:rPr lang="en-US" sz="1300" b="0" u="none" strike="noStrike">
+                <a:solidFill>
+                  <a:srgbClr val="92400E"/>
+                </a:solidFill>
+                <a:effectLst/>
+                <a:uFillTx/>
+                <a:latin typeface="Courier New"/>
+                <a:ea typeface="Courier New"/>
+              </a:rPr>
+              <a:t>speciesId = "dog" / "cat"</a:t>
+            </a:r>
+            <a:endParaRPr lang="en-US" sz="1300" b="0" u="none" strike="noStrike">
+              <a:solidFill>
+                <a:srgbClr val="000000"/>
+              </a:solidFill>
+              <a:effectLst/>
+              <a:uFillTx/>
+              <a:latin typeface="Arial"/>
+            </a:endParaRPr>
+          </a:p>
+          <a:p>
+            <a:pPr algn="ctr" defTabSz="914400">
+              <a:lnSpc>
+                <a:spcPct val="100000"/>
+              </a:lnSpc>
+              <a:tabLst>
+                <a:tab pos="0" algn="l"/>
+              </a:tabLst>
+            </a:pPr>
+            <a:r>
+              <a:rPr lang="en-US" sz="1300" b="0" u="none" strike="noStrike">
+                <a:solidFill>
+                  <a:srgbClr val="92400E"/>
+                </a:solidFill>
+                <a:effectLst/>
+                <a:uFillTx/>
+                <a:latin typeface="Courier New"/>
+                <a:ea typeface="Courier New"/>
+              </a:rPr>
+              <a:t>confidence = 0.94</a:t>
+            </a:r>
+            <a:endParaRPr lang="en-US" sz="1300" b="0" u="none" strike="noStrike">
+              <a:solidFill>
+                <a:srgbClr val="000000"/>
+              </a:solidFill>
+              <a:effectLst/>
+              <a:uFillTx/>
+              <a:latin typeface="Arial"/>
+            </a:endParaRPr>
+          </a:p>
+        </p:txBody>
+      </p:sp>
+      <p:sp>
+        <p:nvSpPr>
+          <p:cNvPr id="31" name="Shape 5">
+            <a:extLst>
+              <a:ext uri="{FF2B5EF4-FFF2-40B4-BE49-F238E27FC236}">
+                <a16:creationId xmlns:a16="http://schemas.microsoft.com/office/drawing/2014/main" id="{2E779399-A560-43EC-B312-A56E87503F42}"/>
+              </a:ext>
+            </a:extLst>
+          </p:cNvPr>
+          <p:cNvSpPr/>
+          <p:nvPr/>
+        </p:nvSpPr>
+        <p:spPr>
+          <a:xfrm>
+            <a:off x="3505560" y="3194788"/>
+            <a:ext cx="914400" cy="360"/>
+          </a:xfrm>
+          <a:prstGeom prst="line">
+            <a:avLst/>
+          </a:prstGeom>
+          <a:ln w="25400">
+            <a:solidFill>
+              <a:srgbClr val="F59E0B"/>
+            </a:solidFill>
+            <a:round/>
+            <a:tailEnd type="triangle" w="med" len="med"/>
+          </a:ln>
+        </p:spPr>
+        <p:style>
+          <a:lnRef idx="0">
+            <a:scrgbClr r="0" g="0" b="0"/>
+          </a:lnRef>
+          <a:fillRef idx="0">
+            <a:scrgbClr r="0" g="0" b="0"/>
+          </a:fillRef>
+          <a:effectRef idx="0">
+            <a:scrgbClr r="0" g="0" b="0"/>
+          </a:effectRef>
+          <a:fontRef idx="minor"/>
+        </p:style>
+        <p:txBody>
+          <a:bodyPr lIns="90000" tIns="-44640" rIns="90000" bIns="-44640" anchor="t" anchorCtr="1">
+            <a:noAutofit/>
+          </a:bodyPr>
+          <a:lstStyle/>
+          <a:p>
+            <a:endParaRPr lang="en-US" sz="1800" b="0" u="none" strike="noStrike">
+              <a:solidFill>
+                <a:srgbClr val="000000"/>
+              </a:solidFill>
+              <a:effectLst/>
+              <a:uFillTx/>
+              <a:latin typeface="Arial"/>
+            </a:endParaRPr>
+          </a:p>
+        </p:txBody>
+      </p:sp>
+      <p:sp>
+        <p:nvSpPr>
+          <p:cNvPr id="32" name="Shape 6">
+            <a:extLst>
+              <a:ext uri="{FF2B5EF4-FFF2-40B4-BE49-F238E27FC236}">
+                <a16:creationId xmlns:a16="http://schemas.microsoft.com/office/drawing/2014/main" id="{1B867D23-B83A-455F-8BC7-F8D33F9ED5B5}"/>
+              </a:ext>
+            </a:extLst>
+          </p:cNvPr>
+          <p:cNvSpPr/>
+          <p:nvPr/>
+        </p:nvSpPr>
+        <p:spPr>
+          <a:xfrm>
+            <a:off x="4465680" y="2188948"/>
+            <a:ext cx="2925720" cy="2011320"/>
+          </a:xfrm>
+          <a:prstGeom prst="roundRect">
+            <a:avLst>
+              <a:gd name="adj" fmla="val 3636"/>
+            </a:avLst>
+          </a:prstGeom>
+          <a:solidFill>
+            <a:srgbClr val="DBEAFE"/>
+          </a:solidFill>
+          <a:ln w="19050">
+            <a:solidFill>
+              <a:srgbClr val="2563EB"/>
+            </a:solidFill>
+            <a:round/>
+          </a:ln>
+        </p:spPr>
+        <p:style>
+          <a:lnRef idx="0">
+            <a:scrgbClr r="0" g="0" b="0"/>
+          </a:lnRef>
+          <a:fillRef idx="0">
+            <a:scrgbClr r="0" g="0" b="0"/>
+          </a:fillRef>
+          <a:effectRef idx="0">
+            <a:scrgbClr r="0" g="0" b="0"/>
+          </a:effectRef>
+          <a:fontRef idx="minor"/>
+        </p:style>
+        <p:txBody>
+          <a:bodyPr lIns="90000" tIns="45000" rIns="90000" bIns="45000" anchor="t">
+            <a:noAutofit/>
+          </a:bodyPr>
+          <a:lstStyle/>
+          <a:p>
+            <a:endParaRPr lang="en-US" sz="1800" b="0" u="none" strike="noStrike">
+              <a:solidFill>
+                <a:srgbClr val="000000"/>
+              </a:solidFill>
+              <a:effectLst/>
+              <a:uFillTx/>
+              <a:latin typeface="Arial"/>
+            </a:endParaRPr>
+          </a:p>
+        </p:txBody>
+      </p:sp>
+      <p:sp>
+        <p:nvSpPr>
+          <p:cNvPr id="33" name="Text 7">
+            <a:extLst>
+              <a:ext uri="{FF2B5EF4-FFF2-40B4-BE49-F238E27FC236}">
+                <a16:creationId xmlns:a16="http://schemas.microsoft.com/office/drawing/2014/main" id="{7F85303C-BAD4-4732-94FF-4BF14D4ACD93}"/>
+              </a:ext>
+            </a:extLst>
+          </p:cNvPr>
+          <p:cNvSpPr/>
+          <p:nvPr/>
+        </p:nvSpPr>
+        <p:spPr>
+          <a:xfrm>
+            <a:off x="4968600" y="2554708"/>
+            <a:ext cx="1919880" cy="347040"/>
+          </a:xfrm>
+          <a:prstGeom prst="rect">
+            <a:avLst/>
+          </a:prstGeom>
+          <a:noFill/>
+          <a:ln w="0">
+            <a:noFill/>
+          </a:ln>
+        </p:spPr>
+        <p:style>
+          <a:lnRef idx="0">
+            <a:scrgbClr r="0" g="0" b="0"/>
+          </a:lnRef>
+          <a:fillRef idx="0">
+            <a:scrgbClr r="0" g="0" b="0"/>
+          </a:fillRef>
+          <a:effectRef idx="0">
+            <a:scrgbClr r="0" g="0" b="0"/>
+          </a:effectRef>
+          <a:fontRef idx="minor"/>
+        </p:style>
+        <p:txBody>
+          <a:bodyPr lIns="0" tIns="0" rIns="0" bIns="0" anchor="ctr">
+            <a:noAutofit/>
+          </a:bodyPr>
+          <a:lstStyle/>
+          <a:p>
+            <a:pPr algn="ctr" defTabSz="914400">
+              <a:lnSpc>
+                <a:spcPct val="100000"/>
+              </a:lnSpc>
+              <a:tabLst>
+                <a:tab pos="0" algn="l"/>
+              </a:tabLst>
+            </a:pPr>
+            <a:r>
+              <a:rPr lang="en-US" sz="2000" b="1" u="none" strike="noStrike">
+                <a:solidFill>
+                  <a:srgbClr val="0F172A"/>
+                </a:solidFill>
+                <a:effectLst/>
+                <a:uFillTx/>
+                <a:latin typeface="Aptos"/>
+              </a:rPr>
+              <a:t>Feeding API</a:t>
+            </a:r>
+            <a:endParaRPr lang="en-US" sz="2000" b="0" u="none" strike="noStrike">
+              <a:solidFill>
+                <a:srgbClr val="000000"/>
+              </a:solidFill>
+              <a:effectLst/>
+              <a:uFillTx/>
+              <a:latin typeface="Arial"/>
+            </a:endParaRPr>
+          </a:p>
+        </p:txBody>
+      </p:sp>
+      <p:sp>
+        <p:nvSpPr>
+          <p:cNvPr id="34" name="Text 8">
+            <a:extLst>
+              <a:ext uri="{FF2B5EF4-FFF2-40B4-BE49-F238E27FC236}">
+                <a16:creationId xmlns:a16="http://schemas.microsoft.com/office/drawing/2014/main" id="{E751C2CF-B536-4C8C-9D86-C040B781B80D}"/>
+              </a:ext>
+            </a:extLst>
+          </p:cNvPr>
+          <p:cNvSpPr/>
+          <p:nvPr/>
+        </p:nvSpPr>
+        <p:spPr>
+          <a:xfrm>
+            <a:off x="4785720" y="3075988"/>
+            <a:ext cx="2285640" cy="594000"/>
+          </a:xfrm>
+          <a:prstGeom prst="rect">
+            <a:avLst/>
+          </a:prstGeom>
+          <a:noFill/>
+          <a:ln w="0">
+            <a:noFill/>
+          </a:ln>
+        </p:spPr>
+        <p:style>
+          <a:lnRef idx="0">
+            <a:scrgbClr r="0" g="0" b="0"/>
+          </a:lnRef>
+          <a:fillRef idx="0">
+            <a:scrgbClr r="0" g="0" b="0"/>
+          </a:fillRef>
+          <a:effectRef idx="0">
+            <a:scrgbClr r="0" g="0" b="0"/>
+          </a:effectRef>
+          <a:fontRef idx="minor"/>
+        </p:style>
+        <p:txBody>
+          <a:bodyPr lIns="0" tIns="0" rIns="0" bIns="0" anchor="ctr">
+            <a:noAutofit/>
+          </a:bodyPr>
+          <a:lstStyle/>
+          <a:p>
+            <a:pPr algn="ctr" defTabSz="914400">
+              <a:lnSpc>
+                <a:spcPct val="100000"/>
+              </a:lnSpc>
+              <a:tabLst>
+                <a:tab pos="0" algn="l"/>
+              </a:tabLst>
+            </a:pPr>
+            <a:r>
+              <a:rPr lang="en-US" sz="1250" b="0" u="none" strike="noStrike">
+                <a:solidFill>
+                  <a:srgbClr val="1E40AF"/>
+                </a:solidFill>
+                <a:effectLst/>
+                <a:uFillTx/>
+                <a:latin typeface="Courier New"/>
+                <a:ea typeface="Courier New"/>
+              </a:rPr>
+              <a:t>feedSpecies(speciesId, 0,</a:t>
+            </a:r>
+            <a:endParaRPr lang="en-US" sz="1250" b="0" u="none" strike="noStrike">
+              <a:solidFill>
+                <a:srgbClr val="000000"/>
+              </a:solidFill>
+              <a:effectLst/>
+              <a:uFillTx/>
+              <a:latin typeface="Arial"/>
+            </a:endParaRPr>
+          </a:p>
+          <a:p>
+            <a:pPr algn="ctr" defTabSz="914400">
+              <a:lnSpc>
+                <a:spcPct val="100000"/>
+              </a:lnSpc>
+              <a:tabLst>
+                <a:tab pos="0" algn="l"/>
+              </a:tabLst>
+            </a:pPr>
+            <a:r>
+              <a:rPr lang="en-US" sz="1250" b="0" u="none" strike="noStrike">
+                <a:solidFill>
+                  <a:srgbClr val="1E40AF"/>
+                </a:solidFill>
+                <a:effectLst/>
+                <a:uFillTx/>
+                <a:latin typeface="Courier New"/>
+                <a:ea typeface="Courier New"/>
+              </a:rPr>
+              <a:t>requestId, "automatic")</a:t>
+            </a:r>
+            <a:endParaRPr lang="en-US" sz="1250" b="0" u="none" strike="noStrike">
+              <a:solidFill>
+                <a:srgbClr val="000000"/>
+              </a:solidFill>
+              <a:effectLst/>
+              <a:uFillTx/>
+              <a:latin typeface="Arial"/>
+            </a:endParaRPr>
+          </a:p>
+        </p:txBody>
+      </p:sp>
+      <p:sp>
+        <p:nvSpPr>
+          <p:cNvPr id="35" name="Shape 9">
+            <a:extLst>
+              <a:ext uri="{FF2B5EF4-FFF2-40B4-BE49-F238E27FC236}">
+                <a16:creationId xmlns:a16="http://schemas.microsoft.com/office/drawing/2014/main" id="{C95F1AAF-36F3-46C2-9B63-A39C4445E989}"/>
+              </a:ext>
+            </a:extLst>
+          </p:cNvPr>
+          <p:cNvSpPr/>
+          <p:nvPr/>
+        </p:nvSpPr>
+        <p:spPr>
+          <a:xfrm>
+            <a:off x="7437480" y="3194788"/>
+            <a:ext cx="914400" cy="360"/>
+          </a:xfrm>
+          <a:prstGeom prst="line">
+            <a:avLst/>
+          </a:prstGeom>
+          <a:ln w="25400">
+            <a:solidFill>
+              <a:srgbClr val="2563EB"/>
+            </a:solidFill>
+            <a:round/>
+            <a:tailEnd type="triangle" w="med" len="med"/>
+          </a:ln>
+        </p:spPr>
+        <p:style>
+          <a:lnRef idx="0">
+            <a:scrgbClr r="0" g="0" b="0"/>
+          </a:lnRef>
+          <a:fillRef idx="0">
+            <a:scrgbClr r="0" g="0" b="0"/>
+          </a:fillRef>
+          <a:effectRef idx="0">
+            <a:scrgbClr r="0" g="0" b="0"/>
+          </a:effectRef>
+          <a:fontRef idx="minor"/>
+        </p:style>
+        <p:txBody>
+          <a:bodyPr lIns="90000" tIns="-44640" rIns="90000" bIns="-44640" anchor="t" anchorCtr="1">
+            <a:noAutofit/>
+          </a:bodyPr>
+          <a:lstStyle/>
+          <a:p>
+            <a:endParaRPr lang="en-US" sz="1800" b="0" u="none" strike="noStrike">
+              <a:solidFill>
+                <a:srgbClr val="000000"/>
+              </a:solidFill>
+              <a:effectLst/>
+              <a:uFillTx/>
+              <a:latin typeface="Arial"/>
+            </a:endParaRPr>
+          </a:p>
+        </p:txBody>
+      </p:sp>
+      <p:sp>
+        <p:nvSpPr>
+          <p:cNvPr id="36" name="Shape 10">
+            <a:extLst>
+              <a:ext uri="{FF2B5EF4-FFF2-40B4-BE49-F238E27FC236}">
+                <a16:creationId xmlns:a16="http://schemas.microsoft.com/office/drawing/2014/main" id="{7220B72E-DC78-4053-A853-EDBEB0FEE7DD}"/>
+              </a:ext>
+            </a:extLst>
+          </p:cNvPr>
+          <p:cNvSpPr/>
+          <p:nvPr/>
+        </p:nvSpPr>
+        <p:spPr>
+          <a:xfrm>
+            <a:off x="8397600" y="2188948"/>
+            <a:ext cx="2651400" cy="2011320"/>
+          </a:xfrm>
+          <a:prstGeom prst="roundRect">
+            <a:avLst>
+              <a:gd name="adj" fmla="val 3636"/>
+            </a:avLst>
+          </a:prstGeom>
+          <a:solidFill>
+            <a:srgbClr val="DCFCE7"/>
+          </a:solidFill>
+          <a:ln w="19050">
+            <a:solidFill>
+              <a:srgbClr val="16A34A"/>
+            </a:solidFill>
+            <a:round/>
+          </a:ln>
+        </p:spPr>
+        <p:style>
+          <a:lnRef idx="0">
+            <a:scrgbClr r="0" g="0" b="0"/>
+          </a:lnRef>
+          <a:fillRef idx="0">
+            <a:scrgbClr r="0" g="0" b="0"/>
+          </a:fillRef>
+          <a:effectRef idx="0">
+            <a:scrgbClr r="0" g="0" b="0"/>
+          </a:effectRef>
+          <a:fontRef idx="minor"/>
+        </p:style>
+        <p:txBody>
+          <a:bodyPr lIns="90000" tIns="45000" rIns="90000" bIns="45000" anchor="t">
+            <a:noAutofit/>
+          </a:bodyPr>
+          <a:lstStyle/>
+          <a:p>
+            <a:endParaRPr lang="en-US" sz="1800" b="0" u="none" strike="noStrike">
+              <a:solidFill>
+                <a:srgbClr val="000000"/>
+              </a:solidFill>
+              <a:effectLst/>
+              <a:uFillTx/>
+              <a:latin typeface="Arial"/>
+            </a:endParaRPr>
+          </a:p>
+        </p:txBody>
+      </p:sp>
+      <p:sp>
+        <p:nvSpPr>
+          <p:cNvPr id="37" name="Text 11">
+            <a:extLst>
+              <a:ext uri="{FF2B5EF4-FFF2-40B4-BE49-F238E27FC236}">
+                <a16:creationId xmlns:a16="http://schemas.microsoft.com/office/drawing/2014/main" id="{C8AC3F86-F653-49E9-8BF2-0BEDE9375EBB}"/>
+              </a:ext>
+            </a:extLst>
+          </p:cNvPr>
+          <p:cNvSpPr/>
+          <p:nvPr/>
+        </p:nvSpPr>
+        <p:spPr>
+          <a:xfrm>
+            <a:off x="8854800" y="2554708"/>
+            <a:ext cx="1737000" cy="347040"/>
+          </a:xfrm>
+          <a:prstGeom prst="rect">
+            <a:avLst/>
+          </a:prstGeom>
+          <a:noFill/>
+          <a:ln w="0">
+            <a:noFill/>
+          </a:ln>
+        </p:spPr>
+        <p:style>
+          <a:lnRef idx="0">
+            <a:scrgbClr r="0" g="0" b="0"/>
+          </a:lnRef>
+          <a:fillRef idx="0">
+            <a:scrgbClr r="0" g="0" b="0"/>
+          </a:fillRef>
+          <a:effectRef idx="0">
+            <a:scrgbClr r="0" g="0" b="0"/>
+          </a:effectRef>
+          <a:fontRef idx="minor"/>
+        </p:style>
+        <p:txBody>
+          <a:bodyPr lIns="0" tIns="0" rIns="0" bIns="0" anchor="ctr">
+            <a:noAutofit/>
+          </a:bodyPr>
+          <a:lstStyle/>
+          <a:p>
+            <a:pPr algn="ctr" defTabSz="914400">
+              <a:lnSpc>
+                <a:spcPct val="100000"/>
+              </a:lnSpc>
+              <a:tabLst>
+                <a:tab pos="0" algn="l"/>
+              </a:tabLst>
+            </a:pPr>
+            <a:r>
+              <a:rPr lang="en-US" sz="2000" b="1" u="none" strike="noStrike">
+                <a:solidFill>
+                  <a:srgbClr val="0F172A"/>
+                </a:solidFill>
+                <a:effectLst/>
+                <a:uFillTx/>
+                <a:latin typeface="Aptos"/>
+              </a:rPr>
+              <a:t>Controller V1</a:t>
+            </a:r>
+            <a:endParaRPr lang="en-US" sz="2000" b="0" u="none" strike="noStrike">
+              <a:solidFill>
+                <a:srgbClr val="000000"/>
+              </a:solidFill>
+              <a:effectLst/>
+              <a:uFillTx/>
+              <a:latin typeface="Arial"/>
+            </a:endParaRPr>
+          </a:p>
+        </p:txBody>
+      </p:sp>
+      <p:sp>
+        <p:nvSpPr>
+          <p:cNvPr id="38" name="Text 12">
+            <a:extLst>
+              <a:ext uri="{FF2B5EF4-FFF2-40B4-BE49-F238E27FC236}">
+                <a16:creationId xmlns:a16="http://schemas.microsoft.com/office/drawing/2014/main" id="{6FEF6F78-57A6-4ABF-BDCE-04302A46D075}"/>
+              </a:ext>
+            </a:extLst>
+          </p:cNvPr>
+          <p:cNvSpPr/>
+          <p:nvPr/>
+        </p:nvSpPr>
+        <p:spPr>
+          <a:xfrm>
+            <a:off x="8717640" y="3075988"/>
+            <a:ext cx="2011320" cy="594000"/>
+          </a:xfrm>
+          <a:prstGeom prst="rect">
+            <a:avLst/>
+          </a:prstGeom>
+          <a:noFill/>
+          <a:ln w="0">
+            <a:noFill/>
+          </a:ln>
+        </p:spPr>
+        <p:style>
+          <a:lnRef idx="0">
+            <a:scrgbClr r="0" g="0" b="0"/>
+          </a:lnRef>
+          <a:fillRef idx="0">
+            <a:scrgbClr r="0" g="0" b="0"/>
+          </a:fillRef>
+          <a:effectRef idx="0">
+            <a:scrgbClr r="0" g="0" b="0"/>
+          </a:effectRef>
+          <a:fontRef idx="minor"/>
+        </p:style>
+        <p:txBody>
+          <a:bodyPr lIns="0" tIns="0" rIns="0" bIns="0" anchor="ctr">
+            <a:noAutofit/>
+          </a:bodyPr>
+          <a:lstStyle/>
+          <a:p>
+            <a:pPr algn="ctr" defTabSz="914400">
+              <a:lnSpc>
+                <a:spcPct val="100000"/>
+              </a:lnSpc>
+              <a:tabLst>
+                <a:tab pos="0" algn="l"/>
+              </a:tabLst>
+            </a:pPr>
+            <a:r>
+              <a:rPr lang="en-US" sz="1300" b="0" u="none" strike="noStrike">
+                <a:solidFill>
+                  <a:srgbClr val="166534"/>
+                </a:solidFill>
+                <a:effectLst/>
+                <a:uFillTx/>
+                <a:latin typeface="Aptos"/>
+              </a:rPr>
+              <a:t>Portion → Servo → Weight</a:t>
+            </a:r>
+            <a:endParaRPr lang="en-US" sz="1300" b="0" u="none" strike="noStrike">
+              <a:solidFill>
+                <a:srgbClr val="000000"/>
+              </a:solidFill>
+              <a:effectLst/>
+              <a:uFillTx/>
+              <a:latin typeface="Arial"/>
+            </a:endParaRPr>
+          </a:p>
+          <a:p>
+            <a:pPr algn="ctr" defTabSz="914400">
+              <a:lnSpc>
+                <a:spcPct val="100000"/>
+              </a:lnSpc>
+              <a:tabLst>
+                <a:tab pos="0" algn="l"/>
+              </a:tabLst>
+            </a:pPr>
+            <a:r>
+              <a:rPr lang="en-US" sz="1300" b="0" u="none" strike="noStrike">
+                <a:solidFill>
+                  <a:srgbClr val="166534"/>
+                </a:solidFill>
+                <a:effectLst/>
+                <a:uFillTx/>
+                <a:latin typeface="Aptos"/>
+              </a:rPr>
+              <a:t>→ History → Cooldown</a:t>
+            </a:r>
+            <a:endParaRPr lang="en-US" sz="1300" b="0" u="none" strike="noStrike">
+              <a:solidFill>
+                <a:srgbClr val="000000"/>
+              </a:solidFill>
+              <a:effectLst/>
+              <a:uFillTx/>
+              <a:latin typeface="Arial"/>
+            </a:endParaRPr>
+          </a:p>
+        </p:txBody>
+      </p:sp>
+      <p:sp>
+        <p:nvSpPr>
+          <p:cNvPr id="39" name="Shape 13">
+            <a:extLst>
+              <a:ext uri="{FF2B5EF4-FFF2-40B4-BE49-F238E27FC236}">
+                <a16:creationId xmlns:a16="http://schemas.microsoft.com/office/drawing/2014/main" id="{C4D7E87C-F1D2-45C6-9411-EC34D70D9EA1}"/>
+              </a:ext>
+            </a:extLst>
+          </p:cNvPr>
+          <p:cNvSpPr/>
+          <p:nvPr/>
+        </p:nvSpPr>
+        <p:spPr>
+          <a:xfrm>
+            <a:off x="988783" y="4673732"/>
+            <a:ext cx="2971440" cy="1142640"/>
+          </a:xfrm>
+          <a:prstGeom prst="roundRect">
+            <a:avLst>
+              <a:gd name="adj" fmla="val 4800"/>
+            </a:avLst>
+          </a:prstGeom>
+          <a:solidFill>
+            <a:srgbClr val="FFFFFF"/>
+          </a:solidFill>
+          <a:ln w="12700">
+            <a:solidFill>
+              <a:srgbClr val="E2E8F0"/>
+            </a:solidFill>
+            <a:round/>
+          </a:ln>
+        </p:spPr>
+        <p:style>
+          <a:lnRef idx="0">
+            <a:scrgbClr r="0" g="0" b="0"/>
+          </a:lnRef>
+          <a:fillRef idx="0">
+            <a:scrgbClr r="0" g="0" b="0"/>
+          </a:fillRef>
+          <a:effectRef idx="0">
+            <a:scrgbClr r="0" g="0" b="0"/>
+          </a:effectRef>
+          <a:fontRef idx="minor"/>
+        </p:style>
+        <p:txBody>
+          <a:bodyPr lIns="90000" tIns="45000" rIns="90000" bIns="45000" anchor="t">
+            <a:noAutofit/>
+          </a:bodyPr>
+          <a:lstStyle/>
+          <a:p>
+            <a:endParaRPr lang="en-US" sz="1800" b="0" u="none" strike="noStrike">
+              <a:solidFill>
+                <a:srgbClr val="000000"/>
+              </a:solidFill>
+              <a:effectLst/>
+              <a:uFillTx/>
+              <a:latin typeface="Arial"/>
+            </a:endParaRPr>
+          </a:p>
+        </p:txBody>
+      </p:sp>
+      <p:sp>
+        <p:nvSpPr>
+          <p:cNvPr id="40" name="Shape 14">
+            <a:extLst>
+              <a:ext uri="{FF2B5EF4-FFF2-40B4-BE49-F238E27FC236}">
+                <a16:creationId xmlns:a16="http://schemas.microsoft.com/office/drawing/2014/main" id="{28ECD5B2-D546-4C9A-B58B-E6674B70D196}"/>
+              </a:ext>
+            </a:extLst>
+          </p:cNvPr>
+          <p:cNvSpPr/>
+          <p:nvPr/>
+        </p:nvSpPr>
+        <p:spPr>
+          <a:xfrm>
+            <a:off x="988783" y="4673732"/>
+            <a:ext cx="54360" cy="1142640"/>
+          </a:xfrm>
+          <a:prstGeom prst="rect">
+            <a:avLst/>
+          </a:prstGeom>
+          <a:solidFill>
+            <a:srgbClr val="2563EB"/>
+          </a:solidFill>
+          <a:ln w="12700">
+            <a:solidFill>
+              <a:srgbClr val="2563EB"/>
+            </a:solidFill>
+            <a:round/>
+          </a:ln>
+        </p:spPr>
+        <p:style>
+          <a:lnRef idx="0">
+            <a:scrgbClr r="0" g="0" b="0"/>
+          </a:lnRef>
+          <a:fillRef idx="0">
+            <a:scrgbClr r="0" g="0" b="0"/>
+          </a:fillRef>
+          <a:effectRef idx="0">
+            <a:scrgbClr r="0" g="0" b="0"/>
+          </a:effectRef>
+          <a:fontRef idx="minor"/>
+        </p:style>
+        <p:txBody>
+          <a:bodyPr lIns="90000" tIns="45000" rIns="90000" bIns="45000" anchor="t">
+            <a:noAutofit/>
+          </a:bodyPr>
+          <a:lstStyle/>
+          <a:p>
+            <a:endParaRPr lang="en-US" sz="1800" b="0" u="none" strike="noStrike">
+              <a:solidFill>
+                <a:srgbClr val="FFFFFF"/>
+              </a:solidFill>
+              <a:effectLst/>
+              <a:uFillTx/>
+              <a:latin typeface="Arial"/>
+            </a:endParaRPr>
+          </a:p>
+        </p:txBody>
+      </p:sp>
+      <p:sp>
+        <p:nvSpPr>
+          <p:cNvPr id="41" name="Text 15">
+            <a:extLst>
+              <a:ext uri="{FF2B5EF4-FFF2-40B4-BE49-F238E27FC236}">
+                <a16:creationId xmlns:a16="http://schemas.microsoft.com/office/drawing/2014/main" id="{43CEFBAC-46A3-4887-9CEC-55891958CFF4}"/>
+              </a:ext>
+            </a:extLst>
+          </p:cNvPr>
+          <p:cNvSpPr/>
+          <p:nvPr/>
+        </p:nvSpPr>
+        <p:spPr>
+          <a:xfrm>
+            <a:off x="1190023" y="4819892"/>
+            <a:ext cx="2605680" cy="273960"/>
+          </a:xfrm>
+          <a:prstGeom prst="rect">
+            <a:avLst/>
+          </a:prstGeom>
+          <a:noFill/>
+          <a:ln w="0">
+            <a:noFill/>
+          </a:ln>
+        </p:spPr>
+        <p:style>
+          <a:lnRef idx="0">
+            <a:scrgbClr r="0" g="0" b="0"/>
+          </a:lnRef>
+          <a:fillRef idx="0">
+            <a:scrgbClr r="0" g="0" b="0"/>
+          </a:fillRef>
+          <a:effectRef idx="0">
+            <a:scrgbClr r="0" g="0" b="0"/>
+          </a:effectRef>
+          <a:fontRef idx="minor"/>
+        </p:style>
+        <p:txBody>
+          <a:bodyPr lIns="0" tIns="0" rIns="0" bIns="0" anchor="ctr">
+            <a:noAutofit/>
+          </a:bodyPr>
+          <a:lstStyle/>
+          <a:p>
+            <a:pPr defTabSz="914400">
+              <a:lnSpc>
+                <a:spcPct val="100000"/>
+              </a:lnSpc>
+              <a:tabLst>
+                <a:tab pos="0" algn="l"/>
+              </a:tabLst>
+            </a:pPr>
+            <a:r>
+              <a:rPr lang="en-US" sz="1400" b="1" u="none" strike="noStrike">
+                <a:solidFill>
+                  <a:srgbClr val="0F172A"/>
+                </a:solidFill>
+                <a:effectLst/>
+                <a:uFillTx/>
+                <a:latin typeface="Aptos"/>
+              </a:rPr>
+              <a:t>Ý nghĩa target = 0</a:t>
+            </a:r>
+            <a:endParaRPr lang="en-US" sz="1400" b="0" u="none" strike="noStrike">
+              <a:solidFill>
+                <a:srgbClr val="000000"/>
+              </a:solidFill>
+              <a:effectLst/>
+              <a:uFillTx/>
+              <a:latin typeface="Arial"/>
+            </a:endParaRPr>
+          </a:p>
+        </p:txBody>
+      </p:sp>
+      <p:sp>
+        <p:nvSpPr>
+          <p:cNvPr id="42" name="Text 16">
+            <a:extLst>
+              <a:ext uri="{FF2B5EF4-FFF2-40B4-BE49-F238E27FC236}">
+                <a16:creationId xmlns:a16="http://schemas.microsoft.com/office/drawing/2014/main" id="{0108075E-4C1F-4A42-AA25-3377C821D64E}"/>
+              </a:ext>
+            </a:extLst>
+          </p:cNvPr>
+          <p:cNvSpPr/>
+          <p:nvPr/>
+        </p:nvSpPr>
+        <p:spPr>
+          <a:xfrm>
+            <a:off x="1190023" y="5204012"/>
+            <a:ext cx="2605680" cy="484200"/>
+          </a:xfrm>
+          <a:prstGeom prst="rect">
+            <a:avLst/>
+          </a:prstGeom>
+          <a:noFill/>
+          <a:ln w="0">
+            <a:noFill/>
+          </a:ln>
+        </p:spPr>
+        <p:style>
+          <a:lnRef idx="0">
+            <a:scrgbClr r="0" g="0" b="0"/>
+          </a:lnRef>
+          <a:fillRef idx="0">
+            <a:scrgbClr r="0" g="0" b="0"/>
+          </a:fillRef>
+          <a:effectRef idx="0">
+            <a:scrgbClr r="0" g="0" b="0"/>
+          </a:effectRef>
+          <a:fontRef idx="minor"/>
+        </p:style>
+        <p:txBody>
+          <a:bodyPr lIns="360" tIns="360" rIns="360" bIns="360" anchor="t">
+            <a:normAutofit/>
+          </a:bodyPr>
+          <a:lstStyle/>
+          <a:p>
+            <a:pPr defTabSz="914400">
+              <a:lnSpc>
+                <a:spcPct val="100000"/>
+              </a:lnSpc>
+              <a:tabLst>
+                <a:tab pos="0" algn="l"/>
+              </a:tabLst>
+            </a:pPr>
+            <a:r>
+              <a:rPr lang="en-US" sz="1120" b="0" u="none" strike="noStrike">
+                <a:solidFill>
+                  <a:srgbClr val="334155"/>
+                </a:solidFill>
+                <a:effectLst/>
+                <a:uFillTx/>
+                <a:latin typeface="Aptos"/>
+              </a:rPr>
+              <a:t>Controller tự lấy portion từ Firebase hoặc default.</a:t>
+            </a:r>
+            <a:endParaRPr lang="en-US" sz="1120" b="0" u="none" strike="noStrike">
+              <a:solidFill>
+                <a:srgbClr val="000000"/>
+              </a:solidFill>
+              <a:effectLst/>
+              <a:uFillTx/>
+              <a:latin typeface="Arial"/>
+            </a:endParaRPr>
+          </a:p>
+        </p:txBody>
+      </p:sp>
+      <p:sp>
+        <p:nvSpPr>
+          <p:cNvPr id="43" name="Shape 17">
+            <a:extLst>
+              <a:ext uri="{FF2B5EF4-FFF2-40B4-BE49-F238E27FC236}">
+                <a16:creationId xmlns:a16="http://schemas.microsoft.com/office/drawing/2014/main" id="{BF8EC3E9-FE56-4DFD-9534-C81F74F047F4}"/>
+              </a:ext>
+            </a:extLst>
+          </p:cNvPr>
+          <p:cNvSpPr/>
+          <p:nvPr/>
+        </p:nvSpPr>
+        <p:spPr>
+          <a:xfrm>
+            <a:off x="4463503" y="4673732"/>
+            <a:ext cx="2971440" cy="1142640"/>
+          </a:xfrm>
+          <a:prstGeom prst="roundRect">
+            <a:avLst>
+              <a:gd name="adj" fmla="val 4800"/>
+            </a:avLst>
+          </a:prstGeom>
+          <a:solidFill>
+            <a:srgbClr val="FFFFFF"/>
+          </a:solidFill>
+          <a:ln w="12700">
+            <a:solidFill>
+              <a:srgbClr val="E2E8F0"/>
+            </a:solidFill>
+            <a:round/>
+          </a:ln>
+        </p:spPr>
+        <p:style>
+          <a:lnRef idx="0">
+            <a:scrgbClr r="0" g="0" b="0"/>
+          </a:lnRef>
+          <a:fillRef idx="0">
+            <a:scrgbClr r="0" g="0" b="0"/>
+          </a:fillRef>
+          <a:effectRef idx="0">
+            <a:scrgbClr r="0" g="0" b="0"/>
+          </a:effectRef>
+          <a:fontRef idx="minor"/>
+        </p:style>
+        <p:txBody>
+          <a:bodyPr lIns="90000" tIns="45000" rIns="90000" bIns="45000" anchor="t">
+            <a:noAutofit/>
+          </a:bodyPr>
+          <a:lstStyle/>
+          <a:p>
+            <a:endParaRPr lang="en-US" sz="1800" b="0" u="none" strike="noStrike">
+              <a:solidFill>
+                <a:srgbClr val="000000"/>
+              </a:solidFill>
+              <a:effectLst/>
+              <a:uFillTx/>
+              <a:latin typeface="Arial"/>
+            </a:endParaRPr>
+          </a:p>
+        </p:txBody>
+      </p:sp>
+      <p:sp>
+        <p:nvSpPr>
+          <p:cNvPr id="44" name="Shape 18">
+            <a:extLst>
+              <a:ext uri="{FF2B5EF4-FFF2-40B4-BE49-F238E27FC236}">
+                <a16:creationId xmlns:a16="http://schemas.microsoft.com/office/drawing/2014/main" id="{A2BD4C46-FDA0-4255-BF80-5C27F28E7E6B}"/>
+              </a:ext>
+            </a:extLst>
+          </p:cNvPr>
+          <p:cNvSpPr/>
+          <p:nvPr/>
+        </p:nvSpPr>
+        <p:spPr>
+          <a:xfrm>
+            <a:off x="4463503" y="4673732"/>
+            <a:ext cx="54360" cy="1142640"/>
+          </a:xfrm>
+          <a:prstGeom prst="rect">
+            <a:avLst/>
+          </a:prstGeom>
+          <a:solidFill>
+            <a:srgbClr val="16A34A"/>
+          </a:solidFill>
+          <a:ln w="12700">
+            <a:solidFill>
+              <a:srgbClr val="16A34A"/>
+            </a:solidFill>
+            <a:round/>
+          </a:ln>
+        </p:spPr>
+        <p:style>
+          <a:lnRef idx="0">
+            <a:scrgbClr r="0" g="0" b="0"/>
+          </a:lnRef>
+          <a:fillRef idx="0">
+            <a:scrgbClr r="0" g="0" b="0"/>
+          </a:fillRef>
+          <a:effectRef idx="0">
+            <a:scrgbClr r="0" g="0" b="0"/>
+          </a:effectRef>
+          <a:fontRef idx="minor"/>
+        </p:style>
+        <p:txBody>
+          <a:bodyPr lIns="90000" tIns="45000" rIns="90000" bIns="45000" anchor="t">
+            <a:noAutofit/>
+          </a:bodyPr>
+          <a:lstStyle/>
+          <a:p>
+            <a:endParaRPr lang="en-US" sz="1800" b="0" u="none" strike="noStrike">
+              <a:solidFill>
+                <a:srgbClr val="FFFFFF"/>
+              </a:solidFill>
+              <a:effectLst/>
+              <a:uFillTx/>
+              <a:latin typeface="Arial"/>
+            </a:endParaRPr>
+          </a:p>
+        </p:txBody>
+      </p:sp>
+      <p:sp>
+        <p:nvSpPr>
+          <p:cNvPr id="45" name="Text 19">
+            <a:extLst>
+              <a:ext uri="{FF2B5EF4-FFF2-40B4-BE49-F238E27FC236}">
+                <a16:creationId xmlns:a16="http://schemas.microsoft.com/office/drawing/2014/main" id="{04053F69-0C8A-45E9-963E-7FC419F8F8FD}"/>
+              </a:ext>
+            </a:extLst>
+          </p:cNvPr>
+          <p:cNvSpPr/>
+          <p:nvPr/>
+        </p:nvSpPr>
+        <p:spPr>
+          <a:xfrm>
+            <a:off x="4664743" y="4819892"/>
+            <a:ext cx="2605680" cy="273960"/>
+          </a:xfrm>
+          <a:prstGeom prst="rect">
+            <a:avLst/>
+          </a:prstGeom>
+          <a:noFill/>
+          <a:ln w="0">
+            <a:noFill/>
+          </a:ln>
+        </p:spPr>
+        <p:style>
+          <a:lnRef idx="0">
+            <a:scrgbClr r="0" g="0" b="0"/>
+          </a:lnRef>
+          <a:fillRef idx="0">
+            <a:scrgbClr r="0" g="0" b="0"/>
+          </a:fillRef>
+          <a:effectRef idx="0">
+            <a:scrgbClr r="0" g="0" b="0"/>
+          </a:effectRef>
+          <a:fontRef idx="minor"/>
+        </p:style>
+        <p:txBody>
+          <a:bodyPr lIns="0" tIns="0" rIns="0" bIns="0" anchor="ctr">
+            <a:noAutofit/>
+          </a:bodyPr>
+          <a:lstStyle/>
+          <a:p>
+            <a:pPr defTabSz="914400">
+              <a:lnSpc>
+                <a:spcPct val="100000"/>
+              </a:lnSpc>
+              <a:tabLst>
+                <a:tab pos="0" algn="l"/>
+              </a:tabLst>
+            </a:pPr>
+            <a:r>
+              <a:rPr lang="en-US" sz="1400" b="1" u="none" strike="noStrike">
+                <a:solidFill>
+                  <a:srgbClr val="0F172A"/>
+                </a:solidFill>
+                <a:effectLst/>
+                <a:uFillTx/>
+                <a:latin typeface="Aptos"/>
+              </a:rPr>
+              <a:t>Lợi ích</a:t>
+            </a:r>
+            <a:endParaRPr lang="en-US" sz="1400" b="0" u="none" strike="noStrike">
+              <a:solidFill>
+                <a:srgbClr val="000000"/>
+              </a:solidFill>
+              <a:effectLst/>
+              <a:uFillTx/>
+              <a:latin typeface="Arial"/>
+            </a:endParaRPr>
+          </a:p>
+        </p:txBody>
+      </p:sp>
+      <p:sp>
+        <p:nvSpPr>
+          <p:cNvPr id="46" name="Text 20">
+            <a:extLst>
+              <a:ext uri="{FF2B5EF4-FFF2-40B4-BE49-F238E27FC236}">
+                <a16:creationId xmlns:a16="http://schemas.microsoft.com/office/drawing/2014/main" id="{1759D5BF-A645-4071-8A93-CD13FE5DF499}"/>
+              </a:ext>
+            </a:extLst>
+          </p:cNvPr>
+          <p:cNvSpPr/>
+          <p:nvPr/>
+        </p:nvSpPr>
+        <p:spPr>
+          <a:xfrm>
+            <a:off x="4664743" y="5204012"/>
+            <a:ext cx="2605680" cy="484200"/>
+          </a:xfrm>
+          <a:prstGeom prst="rect">
+            <a:avLst/>
+          </a:prstGeom>
+          <a:noFill/>
+          <a:ln w="0">
+            <a:noFill/>
+          </a:ln>
+        </p:spPr>
+        <p:style>
+          <a:lnRef idx="0">
+            <a:scrgbClr r="0" g="0" b="0"/>
+          </a:lnRef>
+          <a:fillRef idx="0">
+            <a:scrgbClr r="0" g="0" b="0"/>
+          </a:fillRef>
+          <a:effectRef idx="0">
+            <a:scrgbClr r="0" g="0" b="0"/>
+          </a:effectRef>
+          <a:fontRef idx="minor"/>
+        </p:style>
+        <p:txBody>
+          <a:bodyPr lIns="360" tIns="360" rIns="360" bIns="360" anchor="t">
+            <a:normAutofit/>
+          </a:bodyPr>
+          <a:lstStyle/>
+          <a:p>
+            <a:pPr defTabSz="914400">
+              <a:lnSpc>
+                <a:spcPct val="100000"/>
+              </a:lnSpc>
+              <a:tabLst>
+                <a:tab pos="0" algn="l"/>
+              </a:tabLst>
+            </a:pPr>
+            <a:r>
+              <a:rPr lang="en-US" sz="1120" b="0" u="none" strike="noStrike">
+                <a:solidFill>
+                  <a:srgbClr val="334155"/>
+                </a:solidFill>
+                <a:effectLst/>
+                <a:uFillTx/>
+                <a:latin typeface="Aptos"/>
+              </a:rPr>
+              <a:t>AI và cơ cấu cấp thức ăn được tách rời, dễ debug.</a:t>
+            </a:r>
+            <a:endParaRPr lang="en-US" sz="1120" b="0" u="none" strike="noStrike">
+              <a:solidFill>
+                <a:srgbClr val="000000"/>
+              </a:solidFill>
+              <a:effectLst/>
+              <a:uFillTx/>
+              <a:latin typeface="Arial"/>
+            </a:endParaRPr>
+          </a:p>
+        </p:txBody>
+      </p:sp>
+      <p:sp>
+        <p:nvSpPr>
+          <p:cNvPr id="47" name="Shape 21">
+            <a:extLst>
+              <a:ext uri="{FF2B5EF4-FFF2-40B4-BE49-F238E27FC236}">
+                <a16:creationId xmlns:a16="http://schemas.microsoft.com/office/drawing/2014/main" id="{DFED10BC-7795-44E3-87ED-E708CE254D88}"/>
+              </a:ext>
+            </a:extLst>
+          </p:cNvPr>
+          <p:cNvSpPr/>
+          <p:nvPr/>
+        </p:nvSpPr>
+        <p:spPr>
+          <a:xfrm>
+            <a:off x="7938223" y="4673732"/>
+            <a:ext cx="2971440" cy="1142640"/>
+          </a:xfrm>
+          <a:prstGeom prst="roundRect">
+            <a:avLst>
+              <a:gd name="adj" fmla="val 4800"/>
+            </a:avLst>
+          </a:prstGeom>
+          <a:solidFill>
+            <a:srgbClr val="FFFFFF"/>
+          </a:solidFill>
+          <a:ln w="12700">
+            <a:solidFill>
+              <a:srgbClr val="E2E8F0"/>
+            </a:solidFill>
+            <a:round/>
+          </a:ln>
+        </p:spPr>
+        <p:style>
+          <a:lnRef idx="0">
+            <a:scrgbClr r="0" g="0" b="0"/>
+          </a:lnRef>
+          <a:fillRef idx="0">
+            <a:scrgbClr r="0" g="0" b="0"/>
+          </a:fillRef>
+          <a:effectRef idx="0">
+            <a:scrgbClr r="0" g="0" b="0"/>
+          </a:effectRef>
+          <a:fontRef idx="minor"/>
+        </p:style>
+        <p:txBody>
+          <a:bodyPr lIns="90000" tIns="45000" rIns="90000" bIns="45000" anchor="t">
+            <a:noAutofit/>
+          </a:bodyPr>
+          <a:lstStyle/>
+          <a:p>
+            <a:endParaRPr lang="en-US" sz="1800" b="0" u="none" strike="noStrike">
+              <a:solidFill>
+                <a:srgbClr val="000000"/>
+              </a:solidFill>
+              <a:effectLst/>
+              <a:uFillTx/>
+              <a:latin typeface="Arial"/>
+            </a:endParaRPr>
+          </a:p>
+        </p:txBody>
+      </p:sp>
+      <p:sp>
+        <p:nvSpPr>
+          <p:cNvPr id="48" name="Shape 22">
+            <a:extLst>
+              <a:ext uri="{FF2B5EF4-FFF2-40B4-BE49-F238E27FC236}">
+                <a16:creationId xmlns:a16="http://schemas.microsoft.com/office/drawing/2014/main" id="{7AF2E9F3-7218-4BB0-91A2-5A88D5618696}"/>
+              </a:ext>
+            </a:extLst>
+          </p:cNvPr>
+          <p:cNvSpPr/>
+          <p:nvPr/>
+        </p:nvSpPr>
+        <p:spPr>
+          <a:xfrm>
+            <a:off x="7938223" y="4673732"/>
+            <a:ext cx="54360" cy="1142640"/>
+          </a:xfrm>
+          <a:prstGeom prst="rect">
+            <a:avLst/>
+          </a:prstGeom>
+          <a:solidFill>
+            <a:srgbClr val="EA580C"/>
+          </a:solidFill>
+          <a:ln w="12700">
+            <a:solidFill>
+              <a:srgbClr val="EA580C"/>
+            </a:solidFill>
+            <a:round/>
+          </a:ln>
+        </p:spPr>
+        <p:style>
+          <a:lnRef idx="0">
+            <a:scrgbClr r="0" g="0" b="0"/>
+          </a:lnRef>
+          <a:fillRef idx="0">
+            <a:scrgbClr r="0" g="0" b="0"/>
+          </a:fillRef>
+          <a:effectRef idx="0">
+            <a:scrgbClr r="0" g="0" b="0"/>
+          </a:effectRef>
+          <a:fontRef idx="minor"/>
+        </p:style>
+        <p:txBody>
+          <a:bodyPr lIns="90000" tIns="45000" rIns="90000" bIns="45000" anchor="t">
+            <a:noAutofit/>
+          </a:bodyPr>
+          <a:lstStyle/>
+          <a:p>
+            <a:endParaRPr lang="en-US" sz="1800" b="0" u="none" strike="noStrike">
+              <a:solidFill>
+                <a:srgbClr val="FFFFFF"/>
+              </a:solidFill>
+              <a:effectLst/>
+              <a:uFillTx/>
+              <a:latin typeface="Arial"/>
+            </a:endParaRPr>
+          </a:p>
+        </p:txBody>
+      </p:sp>
+      <p:sp>
+        <p:nvSpPr>
+          <p:cNvPr id="49" name="Text 23">
+            <a:extLst>
+              <a:ext uri="{FF2B5EF4-FFF2-40B4-BE49-F238E27FC236}">
+                <a16:creationId xmlns:a16="http://schemas.microsoft.com/office/drawing/2014/main" id="{082361F4-698C-4345-9421-9ADB8D9A9DA3}"/>
+              </a:ext>
+            </a:extLst>
+          </p:cNvPr>
+          <p:cNvSpPr/>
+          <p:nvPr/>
+        </p:nvSpPr>
+        <p:spPr>
+          <a:xfrm>
+            <a:off x="8139463" y="4819892"/>
+            <a:ext cx="2605680" cy="273960"/>
+          </a:xfrm>
+          <a:prstGeom prst="rect">
+            <a:avLst/>
+          </a:prstGeom>
+          <a:noFill/>
+          <a:ln w="0">
+            <a:noFill/>
+          </a:ln>
+        </p:spPr>
+        <p:style>
+          <a:lnRef idx="0">
+            <a:scrgbClr r="0" g="0" b="0"/>
+          </a:lnRef>
+          <a:fillRef idx="0">
+            <a:scrgbClr r="0" g="0" b="0"/>
+          </a:fillRef>
+          <a:effectRef idx="0">
+            <a:scrgbClr r="0" g="0" b="0"/>
+          </a:effectRef>
+          <a:fontRef idx="minor"/>
+        </p:style>
+        <p:txBody>
+          <a:bodyPr lIns="0" tIns="0" rIns="0" bIns="0" anchor="ctr">
+            <a:noAutofit/>
+          </a:bodyPr>
+          <a:lstStyle/>
+          <a:p>
+            <a:pPr defTabSz="914400">
+              <a:lnSpc>
+                <a:spcPct val="100000"/>
+              </a:lnSpc>
+              <a:tabLst>
+                <a:tab pos="0" algn="l"/>
+              </a:tabLst>
+            </a:pPr>
+            <a:r>
+              <a:rPr lang="en-US" sz="1400" b="1" u="none" strike="noStrike">
+                <a:solidFill>
+                  <a:srgbClr val="0F172A"/>
+                </a:solidFill>
+                <a:effectLst/>
+                <a:uFillTx/>
+                <a:latin typeface="Aptos"/>
+              </a:rPr>
+              <a:t>Bước tiếp theo</a:t>
+            </a:r>
+            <a:endParaRPr lang="en-US" sz="1400" b="0" u="none" strike="noStrike">
+              <a:solidFill>
+                <a:srgbClr val="000000"/>
+              </a:solidFill>
+              <a:effectLst/>
+              <a:uFillTx/>
+              <a:latin typeface="Arial"/>
+            </a:endParaRPr>
+          </a:p>
+        </p:txBody>
+      </p:sp>
+      <p:sp>
+        <p:nvSpPr>
+          <p:cNvPr id="50" name="Text 24">
+            <a:extLst>
+              <a:ext uri="{FF2B5EF4-FFF2-40B4-BE49-F238E27FC236}">
+                <a16:creationId xmlns:a16="http://schemas.microsoft.com/office/drawing/2014/main" id="{8AE0EE01-7587-4E65-930C-399A3CE067FE}"/>
+              </a:ext>
+            </a:extLst>
+          </p:cNvPr>
+          <p:cNvSpPr/>
+          <p:nvPr/>
+        </p:nvSpPr>
+        <p:spPr>
+          <a:xfrm>
+            <a:off x="8139463" y="5204012"/>
+            <a:ext cx="2605680" cy="484200"/>
+          </a:xfrm>
+          <a:prstGeom prst="rect">
+            <a:avLst/>
+          </a:prstGeom>
+          <a:noFill/>
+          <a:ln w="0">
+            <a:noFill/>
+          </a:ln>
+        </p:spPr>
+        <p:style>
+          <a:lnRef idx="0">
+            <a:scrgbClr r="0" g="0" b="0"/>
+          </a:lnRef>
+          <a:fillRef idx="0">
+            <a:scrgbClr r="0" g="0" b="0"/>
+          </a:fillRef>
+          <a:effectRef idx="0">
+            <a:scrgbClr r="0" g="0" b="0"/>
+          </a:effectRef>
+          <a:fontRef idx="minor"/>
+        </p:style>
+        <p:txBody>
+          <a:bodyPr lIns="360" tIns="360" rIns="360" bIns="360" anchor="t">
+            <a:normAutofit/>
+          </a:bodyPr>
+          <a:lstStyle/>
+          <a:p>
+            <a:pPr defTabSz="914400">
+              <a:lnSpc>
+                <a:spcPct val="100000"/>
+              </a:lnSpc>
+              <a:tabLst>
+                <a:tab pos="0" algn="l"/>
+              </a:tabLst>
+            </a:pPr>
+            <a:r>
+              <a:rPr lang="en-US" sz="1120" b="0" u="none" strike="noStrike">
+                <a:solidFill>
+                  <a:srgbClr val="334155"/>
+                </a:solidFill>
+                <a:effectLst/>
+                <a:uFillTx/>
+                <a:latin typeface="Aptos"/>
+              </a:rPr>
+              <a:t>Deploy classifier INT8 trên ESP32-S3 và tuning confidence threshold.</a:t>
+            </a:r>
+            <a:endParaRPr lang="en-US" sz="1120" b="0" u="none" strike="noStrike">
+              <a:solidFill>
+                <a:srgbClr val="000000"/>
+              </a:solidFill>
+              <a:effectLst/>
+              <a:uFillTx/>
+              <a:latin typeface="Arial"/>
+            </a:endParaRPr>
           </a:p>
         </p:txBody>
       </p:sp>
     </p:spTree>
     <p:extLst>
       <p:ext uri="{BB962C8B-B14F-4D97-AF65-F5344CB8AC3E}">
-        <p14:creationId xmlns:p14="http://schemas.microsoft.com/office/powerpoint/2010/main" val="2227037035"/>
+        <p14:creationId xmlns:p14="http://schemas.microsoft.com/office/powerpoint/2010/main" val="2068220818"/>
       </p:ext>
     </p:extLst>
   </p:cSld>
@@ -3129,15 +4841,38 @@
             </a:pPr>
             <a:r>
               <a:rPr lang="en-US"/>
-              <a:t>Propose Model</a:t>
-            </a:r>
+              <a:t>Edge AI literature review</a:t>
+            </a:r>
+          </a:p>
+          <a:p>
+            <a:r>
+              <a:rPr lang="en-US"/>
+              <a:t>Cats and Dogs Classification Dataset: </a:t>
+            </a:r>
+            <a:r>
+              <a:rPr lang="en-US">
+                <a:hlinkClick r:id="rId2"/>
+              </a:rPr>
+              <a:t>https://www.kaggle.com/datasets/bhavikjikadara/dog-and-cat-classification-dataset/data</a:t>
+            </a:r>
+            <a:r>
+              <a:rPr lang="en-US"/>
+              <a:t> </a:t>
+            </a:r>
+          </a:p>
+          <a:p>
+            <a:r>
+              <a:rPr lang="vi-VN" sz="1800"/>
+              <a:t>Bộ dữ liệu Cat and Dog Classification là một bộ dữ liệu tiêu chuẩn trong lĩnh vực thị giác máy tính (Computer Vision), được sử dụng cho bài toán phân loại hình ảnh, trong đó mô hình cần xác định một hình ảnh chứa chó (Dog) hay mèo (Cat). Bộ dữ liệu này là một tập con được trích xuất từ một bộ dữ liệu lớn hơn gồm khoảng 25.000 hình ảnh.Bộ dữ liệu bao gồm 24.998 hình ảnh, được chia thành:12.499 hình ảnh mèo (Cat)12.499 hình ảnh chó (Dog)Các hình ảnh trong tập huấn luyện (training set) được phân chia đồng đều giữa hai lớp chó và mèo, trong khi các hình ảnh thuộc tập kiểm thử (test set) không được gán nhãn. Cách tổ chức này cho phép người dùng đánh giá khả năng tổng quát hóa của mô hình trên dữ liệu chưa từng xuất hiện trong quá trình huấn luyện.</a:t>
+            </a:r>
+            <a:endParaRPr lang="en-US" sz="1800"/>
           </a:p>
         </p:txBody>
       </p:sp>
     </p:spTree>
     <p:extLst>
       <p:ext uri="{BB962C8B-B14F-4D97-AF65-F5344CB8AC3E}">
-        <p14:creationId xmlns:p14="http://schemas.microsoft.com/office/powerpoint/2010/main" val="4209896671"/>
+        <p14:creationId xmlns:p14="http://schemas.microsoft.com/office/powerpoint/2010/main" val="2227037035"/>
       </p:ext>
     </p:extLst>
   </p:cSld>
@@ -3223,6 +4958,100 @@
             </a:pPr>
             <a:r>
               <a:rPr lang="en-US"/>
+              <a:t>Propose Model</a:t>
+            </a:r>
+          </a:p>
+        </p:txBody>
+      </p:sp>
+    </p:spTree>
+    <p:extLst>
+      <p:ext uri="{BB962C8B-B14F-4D97-AF65-F5344CB8AC3E}">
+        <p14:creationId xmlns:p14="http://schemas.microsoft.com/office/powerpoint/2010/main" val="4209896671"/>
+      </p:ext>
+    </p:extLst>
+  </p:cSld>
+  <p:clrMapOvr>
+    <a:masterClrMapping/>
+  </p:clrMapOvr>
+</p:sld>
+</file>
+
+<file path=ppt/slides/slide13.xml><?xml version="1.0" encoding="utf-8"?>
+<p:sld xmlns:a="http://schemas.openxmlformats.org/drawingml/2006/main" xmlns:r="http://schemas.openxmlformats.org/officeDocument/2006/relationships" xmlns:p="http://schemas.openxmlformats.org/presentationml/2006/main">
+  <p:cSld>
+    <p:spTree>
+      <p:nvGrpSpPr>
+        <p:cNvPr id="1" name=""/>
+        <p:cNvGrpSpPr/>
+        <p:nvPr/>
+      </p:nvGrpSpPr>
+      <p:grpSpPr>
+        <a:xfrm>
+          <a:off x="0" y="0"/>
+          <a:ext cx="0" cy="0"/>
+          <a:chOff x="0" y="0"/>
+          <a:chExt cx="0" cy="0"/>
+        </a:xfrm>
+      </p:grpSpPr>
+      <p:sp>
+        <p:nvSpPr>
+          <p:cNvPr id="2" name="Title 1">
+            <a:extLst>
+              <a:ext uri="{FF2B5EF4-FFF2-40B4-BE49-F238E27FC236}">
+                <a16:creationId xmlns:a16="http://schemas.microsoft.com/office/drawing/2014/main" id="{8EB3062A-B583-4BF2-B6BF-0593EEBF68AF}"/>
+              </a:ext>
+            </a:extLst>
+          </p:cNvPr>
+          <p:cNvSpPr>
+            <a:spLocks noGrp="1"/>
+          </p:cNvSpPr>
+          <p:nvPr>
+            <p:ph type="title"/>
+          </p:nvPr>
+        </p:nvSpPr>
+        <p:spPr/>
+        <p:txBody>
+          <a:bodyPr/>
+          <a:lstStyle/>
+          <a:p>
+            <a:r>
+              <a:rPr lang="en-US"/>
+              <a:t>2. Report mỗi tuần</a:t>
+            </a:r>
+          </a:p>
+        </p:txBody>
+      </p:sp>
+      <p:sp>
+        <p:nvSpPr>
+          <p:cNvPr id="51" name="Content Placeholder 2">
+            <a:extLst>
+              <a:ext uri="{FF2B5EF4-FFF2-40B4-BE49-F238E27FC236}">
+                <a16:creationId xmlns:a16="http://schemas.microsoft.com/office/drawing/2014/main" id="{7E3D7437-29CF-43A9-9A4E-F1201877204B}"/>
+              </a:ext>
+            </a:extLst>
+          </p:cNvPr>
+          <p:cNvSpPr>
+            <a:spLocks noGrp="1"/>
+          </p:cNvSpPr>
+          <p:nvPr>
+            <p:ph idx="1"/>
+          </p:nvPr>
+        </p:nvSpPr>
+        <p:spPr>
+          <a:xfrm>
+            <a:off x="508000" y="1295400"/>
+            <a:ext cx="11074400" cy="4724400"/>
+          </a:xfrm>
+        </p:spPr>
+        <p:txBody>
+          <a:bodyPr/>
+          <a:lstStyle/>
+          <a:p>
+            <a:pPr marL="0" indent="0">
+              <a:buNone/>
+            </a:pPr>
+            <a:r>
+              <a:rPr lang="en-US"/>
               <a:t>Edge AI- result  </a:t>
             </a:r>
           </a:p>
@@ -3249,14 +5078,14 @@
           <p:nvPr>
             <p:extLst>
               <p:ext uri="{D42A27DB-BD31-4B8C-83A1-F6EECF244321}">
-                <p14:modId xmlns:p14="http://schemas.microsoft.com/office/powerpoint/2010/main" val="3637440860"/>
+                <p14:modId xmlns:p14="http://schemas.microsoft.com/office/powerpoint/2010/main" val="3033009418"/>
               </p:ext>
             </p:extLst>
           </p:nvPr>
         </p:nvGraphicFramePr>
         <p:xfrm>
           <a:off x="508000" y="1920240"/>
-          <a:ext cx="10693400" cy="3474720"/>
+          <a:ext cx="10998200" cy="4114800"/>
         </p:xfrm>
         <a:graphic>
           <a:graphicData uri="http://schemas.openxmlformats.org/drawingml/2006/table">
@@ -3284,28 +5113,21 @@
                     </a:ext>
                   </a:extLst>
                 </a:gridCol>
-                <a:gridCol w="990600">
+                <a:gridCol w="2133600">
                   <a:extLst>
                     <a:ext uri="{9D8B030D-6E8A-4147-A177-3AD203B41FA5}">
                       <a16:colId xmlns:a16="http://schemas.microsoft.com/office/drawing/2014/main" val="2735605935"/>
                     </a:ext>
                   </a:extLst>
                 </a:gridCol>
-                <a:gridCol w="2133600">
+                <a:gridCol w="1676400">
                   <a:extLst>
                     <a:ext uri="{9D8B030D-6E8A-4147-A177-3AD203B41FA5}">
                       <a16:colId xmlns:a16="http://schemas.microsoft.com/office/drawing/2014/main" val="3800278434"/>
                     </a:ext>
                   </a:extLst>
                 </a:gridCol>
-                <a:gridCol w="914400">
-                  <a:extLst>
-                    <a:ext uri="{9D8B030D-6E8A-4147-A177-3AD203B41FA5}">
-                      <a16:colId xmlns:a16="http://schemas.microsoft.com/office/drawing/2014/main" val="945744992"/>
-                    </a:ext>
-                  </a:extLst>
-                </a:gridCol>
-                <a:gridCol w="1981200">
+                <a:gridCol w="2514600">
                   <a:extLst>
                     <a:ext uri="{9D8B030D-6E8A-4147-A177-3AD203B41FA5}">
                       <a16:colId xmlns:a16="http://schemas.microsoft.com/office/drawing/2014/main" val="253709661"/>
@@ -3471,7 +5293,7 @@
                     <a:p>
                       <a:r>
                         <a:rPr lang="en-US" sz="1800"/>
-                        <a:t>FP32 Acc.</a:t>
+                        <a:t>FP32 Acc. (%)</a:t>
                       </a:r>
                     </a:p>
                   </a:txBody>
@@ -3522,56 +5344,6 @@
                       <a:r>
                         <a:rPr lang="en-US" sz="1800"/>
                         <a:t>INT8 Acc.</a:t>
-                      </a:r>
-                    </a:p>
-                  </a:txBody>
-                  <a:tcPr anchor="ctr">
-                    <a:lnL w="12700" cap="flat" cmpd="sng" algn="ctr">
-                      <a:solidFill>
-                        <a:schemeClr val="tx1"/>
-                      </a:solidFill>
-                      <a:prstDash val="solid"/>
-                      <a:round/>
-                      <a:headEnd type="none" w="med" len="med"/>
-                      <a:tailEnd type="none" w="med" len="med"/>
-                    </a:lnL>
-                    <a:lnR w="12700" cap="flat" cmpd="sng" algn="ctr">
-                      <a:solidFill>
-                        <a:schemeClr val="tx1"/>
-                      </a:solidFill>
-                      <a:prstDash val="solid"/>
-                      <a:round/>
-                      <a:headEnd type="none" w="med" len="med"/>
-                      <a:tailEnd type="none" w="med" len="med"/>
-                    </a:lnR>
-                    <a:lnT w="12700" cap="flat" cmpd="sng" algn="ctr">
-                      <a:solidFill>
-                        <a:schemeClr val="tx1"/>
-                      </a:solidFill>
-                      <a:prstDash val="solid"/>
-                      <a:round/>
-                      <a:headEnd type="none" w="med" len="med"/>
-                      <a:tailEnd type="none" w="med" len="med"/>
-                    </a:lnT>
-                    <a:lnB w="12700" cap="flat" cmpd="sng" algn="ctr">
-                      <a:solidFill>
-                        <a:schemeClr val="tx1"/>
-                      </a:solidFill>
-                      <a:prstDash val="solid"/>
-                      <a:round/>
-                      <a:headEnd type="none" w="med" len="med"/>
-                      <a:tailEnd type="none" w="med" len="med"/>
-                    </a:lnB>
-                  </a:tcPr>
-                </a:tc>
-                <a:tc>
-                  <a:txBody>
-                    <a:bodyPr/>
-                    <a:lstStyle/>
-                    <a:p>
-                      <a:r>
-                        <a:rPr lang="en-US" sz="1800"/>
-                        <a:t>Model Size</a:t>
                       </a:r>
                     </a:p>
                   </a:txBody>
@@ -3726,54 +5498,10 @@
                     <a:bodyPr/>
                     <a:lstStyle/>
                     <a:p>
-                      <a:endParaRPr lang="en-US" sz="1800"/>
-                    </a:p>
-                  </a:txBody>
-                  <a:tcPr anchor="ctr">
-                    <a:lnL w="12700" cap="flat" cmpd="sng" algn="ctr">
-                      <a:solidFill>
-                        <a:schemeClr val="tx1"/>
-                      </a:solidFill>
-                      <a:prstDash val="solid"/>
-                      <a:round/>
-                      <a:headEnd type="none" w="med" len="med"/>
-                      <a:tailEnd type="none" w="med" len="med"/>
-                    </a:lnL>
-                    <a:lnR w="12700" cap="flat" cmpd="sng" algn="ctr">
-                      <a:solidFill>
-                        <a:schemeClr val="tx1"/>
-                      </a:solidFill>
-                      <a:prstDash val="solid"/>
-                      <a:round/>
-                      <a:headEnd type="none" w="med" len="med"/>
-                      <a:tailEnd type="none" w="med" len="med"/>
-                    </a:lnR>
-                    <a:lnT w="12700" cap="flat" cmpd="sng" algn="ctr">
-                      <a:solidFill>
-                        <a:schemeClr val="tx1"/>
-                      </a:solidFill>
-                      <a:prstDash val="solid"/>
-                      <a:round/>
-                      <a:headEnd type="none" w="med" len="med"/>
-                      <a:tailEnd type="none" w="med" len="med"/>
-                    </a:lnT>
-                    <a:lnB w="12700" cap="flat" cmpd="sng" algn="ctr">
-                      <a:solidFill>
-                        <a:schemeClr val="tx1"/>
-                      </a:solidFill>
-                      <a:prstDash val="solid"/>
-                      <a:round/>
-                      <a:headEnd type="none" w="med" len="med"/>
-                      <a:tailEnd type="none" w="med" len="med"/>
-                    </a:lnB>
-                  </a:tcPr>
-                </a:tc>
-                <a:tc>
-                  <a:txBody>
-                    <a:bodyPr/>
-                    <a:lstStyle/>
-                    <a:p>
-                      <a:endParaRPr lang="en-US" sz="1800"/>
+                      <a:r>
+                        <a:rPr lang="en-US" sz="1800"/>
+                        <a:t>2.8M</a:t>
+                      </a:r>
                     </a:p>
                   </a:txBody>
                   <a:tcPr anchor="ctr">
@@ -4068,54 +5796,10 @@
                     <a:bodyPr/>
                     <a:lstStyle/>
                     <a:p>
-                      <a:endParaRPr lang="en-US" sz="1800"/>
-                    </a:p>
-                  </a:txBody>
-                  <a:tcPr anchor="ctr">
-                    <a:lnL w="12700" cap="flat" cmpd="sng" algn="ctr">
-                      <a:solidFill>
-                        <a:schemeClr val="tx1"/>
-                      </a:solidFill>
-                      <a:prstDash val="solid"/>
-                      <a:round/>
-                      <a:headEnd type="none" w="med" len="med"/>
-                      <a:tailEnd type="none" w="med" len="med"/>
-                    </a:lnL>
-                    <a:lnR w="12700" cap="flat" cmpd="sng" algn="ctr">
-                      <a:solidFill>
-                        <a:schemeClr val="tx1"/>
-                      </a:solidFill>
-                      <a:prstDash val="solid"/>
-                      <a:round/>
-                      <a:headEnd type="none" w="med" len="med"/>
-                      <a:tailEnd type="none" w="med" len="med"/>
-                    </a:lnR>
-                    <a:lnT w="12700" cap="flat" cmpd="sng" algn="ctr">
-                      <a:solidFill>
-                        <a:schemeClr val="tx1"/>
-                      </a:solidFill>
-                      <a:prstDash val="solid"/>
-                      <a:round/>
-                      <a:headEnd type="none" w="med" len="med"/>
-                      <a:tailEnd type="none" w="med" len="med"/>
-                    </a:lnT>
-                    <a:lnB w="12700" cap="flat" cmpd="sng" algn="ctr">
-                      <a:solidFill>
-                        <a:schemeClr val="tx1"/>
-                      </a:solidFill>
-                      <a:prstDash val="solid"/>
-                      <a:round/>
-                      <a:headEnd type="none" w="med" len="med"/>
-                      <a:tailEnd type="none" w="med" len="med"/>
-                    </a:lnB>
-                  </a:tcPr>
-                </a:tc>
-                <a:tc>
-                  <a:txBody>
-                    <a:bodyPr/>
-                    <a:lstStyle/>
-                    <a:p>
-                      <a:endParaRPr lang="en-US" sz="1800"/>
+                      <a:r>
+                        <a:rPr lang="en-US" sz="1800"/>
+                        <a:t>3.5</a:t>
+                      </a:r>
                     </a:p>
                   </a:txBody>
                   <a:tcPr anchor="ctr">
@@ -4362,7 +6046,57 @@
                     <a:p>
                       <a:r>
                         <a:rPr lang="en-US" sz="1800"/>
-                        <a:t>MobileNetV3-Small</a:t>
+                        <a:t>Reset 18</a:t>
+                      </a:r>
+                    </a:p>
+                  </a:txBody>
+                  <a:tcPr anchor="ctr">
+                    <a:lnL w="12700" cap="flat" cmpd="sng" algn="ctr">
+                      <a:solidFill>
+                        <a:schemeClr val="tx1"/>
+                      </a:solidFill>
+                      <a:prstDash val="solid"/>
+                      <a:round/>
+                      <a:headEnd type="none" w="med" len="med"/>
+                      <a:tailEnd type="none" w="med" len="med"/>
+                    </a:lnL>
+                    <a:lnR w="12700" cap="flat" cmpd="sng" algn="ctr">
+                      <a:solidFill>
+                        <a:schemeClr val="tx1"/>
+                      </a:solidFill>
+                      <a:prstDash val="solid"/>
+                      <a:round/>
+                      <a:headEnd type="none" w="med" len="med"/>
+                      <a:tailEnd type="none" w="med" len="med"/>
+                    </a:lnR>
+                    <a:lnT w="12700" cap="flat" cmpd="sng" algn="ctr">
+                      <a:solidFill>
+                        <a:schemeClr val="tx1"/>
+                      </a:solidFill>
+                      <a:prstDash val="solid"/>
+                      <a:round/>
+                      <a:headEnd type="none" w="med" len="med"/>
+                      <a:tailEnd type="none" w="med" len="med"/>
+                    </a:lnT>
+                    <a:lnB w="12700" cap="flat" cmpd="sng" algn="ctr">
+                      <a:solidFill>
+                        <a:schemeClr val="tx1"/>
+                      </a:solidFill>
+                      <a:prstDash val="solid"/>
+                      <a:round/>
+                      <a:headEnd type="none" w="med" len="med"/>
+                      <a:tailEnd type="none" w="med" len="med"/>
+                    </a:lnB>
+                  </a:tcPr>
+                </a:tc>
+                <a:tc>
+                  <a:txBody>
+                    <a:bodyPr/>
+                    <a:lstStyle/>
+                    <a:p>
+                      <a:r>
+                        <a:rPr lang="en-US" sz="1800"/>
+                        <a:t>11.7M</a:t>
                       </a:r>
                     </a:p>
                   </a:txBody>
@@ -4457,7 +6191,211 @@
                     <a:bodyPr/>
                     <a:lstStyle/>
                     <a:p>
+                      <a:r>
+                        <a:rPr lang="en-US" sz="1800"/>
+                        <a:t>99.8</a:t>
+                      </a:r>
+                    </a:p>
+                  </a:txBody>
+                  <a:tcPr anchor="ctr">
+                    <a:lnL w="12700" cap="flat" cmpd="sng" algn="ctr">
+                      <a:solidFill>
+                        <a:schemeClr val="tx1"/>
+                      </a:solidFill>
+                      <a:prstDash val="solid"/>
+                      <a:round/>
+                      <a:headEnd type="none" w="med" len="med"/>
+                      <a:tailEnd type="none" w="med" len="med"/>
+                    </a:lnL>
+                    <a:lnR w="12700" cap="flat" cmpd="sng" algn="ctr">
+                      <a:solidFill>
+                        <a:schemeClr val="tx1"/>
+                      </a:solidFill>
+                      <a:prstDash val="solid"/>
+                      <a:round/>
+                      <a:headEnd type="none" w="med" len="med"/>
+                      <a:tailEnd type="none" w="med" len="med"/>
+                    </a:lnR>
+                    <a:lnT w="12700" cap="flat" cmpd="sng" algn="ctr">
+                      <a:solidFill>
+                        <a:schemeClr val="tx1"/>
+                      </a:solidFill>
+                      <a:prstDash val="solid"/>
+                      <a:round/>
+                      <a:headEnd type="none" w="med" len="med"/>
+                      <a:tailEnd type="none" w="med" len="med"/>
+                    </a:lnT>
+                    <a:lnB w="12700" cap="flat" cmpd="sng" algn="ctr">
+                      <a:solidFill>
+                        <a:schemeClr val="tx1"/>
+                      </a:solidFill>
+                      <a:prstDash val="solid"/>
+                      <a:round/>
+                      <a:headEnd type="none" w="med" len="med"/>
+                      <a:tailEnd type="none" w="med" len="med"/>
+                    </a:lnB>
+                  </a:tcPr>
+                </a:tc>
+                <a:tc>
+                  <a:txBody>
+                    <a:bodyPr/>
+                    <a:lstStyle/>
+                    <a:p>
                       <a:endParaRPr lang="en-US" sz="1800"/>
+                    </a:p>
+                  </a:txBody>
+                  <a:tcPr anchor="ctr">
+                    <a:lnL w="12700" cap="flat" cmpd="sng" algn="ctr">
+                      <a:solidFill>
+                        <a:schemeClr val="tx1"/>
+                      </a:solidFill>
+                      <a:prstDash val="solid"/>
+                      <a:round/>
+                      <a:headEnd type="none" w="med" len="med"/>
+                      <a:tailEnd type="none" w="med" len="med"/>
+                    </a:lnL>
+                    <a:lnR w="12700" cap="flat" cmpd="sng" algn="ctr">
+                      <a:solidFill>
+                        <a:schemeClr val="tx1"/>
+                      </a:solidFill>
+                      <a:prstDash val="solid"/>
+                      <a:round/>
+                      <a:headEnd type="none" w="med" len="med"/>
+                      <a:tailEnd type="none" w="med" len="med"/>
+                    </a:lnR>
+                    <a:lnT w="12700" cap="flat" cmpd="sng" algn="ctr">
+                      <a:solidFill>
+                        <a:schemeClr val="tx1"/>
+                      </a:solidFill>
+                      <a:prstDash val="solid"/>
+                      <a:round/>
+                      <a:headEnd type="none" w="med" len="med"/>
+                      <a:tailEnd type="none" w="med" len="med"/>
+                    </a:lnT>
+                    <a:lnB w="12700" cap="flat" cmpd="sng" algn="ctr">
+                      <a:solidFill>
+                        <a:schemeClr val="tx1"/>
+                      </a:solidFill>
+                      <a:prstDash val="solid"/>
+                      <a:round/>
+                      <a:headEnd type="none" w="med" len="med"/>
+                      <a:tailEnd type="none" w="med" len="med"/>
+                    </a:lnB>
+                  </a:tcPr>
+                </a:tc>
+                <a:tc>
+                  <a:txBody>
+                    <a:bodyPr/>
+                    <a:lstStyle/>
+                    <a:p>
+                      <a:endParaRPr lang="en-US" sz="1800"/>
+                    </a:p>
+                  </a:txBody>
+                  <a:tcPr anchor="ctr">
+                    <a:lnL w="12700" cap="flat" cmpd="sng" algn="ctr">
+                      <a:solidFill>
+                        <a:schemeClr val="tx1"/>
+                      </a:solidFill>
+                      <a:prstDash val="solid"/>
+                      <a:round/>
+                      <a:headEnd type="none" w="med" len="med"/>
+                      <a:tailEnd type="none" w="med" len="med"/>
+                    </a:lnL>
+                    <a:lnR w="12700" cap="flat" cmpd="sng" algn="ctr">
+                      <a:solidFill>
+                        <a:schemeClr val="tx1"/>
+                      </a:solidFill>
+                      <a:prstDash val="solid"/>
+                      <a:round/>
+                      <a:headEnd type="none" w="med" len="med"/>
+                      <a:tailEnd type="none" w="med" len="med"/>
+                    </a:lnR>
+                    <a:lnT w="12700" cap="flat" cmpd="sng" algn="ctr">
+                      <a:solidFill>
+                        <a:schemeClr val="tx1"/>
+                      </a:solidFill>
+                      <a:prstDash val="solid"/>
+                      <a:round/>
+                      <a:headEnd type="none" w="med" len="med"/>
+                      <a:tailEnd type="none" w="med" len="med"/>
+                    </a:lnT>
+                    <a:lnB w="12700" cap="flat" cmpd="sng" algn="ctr">
+                      <a:solidFill>
+                        <a:schemeClr val="tx1"/>
+                      </a:solidFill>
+                      <a:prstDash val="solid"/>
+                      <a:round/>
+                      <a:headEnd type="none" w="med" len="med"/>
+                      <a:tailEnd type="none" w="med" len="med"/>
+                    </a:lnB>
+                  </a:tcPr>
+                </a:tc>
+                <a:extLst>
+                  <a:ext uri="{0D108BD9-81ED-4DB2-BD59-A6C34878D82A}">
+                    <a16:rowId xmlns:a16="http://schemas.microsoft.com/office/drawing/2014/main" val="3214436454"/>
+                  </a:ext>
+                </a:extLst>
+              </a:tr>
+              <a:tr h="640080">
+                <a:tc>
+                  <a:txBody>
+                    <a:bodyPr/>
+                    <a:lstStyle/>
+                    <a:p>
+                      <a:r>
+                        <a:rPr lang="en-US" sz="1800"/>
+                        <a:t>MobileNetV3-Small</a:t>
+                      </a:r>
+                    </a:p>
+                  </a:txBody>
+                  <a:tcPr anchor="ctr">
+                    <a:lnL w="12700" cap="flat" cmpd="sng" algn="ctr">
+                      <a:solidFill>
+                        <a:schemeClr val="tx1"/>
+                      </a:solidFill>
+                      <a:prstDash val="solid"/>
+                      <a:round/>
+                      <a:headEnd type="none" w="med" len="med"/>
+                      <a:tailEnd type="none" w="med" len="med"/>
+                    </a:lnL>
+                    <a:lnR w="12700" cap="flat" cmpd="sng" algn="ctr">
+                      <a:solidFill>
+                        <a:schemeClr val="tx1"/>
+                      </a:solidFill>
+                      <a:prstDash val="solid"/>
+                      <a:round/>
+                      <a:headEnd type="none" w="med" len="med"/>
+                      <a:tailEnd type="none" w="med" len="med"/>
+                    </a:lnR>
+                    <a:lnT w="12700" cap="flat" cmpd="sng" algn="ctr">
+                      <a:solidFill>
+                        <a:schemeClr val="tx1"/>
+                      </a:solidFill>
+                      <a:prstDash val="solid"/>
+                      <a:round/>
+                      <a:headEnd type="none" w="med" len="med"/>
+                      <a:tailEnd type="none" w="med" len="med"/>
+                    </a:lnT>
+                    <a:lnB w="12700" cap="flat" cmpd="sng" algn="ctr">
+                      <a:solidFill>
+                        <a:schemeClr val="tx1"/>
+                      </a:solidFill>
+                      <a:prstDash val="solid"/>
+                      <a:round/>
+                      <a:headEnd type="none" w="med" len="med"/>
+                      <a:tailEnd type="none" w="med" len="med"/>
+                    </a:lnB>
+                  </a:tcPr>
+                </a:tc>
+                <a:tc>
+                  <a:txBody>
+                    <a:bodyPr/>
+                    <a:lstStyle/>
+                    <a:p>
+                      <a:r>
+                        <a:rPr lang="en-US" sz="1800"/>
+                        <a:t>2.54</a:t>
+                      </a:r>
                     </a:p>
                   </a:txBody>
                   <a:tcPr anchor="ctr">
@@ -4706,53 +6644,6 @@
                         <a:rPr lang="en-US" sz="1800" b="1"/>
                         <a:t>Proposed Model</a:t>
                       </a:r>
-                      <a:endParaRPr lang="en-US" sz="1800"/>
-                    </a:p>
-                  </a:txBody>
-                  <a:tcPr anchor="ctr">
-                    <a:lnL w="12700" cap="flat" cmpd="sng" algn="ctr">
-                      <a:solidFill>
-                        <a:schemeClr val="tx1"/>
-                      </a:solidFill>
-                      <a:prstDash val="solid"/>
-                      <a:round/>
-                      <a:headEnd type="none" w="med" len="med"/>
-                      <a:tailEnd type="none" w="med" len="med"/>
-                    </a:lnL>
-                    <a:lnR w="12700" cap="flat" cmpd="sng" algn="ctr">
-                      <a:solidFill>
-                        <a:schemeClr val="tx1"/>
-                      </a:solidFill>
-                      <a:prstDash val="solid"/>
-                      <a:round/>
-                      <a:headEnd type="none" w="med" len="med"/>
-                      <a:tailEnd type="none" w="med" len="med"/>
-                    </a:lnR>
-                    <a:lnT w="12700" cap="flat" cmpd="sng" algn="ctr">
-                      <a:solidFill>
-                        <a:schemeClr val="tx1"/>
-                      </a:solidFill>
-                      <a:prstDash val="solid"/>
-                      <a:round/>
-                      <a:headEnd type="none" w="med" len="med"/>
-                      <a:tailEnd type="none" w="med" len="med"/>
-                    </a:lnT>
-                    <a:lnB w="12700" cap="flat" cmpd="sng" algn="ctr">
-                      <a:solidFill>
-                        <a:schemeClr val="tx1"/>
-                      </a:solidFill>
-                      <a:prstDash val="solid"/>
-                      <a:round/>
-                      <a:headEnd type="none" w="med" len="med"/>
-                      <a:tailEnd type="none" w="med" len="med"/>
-                    </a:lnB>
-                  </a:tcPr>
-                </a:tc>
-                <a:tc>
-                  <a:txBody>
-                    <a:bodyPr/>
-                    <a:lstStyle/>
-                    <a:p>
                       <a:endParaRPr lang="en-US" sz="1800"/>
                     </a:p>
                   </a:txBody>
@@ -5056,7 +6947,7 @@
 </p:sld>
 </file>
 
-<file path=ppt/slides/slide13.xml><?xml version="1.0" encoding="utf-8"?>
+<file path=ppt/slides/slide14.xml><?xml version="1.0" encoding="utf-8"?>
 <p:sld xmlns:a="http://schemas.openxmlformats.org/drawingml/2006/main" xmlns:r="http://schemas.openxmlformats.org/officeDocument/2006/relationships" xmlns:p="http://schemas.openxmlformats.org/presentationml/2006/main">
   <p:cSld>
     <p:spTree>
@@ -5238,7 +7129,7 @@
 </p:sld>
 </file>
 
-<file path=ppt/slides/slide14.xml><?xml version="1.0" encoding="utf-8"?>
+<file path=ppt/slides/slide15.xml><?xml version="1.0" encoding="utf-8"?>
 <p:sld xmlns:a="http://schemas.openxmlformats.org/drawingml/2006/main" xmlns:r="http://schemas.openxmlformats.org/officeDocument/2006/relationships" xmlns:p="http://schemas.openxmlformats.org/presentationml/2006/main">
   <p:cSld>
     <p:spTree>
@@ -5729,6 +7620,180 @@
           <a:p>
             <a:r>
               <a:rPr lang="en-US"/>
+              <a:t>2. Report mỗi tuần ( </a:t>
+            </a:r>
+            <a:r>
+              <a:rPr lang="en-US">
+                <a:solidFill>
+                  <a:srgbClr val="FF0000"/>
+                </a:solidFill>
+                <a:sym typeface="Wingdings" panose="05000000000000000000" pitchFamily="2" charset="2"/>
+              </a:rPr>
+              <a:t></a:t>
+            </a:r>
+            <a:r>
+              <a:rPr lang="en-US">
+                <a:solidFill>
+                  <a:srgbClr val="FF0000"/>
+                </a:solidFill>
+              </a:rPr>
+              <a:t> đồng bộ lên github </a:t>
+            </a:r>
+            <a:r>
+              <a:rPr lang="en-US">
+                <a:solidFill>
+                  <a:srgbClr val="FF0000"/>
+                </a:solidFill>
+                <a:sym typeface="Wingdings" panose="05000000000000000000" pitchFamily="2" charset="2"/>
+              </a:rPr>
+              <a:t> Nộp utex</a:t>
+            </a:r>
+            <a:r>
+              <a:rPr lang="en-US"/>
+              <a:t>)</a:t>
+            </a:r>
+          </a:p>
+        </p:txBody>
+      </p:sp>
+      <p:sp>
+        <p:nvSpPr>
+          <p:cNvPr id="3" name="Content Placeholder 2">
+            <a:extLst>
+              <a:ext uri="{FF2B5EF4-FFF2-40B4-BE49-F238E27FC236}">
+                <a16:creationId xmlns:a16="http://schemas.microsoft.com/office/drawing/2014/main" id="{3455E681-6D67-4CD4-8AC0-AD826623E515}"/>
+              </a:ext>
+            </a:extLst>
+          </p:cNvPr>
+          <p:cNvSpPr>
+            <a:spLocks noGrp="1"/>
+          </p:cNvSpPr>
+          <p:nvPr>
+            <p:ph idx="1"/>
+          </p:nvPr>
+        </p:nvSpPr>
+        <p:spPr/>
+        <p:txBody>
+          <a:bodyPr/>
+          <a:lstStyle/>
+          <a:p>
+            <a:pPr marL="0" indent="0">
+              <a:buNone/>
+            </a:pPr>
+            <a:r>
+              <a:rPr lang="en-US"/>
+              <a:t>Gồm:</a:t>
+            </a:r>
+          </a:p>
+          <a:p>
+            <a:r>
+              <a:rPr lang="en-US"/>
+              <a:t>Github:</a:t>
+            </a:r>
+            <a:r>
+              <a:rPr lang="en-US">
+                <a:hlinkClick r:id="rId2"/>
+              </a:rPr>
+              <a:t>giunzz/mobile_project</a:t>
+            </a:r>
+            <a:endParaRPr lang="en-US"/>
+          </a:p>
+          <a:p>
+            <a:r>
+              <a:rPr lang="en-US"/>
+              <a:t>File word: tổng kết</a:t>
+            </a:r>
+          </a:p>
+          <a:p>
+            <a:pPr marL="0" indent="0">
+              <a:buNone/>
+            </a:pPr>
+            <a:endParaRPr lang="en-US"/>
+          </a:p>
+        </p:txBody>
+      </p:sp>
+      <p:pic>
+        <p:nvPicPr>
+          <p:cNvPr id="5" name="Picture 4">
+            <a:extLst>
+              <a:ext uri="{FF2B5EF4-FFF2-40B4-BE49-F238E27FC236}">
+                <a16:creationId xmlns:a16="http://schemas.microsoft.com/office/drawing/2014/main" id="{B6333469-82A0-44EE-8FAA-B2BE8C129D7D}"/>
+              </a:ext>
+            </a:extLst>
+          </p:cNvPr>
+          <p:cNvPicPr>
+            <a:picLocks noChangeAspect="1"/>
+          </p:cNvPicPr>
+          <p:nvPr/>
+        </p:nvPicPr>
+        <p:blipFill>
+          <a:blip r:embed="rId3"/>
+          <a:stretch>
+            <a:fillRect/>
+          </a:stretch>
+        </p:blipFill>
+        <p:spPr>
+          <a:xfrm>
+            <a:off x="3239" y="0"/>
+            <a:ext cx="12185522" cy="6858000"/>
+          </a:xfrm>
+          <a:prstGeom prst="rect">
+            <a:avLst/>
+          </a:prstGeom>
+        </p:spPr>
+      </p:pic>
+    </p:spTree>
+    <p:extLst>
+      <p:ext uri="{BB962C8B-B14F-4D97-AF65-F5344CB8AC3E}">
+        <p14:creationId xmlns:p14="http://schemas.microsoft.com/office/powerpoint/2010/main" val="800733402"/>
+      </p:ext>
+    </p:extLst>
+  </p:cSld>
+  <p:clrMapOvr>
+    <a:masterClrMapping/>
+  </p:clrMapOvr>
+</p:sld>
+</file>
+
+<file path=ppt/slides/slide5.xml><?xml version="1.0" encoding="utf-8"?>
+<p:sld xmlns:a="http://schemas.openxmlformats.org/drawingml/2006/main" xmlns:r="http://schemas.openxmlformats.org/officeDocument/2006/relationships" xmlns:p="http://schemas.openxmlformats.org/presentationml/2006/main">
+  <p:cSld>
+    <p:spTree>
+      <p:nvGrpSpPr>
+        <p:cNvPr id="1" name=""/>
+        <p:cNvGrpSpPr/>
+        <p:nvPr/>
+      </p:nvGrpSpPr>
+      <p:grpSpPr>
+        <a:xfrm>
+          <a:off x="0" y="0"/>
+          <a:ext cx="0" cy="0"/>
+          <a:chOff x="0" y="0"/>
+          <a:chExt cx="0" cy="0"/>
+        </a:xfrm>
+      </p:grpSpPr>
+      <p:sp>
+        <p:nvSpPr>
+          <p:cNvPr id="2" name="Title 1">
+            <a:extLst>
+              <a:ext uri="{FF2B5EF4-FFF2-40B4-BE49-F238E27FC236}">
+                <a16:creationId xmlns:a16="http://schemas.microsoft.com/office/drawing/2014/main" id="{8EB3062A-B583-4BF2-B6BF-0593EEBF68AF}"/>
+              </a:ext>
+            </a:extLst>
+          </p:cNvPr>
+          <p:cNvSpPr>
+            <a:spLocks noGrp="1"/>
+          </p:cNvSpPr>
+          <p:nvPr>
+            <p:ph type="title"/>
+          </p:nvPr>
+        </p:nvSpPr>
+        <p:spPr/>
+        <p:txBody>
+          <a:bodyPr/>
+          <a:lstStyle/>
+          <a:p>
+            <a:r>
+              <a:rPr lang="en-US"/>
               <a:t>2. Report mỗi tuần</a:t>
             </a:r>
           </a:p>
@@ -7128,7 +9193,7 @@
 </p:sld>
 </file>
 
-<file path=ppt/slides/slide5.xml><?xml version="1.0" encoding="utf-8"?>
+<file path=ppt/slides/slide6.xml><?xml version="1.0" encoding="utf-8"?>
 <p:sld xmlns:a="http://schemas.openxmlformats.org/drawingml/2006/main" xmlns:r="http://schemas.openxmlformats.org/officeDocument/2006/relationships" xmlns:p="http://schemas.openxmlformats.org/presentationml/2006/main">
   <p:cSld>
     <p:spTree>
@@ -9837,7 +11902,7 @@
 </p:sld>
 </file>
 
-<file path=ppt/slides/slide6.xml><?xml version="1.0" encoding="utf-8"?>
+<file path=ppt/slides/slide7.xml><?xml version="1.0" encoding="utf-8"?>
 <p:sld xmlns:a="http://schemas.openxmlformats.org/drawingml/2006/main" xmlns:r="http://schemas.openxmlformats.org/officeDocument/2006/relationships" xmlns:p="http://schemas.openxmlformats.org/presentationml/2006/main">
   <p:cSld>
     <p:spTree>
@@ -11021,7 +13086,7 @@
 </p:sld>
 </file>
 
-<file path=ppt/slides/slide7.xml><?xml version="1.0" encoding="utf-8"?>
+<file path=ppt/slides/slide8.xml><?xml version="1.0" encoding="utf-8"?>
 <p:sld xmlns:a="http://schemas.openxmlformats.org/drawingml/2006/main" xmlns:r="http://schemas.openxmlformats.org/officeDocument/2006/relationships" xmlns:p="http://schemas.openxmlformats.org/presentationml/2006/main">
   <p:cSld>
     <p:spTree>
@@ -12680,1435 +14745,6 @@
 </p:sld>
 </file>
 
-<file path=ppt/slides/slide8.xml><?xml version="1.0" encoding="utf-8"?>
-<p:sld xmlns:a="http://schemas.openxmlformats.org/drawingml/2006/main" xmlns:r="http://schemas.openxmlformats.org/officeDocument/2006/relationships" xmlns:p="http://schemas.openxmlformats.org/presentationml/2006/main">
-  <p:cSld>
-    <p:spTree>
-      <p:nvGrpSpPr>
-        <p:cNvPr id="1" name=""/>
-        <p:cNvGrpSpPr/>
-        <p:nvPr/>
-      </p:nvGrpSpPr>
-      <p:grpSpPr>
-        <a:xfrm>
-          <a:off x="0" y="0"/>
-          <a:ext cx="0" cy="0"/>
-          <a:chOff x="0" y="0"/>
-          <a:chExt cx="0" cy="0"/>
-        </a:xfrm>
-      </p:grpSpPr>
-      <p:sp>
-        <p:nvSpPr>
-          <p:cNvPr id="2" name="Title 1">
-            <a:extLst>
-              <a:ext uri="{FF2B5EF4-FFF2-40B4-BE49-F238E27FC236}">
-                <a16:creationId xmlns:a16="http://schemas.microsoft.com/office/drawing/2014/main" id="{8EB3062A-B583-4BF2-B6BF-0593EEBF68AF}"/>
-              </a:ext>
-            </a:extLst>
-          </p:cNvPr>
-          <p:cNvSpPr>
-            <a:spLocks noGrp="1"/>
-          </p:cNvSpPr>
-          <p:nvPr>
-            <p:ph type="title"/>
-          </p:nvPr>
-        </p:nvSpPr>
-        <p:spPr/>
-        <p:txBody>
-          <a:bodyPr/>
-          <a:lstStyle/>
-          <a:p>
-            <a:r>
-              <a:rPr lang="en-US"/>
-              <a:t>2. Report mỗi tuần</a:t>
-            </a:r>
-          </a:p>
-        </p:txBody>
-      </p:sp>
-      <p:sp>
-        <p:nvSpPr>
-          <p:cNvPr id="6" name="Text 0">
-            <a:extLst>
-              <a:ext uri="{FF2B5EF4-FFF2-40B4-BE49-F238E27FC236}">
-                <a16:creationId xmlns:a16="http://schemas.microsoft.com/office/drawing/2014/main" id="{D329268E-789D-443E-A024-FE5F872D03BD}"/>
-              </a:ext>
-            </a:extLst>
-          </p:cNvPr>
-          <p:cNvSpPr/>
-          <p:nvPr/>
-        </p:nvSpPr>
-        <p:spPr>
-          <a:xfrm>
-            <a:off x="777240" y="1311942"/>
-            <a:ext cx="10972440" cy="502560"/>
-          </a:xfrm>
-          <a:prstGeom prst="rect">
-            <a:avLst/>
-          </a:prstGeom>
-          <a:noFill/>
-          <a:ln w="0">
-            <a:noFill/>
-          </a:ln>
-        </p:spPr>
-        <p:style>
-          <a:lnRef idx="0">
-            <a:scrgbClr r="0" g="0" b="0"/>
-          </a:lnRef>
-          <a:fillRef idx="0">
-            <a:scrgbClr r="0" g="0" b="0"/>
-          </a:fillRef>
-          <a:effectRef idx="0">
-            <a:scrgbClr r="0" g="0" b="0"/>
-          </a:effectRef>
-          <a:fontRef idx="minor"/>
-        </p:style>
-        <p:txBody>
-          <a:bodyPr lIns="0" tIns="0" rIns="0" bIns="0" anchor="ctr">
-            <a:noAutofit/>
-          </a:bodyPr>
-          <a:lstStyle/>
-          <a:p>
-            <a:pPr defTabSz="914400">
-              <a:lnSpc>
-                <a:spcPct val="100000"/>
-              </a:lnSpc>
-              <a:tabLst>
-                <a:tab pos="0" algn="l"/>
-              </a:tabLst>
-            </a:pPr>
-            <a:r>
-              <a:rPr lang="en-US" sz="2600" b="1">
-                <a:solidFill>
-                  <a:srgbClr val="0F172A"/>
-                </a:solidFill>
-                <a:latin typeface="Aptos"/>
-              </a:rPr>
-              <a:t>4</a:t>
-            </a:r>
-            <a:r>
-              <a:rPr lang="en-US" sz="2600" b="1" u="none" strike="noStrike">
-                <a:solidFill>
-                  <a:srgbClr val="0F172A"/>
-                </a:solidFill>
-                <a:effectLst/>
-                <a:uFillTx/>
-                <a:latin typeface="Aptos"/>
-              </a:rPr>
-              <a:t>. Lệnh Feed Now &amp; chiến lược khẩu phần</a:t>
-            </a:r>
-            <a:endParaRPr lang="en-US" sz="2600" b="0" u="none" strike="noStrike">
-              <a:solidFill>
-                <a:srgbClr val="000000"/>
-              </a:solidFill>
-              <a:effectLst/>
-              <a:uFillTx/>
-              <a:latin typeface="Arial"/>
-            </a:endParaRPr>
-          </a:p>
-        </p:txBody>
-      </p:sp>
-      <p:sp>
-        <p:nvSpPr>
-          <p:cNvPr id="7" name="Text 1">
-            <a:extLst>
-              <a:ext uri="{FF2B5EF4-FFF2-40B4-BE49-F238E27FC236}">
-                <a16:creationId xmlns:a16="http://schemas.microsoft.com/office/drawing/2014/main" id="{32DDF8D2-D518-4FD5-ADA3-3549A81579A8}"/>
-              </a:ext>
-            </a:extLst>
-          </p:cNvPr>
-          <p:cNvSpPr/>
-          <p:nvPr/>
-        </p:nvSpPr>
-        <p:spPr>
-          <a:xfrm>
-            <a:off x="795600" y="1860582"/>
-            <a:ext cx="10789560" cy="292320"/>
-          </a:xfrm>
-          <a:prstGeom prst="rect">
-            <a:avLst/>
-          </a:prstGeom>
-          <a:noFill/>
-          <a:ln w="0">
-            <a:noFill/>
-          </a:ln>
-        </p:spPr>
-        <p:style>
-          <a:lnRef idx="0">
-            <a:scrgbClr r="0" g="0" b="0"/>
-          </a:lnRef>
-          <a:fillRef idx="0">
-            <a:scrgbClr r="0" g="0" b="0"/>
-          </a:fillRef>
-          <a:effectRef idx="0">
-            <a:scrgbClr r="0" g="0" b="0"/>
-          </a:effectRef>
-          <a:fontRef idx="minor"/>
-        </p:style>
-        <p:txBody>
-          <a:bodyPr lIns="0" tIns="0" rIns="0" bIns="0" anchor="ctr">
-            <a:noAutofit/>
-          </a:bodyPr>
-          <a:lstStyle/>
-          <a:p>
-            <a:pPr defTabSz="914400">
-              <a:lnSpc>
-                <a:spcPct val="100000"/>
-              </a:lnSpc>
-              <a:tabLst>
-                <a:tab pos="0" algn="l"/>
-              </a:tabLst>
-            </a:pPr>
-            <a:r>
-              <a:rPr lang="en-US" sz="1150" b="0" u="none" strike="noStrike">
-                <a:solidFill>
-                  <a:srgbClr val="64748B"/>
-                </a:solidFill>
-                <a:effectLst/>
-                <a:uFillTx/>
-                <a:latin typeface="Aptos"/>
-              </a:rPr>
-              <a:t>Firmware ưu tiên targetGrams trong command; nếu không hợp lệ sẽ dùng cấu hình fallback.</a:t>
-            </a:r>
-            <a:endParaRPr lang="en-US" sz="1150" b="0" u="none" strike="noStrike">
-              <a:solidFill>
-                <a:srgbClr val="000000"/>
-              </a:solidFill>
-              <a:effectLst/>
-              <a:uFillTx/>
-              <a:latin typeface="Arial"/>
-            </a:endParaRPr>
-          </a:p>
-        </p:txBody>
-      </p:sp>
-      <p:sp>
-        <p:nvSpPr>
-          <p:cNvPr id="8" name="Shape 2">
-            <a:extLst>
-              <a:ext uri="{FF2B5EF4-FFF2-40B4-BE49-F238E27FC236}">
-                <a16:creationId xmlns:a16="http://schemas.microsoft.com/office/drawing/2014/main" id="{370503DC-AC37-4E67-9D00-835153CB64C5}"/>
-              </a:ext>
-            </a:extLst>
-          </p:cNvPr>
-          <p:cNvSpPr/>
-          <p:nvPr/>
-        </p:nvSpPr>
-        <p:spPr>
-          <a:xfrm>
-            <a:off x="914400" y="2345142"/>
-            <a:ext cx="5120280" cy="3337200"/>
-          </a:xfrm>
-          <a:prstGeom prst="roundRect">
-            <a:avLst>
-              <a:gd name="adj" fmla="val 2192"/>
-            </a:avLst>
-          </a:prstGeom>
-          <a:solidFill>
-            <a:srgbClr val="0F172A"/>
-          </a:solidFill>
-          <a:ln w="12700">
-            <a:solidFill>
-              <a:srgbClr val="334155"/>
-            </a:solidFill>
-            <a:round/>
-          </a:ln>
-        </p:spPr>
-        <p:style>
-          <a:lnRef idx="0">
-            <a:scrgbClr r="0" g="0" b="0"/>
-          </a:lnRef>
-          <a:fillRef idx="0">
-            <a:scrgbClr r="0" g="0" b="0"/>
-          </a:fillRef>
-          <a:effectRef idx="0">
-            <a:scrgbClr r="0" g="0" b="0"/>
-          </a:effectRef>
-          <a:fontRef idx="minor"/>
-        </p:style>
-        <p:txBody>
-          <a:bodyPr lIns="90000" tIns="45000" rIns="90000" bIns="45000" anchor="t">
-            <a:noAutofit/>
-          </a:bodyPr>
-          <a:lstStyle/>
-          <a:p>
-            <a:endParaRPr lang="en-US" sz="1800" b="0" u="none" strike="noStrike">
-              <a:solidFill>
-                <a:srgbClr val="FFFFFF"/>
-              </a:solidFill>
-              <a:effectLst/>
-              <a:uFillTx/>
-              <a:latin typeface="Arial"/>
-            </a:endParaRPr>
-          </a:p>
-        </p:txBody>
-      </p:sp>
-      <p:sp>
-        <p:nvSpPr>
-          <p:cNvPr id="9" name="Text 3">
-            <a:extLst>
-              <a:ext uri="{FF2B5EF4-FFF2-40B4-BE49-F238E27FC236}">
-                <a16:creationId xmlns:a16="http://schemas.microsoft.com/office/drawing/2014/main" id="{0416DE33-8EB3-44F7-9A41-8256A4596364}"/>
-              </a:ext>
-            </a:extLst>
-          </p:cNvPr>
-          <p:cNvSpPr/>
-          <p:nvPr/>
-        </p:nvSpPr>
-        <p:spPr>
-          <a:xfrm>
-            <a:off x="1207080" y="2646822"/>
-            <a:ext cx="4571640" cy="2697120"/>
-          </a:xfrm>
-          <a:prstGeom prst="rect">
-            <a:avLst/>
-          </a:prstGeom>
-          <a:noFill/>
-          <a:ln w="0">
-            <a:noFill/>
-          </a:ln>
-        </p:spPr>
-        <p:style>
-          <a:lnRef idx="0">
-            <a:scrgbClr r="0" g="0" b="0"/>
-          </a:lnRef>
-          <a:fillRef idx="0">
-            <a:scrgbClr r="0" g="0" b="0"/>
-          </a:fillRef>
-          <a:effectRef idx="0">
-            <a:scrgbClr r="0" g="0" b="0"/>
-          </a:effectRef>
-          <a:fontRef idx="minor"/>
-        </p:style>
-        <p:txBody>
-          <a:bodyPr lIns="0" tIns="0" rIns="0" bIns="0" anchor="ctr">
-            <a:noAutofit/>
-          </a:bodyPr>
-          <a:lstStyle/>
-          <a:p>
-            <a:pPr defTabSz="914400">
-              <a:lnSpc>
-                <a:spcPct val="100000"/>
-              </a:lnSpc>
-              <a:tabLst>
-                <a:tab pos="0" algn="l"/>
-              </a:tabLst>
-            </a:pPr>
-            <a:r>
-              <a:rPr lang="en-US" sz="1400" b="0" u="none" strike="noStrike">
-                <a:solidFill>
-                  <a:srgbClr val="E2E8F0"/>
-                </a:solidFill>
-                <a:effectLst/>
-                <a:uFillTx/>
-                <a:latin typeface="Courier New"/>
-                <a:ea typeface="Courier New"/>
-              </a:rPr>
-              <a:t>{</a:t>
-            </a:r>
-            <a:endParaRPr lang="en-US" sz="1400" b="0" u="none" strike="noStrike">
-              <a:solidFill>
-                <a:srgbClr val="000000"/>
-              </a:solidFill>
-              <a:effectLst/>
-              <a:uFillTx/>
-              <a:latin typeface="Arial"/>
-            </a:endParaRPr>
-          </a:p>
-          <a:p>
-            <a:pPr defTabSz="914400">
-              <a:lnSpc>
-                <a:spcPct val="100000"/>
-              </a:lnSpc>
-              <a:tabLst>
-                <a:tab pos="0" algn="l"/>
-              </a:tabLst>
-            </a:pPr>
-            <a:r>
-              <a:rPr lang="en-US" sz="1400" b="0" u="none" strike="noStrike">
-                <a:solidFill>
-                  <a:srgbClr val="E2E8F0"/>
-                </a:solidFill>
-                <a:effectLst/>
-                <a:uFillTx/>
-                <a:latin typeface="Courier New"/>
-                <a:ea typeface="Courier New"/>
-              </a:rPr>
-              <a:t>  "requestId": "req-001",</a:t>
-            </a:r>
-            <a:endParaRPr lang="en-US" sz="1400" b="0" u="none" strike="noStrike">
-              <a:solidFill>
-                <a:srgbClr val="000000"/>
-              </a:solidFill>
-              <a:effectLst/>
-              <a:uFillTx/>
-              <a:latin typeface="Arial"/>
-            </a:endParaRPr>
-          </a:p>
-          <a:p>
-            <a:pPr defTabSz="914400">
-              <a:lnSpc>
-                <a:spcPct val="100000"/>
-              </a:lnSpc>
-              <a:tabLst>
-                <a:tab pos="0" algn="l"/>
-              </a:tabLst>
-            </a:pPr>
-            <a:r>
-              <a:rPr lang="en-US" sz="1400" b="0" u="none" strike="noStrike">
-                <a:solidFill>
-                  <a:srgbClr val="E2E8F0"/>
-                </a:solidFill>
-                <a:effectLst/>
-                <a:uFillTx/>
-                <a:latin typeface="Courier New"/>
-                <a:ea typeface="Courier New"/>
-              </a:rPr>
-              <a:t>  "type": "feed_now",</a:t>
-            </a:r>
-            <a:endParaRPr lang="en-US" sz="1400" b="0" u="none" strike="noStrike">
-              <a:solidFill>
-                <a:srgbClr val="000000"/>
-              </a:solidFill>
-              <a:effectLst/>
-              <a:uFillTx/>
-              <a:latin typeface="Arial"/>
-            </a:endParaRPr>
-          </a:p>
-          <a:p>
-            <a:pPr defTabSz="914400">
-              <a:lnSpc>
-                <a:spcPct val="100000"/>
-              </a:lnSpc>
-              <a:tabLst>
-                <a:tab pos="0" algn="l"/>
-              </a:tabLst>
-            </a:pPr>
-            <a:r>
-              <a:rPr lang="en-US" sz="1400" b="0" u="none" strike="noStrike">
-                <a:solidFill>
-                  <a:srgbClr val="E2E8F0"/>
-                </a:solidFill>
-                <a:effectLst/>
-                <a:uFillTx/>
-                <a:latin typeface="Courier New"/>
-                <a:ea typeface="Courier New"/>
-              </a:rPr>
-              <a:t>  "speciesId": "dog",</a:t>
-            </a:r>
-            <a:endParaRPr lang="en-US" sz="1400" b="0" u="none" strike="noStrike">
-              <a:solidFill>
-                <a:srgbClr val="000000"/>
-              </a:solidFill>
-              <a:effectLst/>
-              <a:uFillTx/>
-              <a:latin typeface="Arial"/>
-            </a:endParaRPr>
-          </a:p>
-          <a:p>
-            <a:pPr defTabSz="914400">
-              <a:lnSpc>
-                <a:spcPct val="100000"/>
-              </a:lnSpc>
-              <a:tabLst>
-                <a:tab pos="0" algn="l"/>
-              </a:tabLst>
-            </a:pPr>
-            <a:r>
-              <a:rPr lang="en-US" sz="1400" b="0" u="none" strike="noStrike">
-                <a:solidFill>
-                  <a:srgbClr val="E2E8F0"/>
-                </a:solidFill>
-                <a:effectLst/>
-                <a:uFillTx/>
-                <a:latin typeface="Courier New"/>
-                <a:ea typeface="Courier New"/>
-              </a:rPr>
-              <a:t>  "targetGrams": 80,</a:t>
-            </a:r>
-            <a:endParaRPr lang="en-US" sz="1400" b="0" u="none" strike="noStrike">
-              <a:solidFill>
-                <a:srgbClr val="000000"/>
-              </a:solidFill>
-              <a:effectLst/>
-              <a:uFillTx/>
-              <a:latin typeface="Arial"/>
-            </a:endParaRPr>
-          </a:p>
-          <a:p>
-            <a:pPr defTabSz="914400">
-              <a:lnSpc>
-                <a:spcPct val="100000"/>
-              </a:lnSpc>
-              <a:tabLst>
-                <a:tab pos="0" algn="l"/>
-              </a:tabLst>
-            </a:pPr>
-            <a:r>
-              <a:rPr lang="en-US" sz="1400" b="0" u="none" strike="noStrike">
-                <a:solidFill>
-                  <a:srgbClr val="E2E8F0"/>
-                </a:solidFill>
-                <a:effectLst/>
-                <a:uFillTx/>
-                <a:latin typeface="Courier New"/>
-                <a:ea typeface="Courier New"/>
-              </a:rPr>
-              <a:t>  "status": "pending",</a:t>
-            </a:r>
-            <a:endParaRPr lang="en-US" sz="1400" b="0" u="none" strike="noStrike">
-              <a:solidFill>
-                <a:srgbClr val="000000"/>
-              </a:solidFill>
-              <a:effectLst/>
-              <a:uFillTx/>
-              <a:latin typeface="Arial"/>
-            </a:endParaRPr>
-          </a:p>
-          <a:p>
-            <a:pPr defTabSz="914400">
-              <a:lnSpc>
-                <a:spcPct val="100000"/>
-              </a:lnSpc>
-              <a:tabLst>
-                <a:tab pos="0" algn="l"/>
-              </a:tabLst>
-            </a:pPr>
-            <a:r>
-              <a:rPr lang="en-US" sz="1400" b="0" u="none" strike="noStrike">
-                <a:solidFill>
-                  <a:srgbClr val="E2E8F0"/>
-                </a:solidFill>
-                <a:effectLst/>
-                <a:uFillTx/>
-                <a:latin typeface="Courier New"/>
-                <a:ea typeface="Courier New"/>
-              </a:rPr>
-              <a:t>  "requestedAtEpoch": 1788890000</a:t>
-            </a:r>
-            <a:endParaRPr lang="en-US" sz="1400" b="0" u="none" strike="noStrike">
-              <a:solidFill>
-                <a:srgbClr val="000000"/>
-              </a:solidFill>
-              <a:effectLst/>
-              <a:uFillTx/>
-              <a:latin typeface="Arial"/>
-            </a:endParaRPr>
-          </a:p>
-          <a:p>
-            <a:pPr defTabSz="914400">
-              <a:lnSpc>
-                <a:spcPct val="100000"/>
-              </a:lnSpc>
-              <a:tabLst>
-                <a:tab pos="0" algn="l"/>
-              </a:tabLst>
-            </a:pPr>
-            <a:r>
-              <a:rPr lang="en-US" sz="1400" b="0" u="none" strike="noStrike">
-                <a:solidFill>
-                  <a:srgbClr val="E2E8F0"/>
-                </a:solidFill>
-                <a:effectLst/>
-                <a:uFillTx/>
-                <a:latin typeface="Courier New"/>
-                <a:ea typeface="Courier New"/>
-              </a:rPr>
-              <a:t>}</a:t>
-            </a:r>
-            <a:endParaRPr lang="en-US" sz="1400" b="0" u="none" strike="noStrike">
-              <a:solidFill>
-                <a:srgbClr val="000000"/>
-              </a:solidFill>
-              <a:effectLst/>
-              <a:uFillTx/>
-              <a:latin typeface="Arial"/>
-            </a:endParaRPr>
-          </a:p>
-        </p:txBody>
-      </p:sp>
-      <p:sp>
-        <p:nvSpPr>
-          <p:cNvPr id="10" name="Text 4">
-            <a:extLst>
-              <a:ext uri="{FF2B5EF4-FFF2-40B4-BE49-F238E27FC236}">
-                <a16:creationId xmlns:a16="http://schemas.microsoft.com/office/drawing/2014/main" id="{0A34DBC5-C1CD-4898-81BA-ABA0CCF60055}"/>
-              </a:ext>
-            </a:extLst>
-          </p:cNvPr>
-          <p:cNvSpPr/>
-          <p:nvPr/>
-        </p:nvSpPr>
-        <p:spPr>
-          <a:xfrm>
-            <a:off x="6675120" y="2482302"/>
-            <a:ext cx="4114440" cy="365400"/>
-          </a:xfrm>
-          <a:prstGeom prst="rect">
-            <a:avLst/>
-          </a:prstGeom>
-          <a:noFill/>
-          <a:ln w="0">
-            <a:noFill/>
-          </a:ln>
-        </p:spPr>
-        <p:style>
-          <a:lnRef idx="0">
-            <a:scrgbClr r="0" g="0" b="0"/>
-          </a:lnRef>
-          <a:fillRef idx="0">
-            <a:scrgbClr r="0" g="0" b="0"/>
-          </a:fillRef>
-          <a:effectRef idx="0">
-            <a:scrgbClr r="0" g="0" b="0"/>
-          </a:effectRef>
-          <a:fontRef idx="minor"/>
-        </p:style>
-        <p:txBody>
-          <a:bodyPr lIns="0" tIns="0" rIns="0" bIns="0" anchor="ctr">
-            <a:noAutofit/>
-          </a:bodyPr>
-          <a:lstStyle/>
-          <a:p>
-            <a:pPr defTabSz="914400">
-              <a:lnSpc>
-                <a:spcPct val="100000"/>
-              </a:lnSpc>
-              <a:tabLst>
-                <a:tab pos="0" algn="l"/>
-              </a:tabLst>
-            </a:pPr>
-            <a:r>
-              <a:rPr lang="en-US" sz="1800" b="1" u="none" strike="noStrike">
-                <a:solidFill>
-                  <a:srgbClr val="0F172A"/>
-                </a:solidFill>
-                <a:effectLst/>
-                <a:uFillTx/>
-                <a:latin typeface="Aptos"/>
-              </a:rPr>
-              <a:t>Quy tắc targetGrams</a:t>
-            </a:r>
-            <a:endParaRPr lang="en-US" sz="1800" b="0" u="none" strike="noStrike">
-              <a:solidFill>
-                <a:srgbClr val="000000"/>
-              </a:solidFill>
-              <a:effectLst/>
-              <a:uFillTx/>
-              <a:latin typeface="Arial"/>
-            </a:endParaRPr>
-          </a:p>
-        </p:txBody>
-      </p:sp>
-      <p:sp>
-        <p:nvSpPr>
-          <p:cNvPr id="11" name="Shape 5">
-            <a:extLst>
-              <a:ext uri="{FF2B5EF4-FFF2-40B4-BE49-F238E27FC236}">
-                <a16:creationId xmlns:a16="http://schemas.microsoft.com/office/drawing/2014/main" id="{53624D62-1091-41CB-A24B-A78C2CED95D6}"/>
-              </a:ext>
-            </a:extLst>
-          </p:cNvPr>
-          <p:cNvSpPr/>
-          <p:nvPr/>
-        </p:nvSpPr>
-        <p:spPr>
-          <a:xfrm>
-            <a:off x="6629400" y="3030942"/>
-            <a:ext cx="4297320" cy="959760"/>
-          </a:xfrm>
-          <a:prstGeom prst="roundRect">
-            <a:avLst>
-              <a:gd name="adj" fmla="val 5714"/>
-            </a:avLst>
-          </a:prstGeom>
-          <a:solidFill>
-            <a:srgbClr val="DCFCE7"/>
-          </a:solidFill>
-          <a:ln w="12700">
-            <a:solidFill>
-              <a:srgbClr val="E2E8F0"/>
-            </a:solidFill>
-            <a:round/>
-          </a:ln>
-        </p:spPr>
-        <p:style>
-          <a:lnRef idx="0">
-            <a:scrgbClr r="0" g="0" b="0"/>
-          </a:lnRef>
-          <a:fillRef idx="0">
-            <a:scrgbClr r="0" g="0" b="0"/>
-          </a:fillRef>
-          <a:effectRef idx="0">
-            <a:scrgbClr r="0" g="0" b="0"/>
-          </a:effectRef>
-          <a:fontRef idx="minor"/>
-        </p:style>
-        <p:txBody>
-          <a:bodyPr lIns="90000" tIns="45000" rIns="90000" bIns="45000" anchor="t">
-            <a:noAutofit/>
-          </a:bodyPr>
-          <a:lstStyle/>
-          <a:p>
-            <a:endParaRPr lang="en-US" sz="1800" b="0" u="none" strike="noStrike">
-              <a:solidFill>
-                <a:srgbClr val="000000"/>
-              </a:solidFill>
-              <a:effectLst/>
-              <a:uFillTx/>
-              <a:latin typeface="Arial"/>
-            </a:endParaRPr>
-          </a:p>
-        </p:txBody>
-      </p:sp>
-      <p:sp>
-        <p:nvSpPr>
-          <p:cNvPr id="12" name="Shape 6">
-            <a:extLst>
-              <a:ext uri="{FF2B5EF4-FFF2-40B4-BE49-F238E27FC236}">
-                <a16:creationId xmlns:a16="http://schemas.microsoft.com/office/drawing/2014/main" id="{192D96BD-F560-4519-9C00-5E39987BA988}"/>
-              </a:ext>
-            </a:extLst>
-          </p:cNvPr>
-          <p:cNvSpPr/>
-          <p:nvPr/>
-        </p:nvSpPr>
-        <p:spPr>
-          <a:xfrm>
-            <a:off x="6629400" y="3030942"/>
-            <a:ext cx="54360" cy="959760"/>
-          </a:xfrm>
-          <a:prstGeom prst="rect">
-            <a:avLst/>
-          </a:prstGeom>
-          <a:solidFill>
-            <a:srgbClr val="16A34A"/>
-          </a:solidFill>
-          <a:ln w="12700">
-            <a:solidFill>
-              <a:srgbClr val="16A34A"/>
-            </a:solidFill>
-            <a:round/>
-          </a:ln>
-        </p:spPr>
-        <p:style>
-          <a:lnRef idx="0">
-            <a:scrgbClr r="0" g="0" b="0"/>
-          </a:lnRef>
-          <a:fillRef idx="0">
-            <a:scrgbClr r="0" g="0" b="0"/>
-          </a:fillRef>
-          <a:effectRef idx="0">
-            <a:scrgbClr r="0" g="0" b="0"/>
-          </a:effectRef>
-          <a:fontRef idx="minor"/>
-        </p:style>
-        <p:txBody>
-          <a:bodyPr lIns="90000" tIns="45000" rIns="90000" bIns="45000" anchor="t">
-            <a:noAutofit/>
-          </a:bodyPr>
-          <a:lstStyle/>
-          <a:p>
-            <a:endParaRPr lang="en-US" sz="1800" b="0" u="none" strike="noStrike">
-              <a:solidFill>
-                <a:srgbClr val="FFFFFF"/>
-              </a:solidFill>
-              <a:effectLst/>
-              <a:uFillTx/>
-              <a:latin typeface="Arial"/>
-            </a:endParaRPr>
-          </a:p>
-        </p:txBody>
-      </p:sp>
-      <p:sp>
-        <p:nvSpPr>
-          <p:cNvPr id="13" name="Text 7">
-            <a:extLst>
-              <a:ext uri="{FF2B5EF4-FFF2-40B4-BE49-F238E27FC236}">
-                <a16:creationId xmlns:a16="http://schemas.microsoft.com/office/drawing/2014/main" id="{D2E3E0F7-5B05-4F79-85D3-D08A75EC8E92}"/>
-              </a:ext>
-            </a:extLst>
-          </p:cNvPr>
-          <p:cNvSpPr/>
-          <p:nvPr/>
-        </p:nvSpPr>
-        <p:spPr>
-          <a:xfrm>
-            <a:off x="6830640" y="3177102"/>
-            <a:ext cx="3931560" cy="273960"/>
-          </a:xfrm>
-          <a:prstGeom prst="rect">
-            <a:avLst/>
-          </a:prstGeom>
-          <a:noFill/>
-          <a:ln w="0">
-            <a:noFill/>
-          </a:ln>
-        </p:spPr>
-        <p:style>
-          <a:lnRef idx="0">
-            <a:scrgbClr r="0" g="0" b="0"/>
-          </a:lnRef>
-          <a:fillRef idx="0">
-            <a:scrgbClr r="0" g="0" b="0"/>
-          </a:fillRef>
-          <a:effectRef idx="0">
-            <a:scrgbClr r="0" g="0" b="0"/>
-          </a:effectRef>
-          <a:fontRef idx="minor"/>
-        </p:style>
-        <p:txBody>
-          <a:bodyPr lIns="0" tIns="0" rIns="0" bIns="0" anchor="ctr">
-            <a:noAutofit/>
-          </a:bodyPr>
-          <a:lstStyle/>
-          <a:p>
-            <a:pPr defTabSz="914400">
-              <a:lnSpc>
-                <a:spcPct val="100000"/>
-              </a:lnSpc>
-              <a:tabLst>
-                <a:tab pos="0" algn="l"/>
-              </a:tabLst>
-            </a:pPr>
-            <a:r>
-              <a:rPr lang="en-US" sz="1400" b="1" u="none" strike="noStrike">
-                <a:solidFill>
-                  <a:srgbClr val="0F172A"/>
-                </a:solidFill>
-                <a:effectLst/>
-                <a:uFillTx/>
-                <a:latin typeface="Aptos"/>
-              </a:rPr>
-              <a:t>targetGrams &gt; 0</a:t>
-            </a:r>
-            <a:endParaRPr lang="en-US" sz="1400" b="0" u="none" strike="noStrike">
-              <a:solidFill>
-                <a:srgbClr val="000000"/>
-              </a:solidFill>
-              <a:effectLst/>
-              <a:uFillTx/>
-              <a:latin typeface="Arial"/>
-            </a:endParaRPr>
-          </a:p>
-        </p:txBody>
-      </p:sp>
-      <p:sp>
-        <p:nvSpPr>
-          <p:cNvPr id="14" name="Text 8">
-            <a:extLst>
-              <a:ext uri="{FF2B5EF4-FFF2-40B4-BE49-F238E27FC236}">
-                <a16:creationId xmlns:a16="http://schemas.microsoft.com/office/drawing/2014/main" id="{25CC846B-8BCF-4871-9757-6A624FDA615C}"/>
-              </a:ext>
-            </a:extLst>
-          </p:cNvPr>
-          <p:cNvSpPr/>
-          <p:nvPr/>
-        </p:nvSpPr>
-        <p:spPr>
-          <a:xfrm>
-            <a:off x="6830640" y="3561222"/>
-            <a:ext cx="3931560" cy="301320"/>
-          </a:xfrm>
-          <a:prstGeom prst="rect">
-            <a:avLst/>
-          </a:prstGeom>
-          <a:noFill/>
-          <a:ln w="0">
-            <a:noFill/>
-          </a:ln>
-        </p:spPr>
-        <p:style>
-          <a:lnRef idx="0">
-            <a:scrgbClr r="0" g="0" b="0"/>
-          </a:lnRef>
-          <a:fillRef idx="0">
-            <a:scrgbClr r="0" g="0" b="0"/>
-          </a:fillRef>
-          <a:effectRef idx="0">
-            <a:scrgbClr r="0" g="0" b="0"/>
-          </a:effectRef>
-          <a:fontRef idx="minor"/>
-        </p:style>
-        <p:txBody>
-          <a:bodyPr lIns="360" tIns="360" rIns="360" bIns="360" anchor="t">
-            <a:normAutofit/>
-          </a:bodyPr>
-          <a:lstStyle/>
-          <a:p>
-            <a:pPr defTabSz="914400">
-              <a:lnSpc>
-                <a:spcPct val="100000"/>
-              </a:lnSpc>
-              <a:tabLst>
-                <a:tab pos="0" algn="l"/>
-              </a:tabLst>
-            </a:pPr>
-            <a:r>
-              <a:rPr lang="en-US" sz="1120" b="0" u="none" strike="noStrike">
-                <a:solidFill>
-                  <a:srgbClr val="334155"/>
-                </a:solidFill>
-                <a:effectLst/>
-                <a:uFillTx/>
-                <a:latin typeface="Aptos"/>
-              </a:rPr>
-              <a:t>Dùng trực tiếp giá trị trong command.</a:t>
-            </a:r>
-            <a:endParaRPr lang="en-US" sz="1120" b="0" u="none" strike="noStrike">
-              <a:solidFill>
-                <a:srgbClr val="000000"/>
-              </a:solidFill>
-              <a:effectLst/>
-              <a:uFillTx/>
-              <a:latin typeface="Arial"/>
-            </a:endParaRPr>
-          </a:p>
-        </p:txBody>
-      </p:sp>
-      <p:sp>
-        <p:nvSpPr>
-          <p:cNvPr id="15" name="Shape 9">
-            <a:extLst>
-              <a:ext uri="{FF2B5EF4-FFF2-40B4-BE49-F238E27FC236}">
-                <a16:creationId xmlns:a16="http://schemas.microsoft.com/office/drawing/2014/main" id="{D277F1E1-B780-410D-81F9-25063DF709F1}"/>
-              </a:ext>
-            </a:extLst>
-          </p:cNvPr>
-          <p:cNvSpPr/>
-          <p:nvPr/>
-        </p:nvSpPr>
-        <p:spPr>
-          <a:xfrm>
-            <a:off x="6629400" y="4219662"/>
-            <a:ext cx="4297320" cy="959760"/>
-          </a:xfrm>
-          <a:prstGeom prst="roundRect">
-            <a:avLst>
-              <a:gd name="adj" fmla="val 5714"/>
-            </a:avLst>
-          </a:prstGeom>
-          <a:solidFill>
-            <a:srgbClr val="DBEAFE"/>
-          </a:solidFill>
-          <a:ln w="12700">
-            <a:solidFill>
-              <a:srgbClr val="E2E8F0"/>
-            </a:solidFill>
-            <a:round/>
-          </a:ln>
-        </p:spPr>
-        <p:style>
-          <a:lnRef idx="0">
-            <a:scrgbClr r="0" g="0" b="0"/>
-          </a:lnRef>
-          <a:fillRef idx="0">
-            <a:scrgbClr r="0" g="0" b="0"/>
-          </a:fillRef>
-          <a:effectRef idx="0">
-            <a:scrgbClr r="0" g="0" b="0"/>
-          </a:effectRef>
-          <a:fontRef idx="minor"/>
-        </p:style>
-        <p:txBody>
-          <a:bodyPr lIns="90000" tIns="45000" rIns="90000" bIns="45000" anchor="t">
-            <a:noAutofit/>
-          </a:bodyPr>
-          <a:lstStyle/>
-          <a:p>
-            <a:endParaRPr lang="en-US" sz="1800" b="0" u="none" strike="noStrike">
-              <a:solidFill>
-                <a:srgbClr val="000000"/>
-              </a:solidFill>
-              <a:effectLst/>
-              <a:uFillTx/>
-              <a:latin typeface="Arial"/>
-            </a:endParaRPr>
-          </a:p>
-        </p:txBody>
-      </p:sp>
-      <p:sp>
-        <p:nvSpPr>
-          <p:cNvPr id="16" name="Shape 10">
-            <a:extLst>
-              <a:ext uri="{FF2B5EF4-FFF2-40B4-BE49-F238E27FC236}">
-                <a16:creationId xmlns:a16="http://schemas.microsoft.com/office/drawing/2014/main" id="{7B152308-CFDC-4A2C-8CDA-7AAFA345C79C}"/>
-              </a:ext>
-            </a:extLst>
-          </p:cNvPr>
-          <p:cNvSpPr/>
-          <p:nvPr/>
-        </p:nvSpPr>
-        <p:spPr>
-          <a:xfrm>
-            <a:off x="6629400" y="4219662"/>
-            <a:ext cx="54360" cy="959760"/>
-          </a:xfrm>
-          <a:prstGeom prst="rect">
-            <a:avLst/>
-          </a:prstGeom>
-          <a:solidFill>
-            <a:srgbClr val="2563EB"/>
-          </a:solidFill>
-          <a:ln w="12700">
-            <a:solidFill>
-              <a:srgbClr val="2563EB"/>
-            </a:solidFill>
-            <a:round/>
-          </a:ln>
-        </p:spPr>
-        <p:style>
-          <a:lnRef idx="0">
-            <a:scrgbClr r="0" g="0" b="0"/>
-          </a:lnRef>
-          <a:fillRef idx="0">
-            <a:scrgbClr r="0" g="0" b="0"/>
-          </a:fillRef>
-          <a:effectRef idx="0">
-            <a:scrgbClr r="0" g="0" b="0"/>
-          </a:effectRef>
-          <a:fontRef idx="minor"/>
-        </p:style>
-        <p:txBody>
-          <a:bodyPr lIns="90000" tIns="45000" rIns="90000" bIns="45000" anchor="t">
-            <a:noAutofit/>
-          </a:bodyPr>
-          <a:lstStyle/>
-          <a:p>
-            <a:endParaRPr lang="en-US" sz="1800" b="0" u="none" strike="noStrike">
-              <a:solidFill>
-                <a:srgbClr val="FFFFFF"/>
-              </a:solidFill>
-              <a:effectLst/>
-              <a:uFillTx/>
-              <a:latin typeface="Arial"/>
-            </a:endParaRPr>
-          </a:p>
-        </p:txBody>
-      </p:sp>
-      <p:sp>
-        <p:nvSpPr>
-          <p:cNvPr id="20" name="Text 11">
-            <a:extLst>
-              <a:ext uri="{FF2B5EF4-FFF2-40B4-BE49-F238E27FC236}">
-                <a16:creationId xmlns:a16="http://schemas.microsoft.com/office/drawing/2014/main" id="{DA21903E-5E17-4BF4-81FE-671B6ABB94FD}"/>
-              </a:ext>
-            </a:extLst>
-          </p:cNvPr>
-          <p:cNvSpPr/>
-          <p:nvPr/>
-        </p:nvSpPr>
-        <p:spPr>
-          <a:xfrm>
-            <a:off x="6830640" y="4365822"/>
-            <a:ext cx="3931560" cy="273960"/>
-          </a:xfrm>
-          <a:prstGeom prst="rect">
-            <a:avLst/>
-          </a:prstGeom>
-          <a:noFill/>
-          <a:ln w="0">
-            <a:noFill/>
-          </a:ln>
-        </p:spPr>
-        <p:style>
-          <a:lnRef idx="0">
-            <a:scrgbClr r="0" g="0" b="0"/>
-          </a:lnRef>
-          <a:fillRef idx="0">
-            <a:scrgbClr r="0" g="0" b="0"/>
-          </a:fillRef>
-          <a:effectRef idx="0">
-            <a:scrgbClr r="0" g="0" b="0"/>
-          </a:effectRef>
-          <a:fontRef idx="minor"/>
-        </p:style>
-        <p:txBody>
-          <a:bodyPr lIns="0" tIns="0" rIns="0" bIns="0" anchor="ctr">
-            <a:noAutofit/>
-          </a:bodyPr>
-          <a:lstStyle/>
-          <a:p>
-            <a:pPr defTabSz="914400">
-              <a:lnSpc>
-                <a:spcPct val="100000"/>
-              </a:lnSpc>
-              <a:tabLst>
-                <a:tab pos="0" algn="l"/>
-              </a:tabLst>
-            </a:pPr>
-            <a:r>
-              <a:rPr lang="en-US" sz="1400" b="1" u="none" strike="noStrike">
-                <a:solidFill>
-                  <a:srgbClr val="0F172A"/>
-                </a:solidFill>
-                <a:effectLst/>
-                <a:uFillTx/>
-                <a:latin typeface="Aptos"/>
-              </a:rPr>
-              <a:t>targetGrams ≤ 0</a:t>
-            </a:r>
-            <a:endParaRPr lang="en-US" sz="1400" b="0" u="none" strike="noStrike">
-              <a:solidFill>
-                <a:srgbClr val="000000"/>
-              </a:solidFill>
-              <a:effectLst/>
-              <a:uFillTx/>
-              <a:latin typeface="Arial"/>
-            </a:endParaRPr>
-          </a:p>
-        </p:txBody>
-      </p:sp>
-      <p:sp>
-        <p:nvSpPr>
-          <p:cNvPr id="21" name="Text 12">
-            <a:extLst>
-              <a:ext uri="{FF2B5EF4-FFF2-40B4-BE49-F238E27FC236}">
-                <a16:creationId xmlns:a16="http://schemas.microsoft.com/office/drawing/2014/main" id="{1D6BCD9A-52B3-45B8-9C66-68C53D0D3AF2}"/>
-              </a:ext>
-            </a:extLst>
-          </p:cNvPr>
-          <p:cNvSpPr/>
-          <p:nvPr/>
-        </p:nvSpPr>
-        <p:spPr>
-          <a:xfrm>
-            <a:off x="6830640" y="4749942"/>
-            <a:ext cx="3931560" cy="301320"/>
-          </a:xfrm>
-          <a:prstGeom prst="rect">
-            <a:avLst/>
-          </a:prstGeom>
-          <a:noFill/>
-          <a:ln w="0">
-            <a:noFill/>
-          </a:ln>
-        </p:spPr>
-        <p:style>
-          <a:lnRef idx="0">
-            <a:scrgbClr r="0" g="0" b="0"/>
-          </a:lnRef>
-          <a:fillRef idx="0">
-            <a:scrgbClr r="0" g="0" b="0"/>
-          </a:fillRef>
-          <a:effectRef idx="0">
-            <a:scrgbClr r="0" g="0" b="0"/>
-          </a:effectRef>
-          <a:fontRef idx="minor"/>
-        </p:style>
-        <p:txBody>
-          <a:bodyPr lIns="360" tIns="360" rIns="360" bIns="360" anchor="t">
-            <a:normAutofit/>
-          </a:bodyPr>
-          <a:lstStyle/>
-          <a:p>
-            <a:pPr defTabSz="914400">
-              <a:lnSpc>
-                <a:spcPct val="100000"/>
-              </a:lnSpc>
-              <a:tabLst>
-                <a:tab pos="0" algn="l"/>
-              </a:tabLst>
-            </a:pPr>
-            <a:r>
-              <a:rPr lang="en-US" sz="1120" b="0" u="none" strike="noStrike">
-                <a:solidFill>
-                  <a:srgbClr val="334155"/>
-                </a:solidFill>
-                <a:effectLst/>
-                <a:uFillTx/>
-                <a:latin typeface="Aptos"/>
-              </a:rPr>
-              <a:t>Đọc portionGrams từ Firebase.</a:t>
-            </a:r>
-            <a:endParaRPr lang="en-US" sz="1120" b="0" u="none" strike="noStrike">
-              <a:solidFill>
-                <a:srgbClr val="000000"/>
-              </a:solidFill>
-              <a:effectLst/>
-              <a:uFillTx/>
-              <a:latin typeface="Arial"/>
-            </a:endParaRPr>
-          </a:p>
-        </p:txBody>
-      </p:sp>
-      <p:sp>
-        <p:nvSpPr>
-          <p:cNvPr id="22" name="Shape 13">
-            <a:extLst>
-              <a:ext uri="{FF2B5EF4-FFF2-40B4-BE49-F238E27FC236}">
-                <a16:creationId xmlns:a16="http://schemas.microsoft.com/office/drawing/2014/main" id="{6CA31563-F685-4DEF-BD9B-F2B23D404D5A}"/>
-              </a:ext>
-            </a:extLst>
-          </p:cNvPr>
-          <p:cNvSpPr/>
-          <p:nvPr/>
-        </p:nvSpPr>
-        <p:spPr>
-          <a:xfrm>
-            <a:off x="6629400" y="5408382"/>
-            <a:ext cx="4297320" cy="959760"/>
-          </a:xfrm>
-          <a:prstGeom prst="roundRect">
-            <a:avLst>
-              <a:gd name="adj" fmla="val 5714"/>
-            </a:avLst>
-          </a:prstGeom>
-          <a:solidFill>
-            <a:srgbClr val="FFEDD5"/>
-          </a:solidFill>
-          <a:ln w="12700">
-            <a:solidFill>
-              <a:srgbClr val="E2E8F0"/>
-            </a:solidFill>
-            <a:round/>
-          </a:ln>
-        </p:spPr>
-        <p:style>
-          <a:lnRef idx="0">
-            <a:scrgbClr r="0" g="0" b="0"/>
-          </a:lnRef>
-          <a:fillRef idx="0">
-            <a:scrgbClr r="0" g="0" b="0"/>
-          </a:fillRef>
-          <a:effectRef idx="0">
-            <a:scrgbClr r="0" g="0" b="0"/>
-          </a:effectRef>
-          <a:fontRef idx="minor"/>
-        </p:style>
-        <p:txBody>
-          <a:bodyPr lIns="90000" tIns="45000" rIns="90000" bIns="45000" anchor="t">
-            <a:noAutofit/>
-          </a:bodyPr>
-          <a:lstStyle/>
-          <a:p>
-            <a:endParaRPr lang="en-US" sz="1800" b="0" u="none" strike="noStrike">
-              <a:solidFill>
-                <a:srgbClr val="000000"/>
-              </a:solidFill>
-              <a:effectLst/>
-              <a:uFillTx/>
-              <a:latin typeface="Arial"/>
-            </a:endParaRPr>
-          </a:p>
-        </p:txBody>
-      </p:sp>
-      <p:sp>
-        <p:nvSpPr>
-          <p:cNvPr id="23" name="Shape 14">
-            <a:extLst>
-              <a:ext uri="{FF2B5EF4-FFF2-40B4-BE49-F238E27FC236}">
-                <a16:creationId xmlns:a16="http://schemas.microsoft.com/office/drawing/2014/main" id="{167A5AC2-EAFD-442B-89B7-EFBEE2159462}"/>
-              </a:ext>
-            </a:extLst>
-          </p:cNvPr>
-          <p:cNvSpPr/>
-          <p:nvPr/>
-        </p:nvSpPr>
-        <p:spPr>
-          <a:xfrm>
-            <a:off x="6629400" y="5408382"/>
-            <a:ext cx="54360" cy="959760"/>
-          </a:xfrm>
-          <a:prstGeom prst="rect">
-            <a:avLst/>
-          </a:prstGeom>
-          <a:solidFill>
-            <a:srgbClr val="EA580C"/>
-          </a:solidFill>
-          <a:ln w="12700">
-            <a:solidFill>
-              <a:srgbClr val="EA580C"/>
-            </a:solidFill>
-            <a:round/>
-          </a:ln>
-        </p:spPr>
-        <p:style>
-          <a:lnRef idx="0">
-            <a:scrgbClr r="0" g="0" b="0"/>
-          </a:lnRef>
-          <a:fillRef idx="0">
-            <a:scrgbClr r="0" g="0" b="0"/>
-          </a:fillRef>
-          <a:effectRef idx="0">
-            <a:scrgbClr r="0" g="0" b="0"/>
-          </a:effectRef>
-          <a:fontRef idx="minor"/>
-        </p:style>
-        <p:txBody>
-          <a:bodyPr lIns="90000" tIns="45000" rIns="90000" bIns="45000" anchor="t">
-            <a:noAutofit/>
-          </a:bodyPr>
-          <a:lstStyle/>
-          <a:p>
-            <a:endParaRPr lang="en-US" sz="1800" b="0" u="none" strike="noStrike">
-              <a:solidFill>
-                <a:srgbClr val="FFFFFF"/>
-              </a:solidFill>
-              <a:effectLst/>
-              <a:uFillTx/>
-              <a:latin typeface="Arial"/>
-            </a:endParaRPr>
-          </a:p>
-        </p:txBody>
-      </p:sp>
-      <p:sp>
-        <p:nvSpPr>
-          <p:cNvPr id="24" name="Text 15">
-            <a:extLst>
-              <a:ext uri="{FF2B5EF4-FFF2-40B4-BE49-F238E27FC236}">
-                <a16:creationId xmlns:a16="http://schemas.microsoft.com/office/drawing/2014/main" id="{5FEEE4A2-E894-4C08-8956-5C372ABB4C49}"/>
-              </a:ext>
-            </a:extLst>
-          </p:cNvPr>
-          <p:cNvSpPr/>
-          <p:nvPr/>
-        </p:nvSpPr>
-        <p:spPr>
-          <a:xfrm>
-            <a:off x="6830640" y="5554542"/>
-            <a:ext cx="3931560" cy="273960"/>
-          </a:xfrm>
-          <a:prstGeom prst="rect">
-            <a:avLst/>
-          </a:prstGeom>
-          <a:noFill/>
-          <a:ln w="0">
-            <a:noFill/>
-          </a:ln>
-        </p:spPr>
-        <p:style>
-          <a:lnRef idx="0">
-            <a:scrgbClr r="0" g="0" b="0"/>
-          </a:lnRef>
-          <a:fillRef idx="0">
-            <a:scrgbClr r="0" g="0" b="0"/>
-          </a:fillRef>
-          <a:effectRef idx="0">
-            <a:scrgbClr r="0" g="0" b="0"/>
-          </a:effectRef>
-          <a:fontRef idx="minor"/>
-        </p:style>
-        <p:txBody>
-          <a:bodyPr lIns="0" tIns="0" rIns="0" bIns="0" anchor="ctr">
-            <a:noAutofit/>
-          </a:bodyPr>
-          <a:lstStyle/>
-          <a:p>
-            <a:pPr defTabSz="914400">
-              <a:lnSpc>
-                <a:spcPct val="100000"/>
-              </a:lnSpc>
-              <a:tabLst>
-                <a:tab pos="0" algn="l"/>
-              </a:tabLst>
-            </a:pPr>
-            <a:r>
-              <a:rPr lang="en-US" sz="1400" b="1" u="none" strike="noStrike">
-                <a:solidFill>
-                  <a:srgbClr val="0F172A"/>
-                </a:solidFill>
-                <a:effectLst/>
-                <a:uFillTx/>
-                <a:latin typeface="Aptos"/>
-              </a:rPr>
-              <a:t>Không có portion hợp lệ</a:t>
-            </a:r>
-            <a:endParaRPr lang="en-US" sz="1400" b="0" u="none" strike="noStrike">
-              <a:solidFill>
-                <a:srgbClr val="000000"/>
-              </a:solidFill>
-              <a:effectLst/>
-              <a:uFillTx/>
-              <a:latin typeface="Arial"/>
-            </a:endParaRPr>
-          </a:p>
-        </p:txBody>
-      </p:sp>
-      <p:sp>
-        <p:nvSpPr>
-          <p:cNvPr id="25" name="Text 16">
-            <a:extLst>
-              <a:ext uri="{FF2B5EF4-FFF2-40B4-BE49-F238E27FC236}">
-                <a16:creationId xmlns:a16="http://schemas.microsoft.com/office/drawing/2014/main" id="{8BC06F97-57A8-4A38-99D6-DC6D15729C1B}"/>
-              </a:ext>
-            </a:extLst>
-          </p:cNvPr>
-          <p:cNvSpPr/>
-          <p:nvPr/>
-        </p:nvSpPr>
-        <p:spPr>
-          <a:xfrm>
-            <a:off x="6830640" y="5938662"/>
-            <a:ext cx="3931560" cy="301320"/>
-          </a:xfrm>
-          <a:prstGeom prst="rect">
-            <a:avLst/>
-          </a:prstGeom>
-          <a:noFill/>
-          <a:ln w="0">
-            <a:noFill/>
-          </a:ln>
-        </p:spPr>
-        <p:style>
-          <a:lnRef idx="0">
-            <a:scrgbClr r="0" g="0" b="0"/>
-          </a:lnRef>
-          <a:fillRef idx="0">
-            <a:scrgbClr r="0" g="0" b="0"/>
-          </a:fillRef>
-          <a:effectRef idx="0">
-            <a:scrgbClr r="0" g="0" b="0"/>
-          </a:effectRef>
-          <a:fontRef idx="minor"/>
-        </p:style>
-        <p:txBody>
-          <a:bodyPr lIns="360" tIns="360" rIns="360" bIns="360" anchor="t">
-            <a:normAutofit/>
-          </a:bodyPr>
-          <a:lstStyle/>
-          <a:p>
-            <a:pPr defTabSz="914400">
-              <a:lnSpc>
-                <a:spcPct val="100000"/>
-              </a:lnSpc>
-              <a:tabLst>
-                <a:tab pos="0" algn="l"/>
-              </a:tabLst>
-            </a:pPr>
-            <a:r>
-              <a:rPr lang="en-US" sz="1120" b="0" u="none" strike="noStrike">
-                <a:solidFill>
-                  <a:srgbClr val="334155"/>
-                </a:solidFill>
-                <a:effectLst/>
-                <a:uFillTx/>
-                <a:latin typeface="Aptos"/>
-              </a:rPr>
-              <a:t>Fallback mặc định: DOG 80 g • CAT 45 g</a:t>
-            </a:r>
-            <a:endParaRPr lang="en-US" sz="1120" b="0" u="none" strike="noStrike">
-              <a:solidFill>
-                <a:srgbClr val="000000"/>
-              </a:solidFill>
-              <a:effectLst/>
-              <a:uFillTx/>
-              <a:latin typeface="Arial"/>
-            </a:endParaRPr>
-          </a:p>
-        </p:txBody>
-      </p:sp>
-    </p:spTree>
-    <p:extLst>
-      <p:ext uri="{BB962C8B-B14F-4D97-AF65-F5344CB8AC3E}">
-        <p14:creationId xmlns:p14="http://schemas.microsoft.com/office/powerpoint/2010/main" val="4035799632"/>
-      </p:ext>
-    </p:extLst>
-  </p:cSld>
-  <p:clrMapOvr>
-    <a:masterClrMapping/>
-  </p:clrMapOvr>
-</p:sld>
-</file>
-
 <file path=ppt/slides/slide9.xml><?xml version="1.0" encoding="utf-8"?>
 <p:sld xmlns:a="http://schemas.openxmlformats.org/drawingml/2006/main" xmlns:r="http://schemas.openxmlformats.org/officeDocument/2006/relationships" xmlns:p="http://schemas.openxmlformats.org/presentationml/2006/main">
   <p:cSld>
@@ -14156,10 +14792,10 @@
       </p:sp>
       <p:sp>
         <p:nvSpPr>
-          <p:cNvPr id="26" name="Text 0">
+          <p:cNvPr id="6" name="Text 0">
             <a:extLst>
               <a:ext uri="{FF2B5EF4-FFF2-40B4-BE49-F238E27FC236}">
-                <a16:creationId xmlns:a16="http://schemas.microsoft.com/office/drawing/2014/main" id="{C5FE1E40-2592-4EAE-B192-39FB29C80BD2}"/>
+                <a16:creationId xmlns:a16="http://schemas.microsoft.com/office/drawing/2014/main" id="{D329268E-789D-443E-A024-FE5F872D03BD}"/>
               </a:ext>
             </a:extLst>
           </p:cNvPr>
@@ -14168,7 +14804,7 @@
         </p:nvSpPr>
         <p:spPr>
           <a:xfrm>
-            <a:off x="305160" y="1064308"/>
+            <a:off x="777240" y="1311942"/>
             <a:ext cx="10972440" cy="502560"/>
           </a:xfrm>
           <a:prstGeom prst="rect">
@@ -14206,6 +14842,15 @@
               </a:tabLst>
             </a:pPr>
             <a:r>
+              <a:rPr lang="en-US" sz="2600" b="1">
+                <a:solidFill>
+                  <a:srgbClr val="0F172A"/>
+                </a:solidFill>
+                <a:latin typeface="Aptos"/>
+              </a:rPr>
+              <a:t>4</a:t>
+            </a:r>
+            <a:r>
               <a:rPr lang="en-US" sz="2600" b="1" u="none" strike="noStrike">
                 <a:solidFill>
                   <a:srgbClr val="0F172A"/>
@@ -14214,7 +14859,7 @@
                 <a:uFillTx/>
                 <a:latin typeface="Aptos"/>
               </a:rPr>
-              <a:t> Tích hợp AI ở phiên bản tiếp theo</a:t>
+              <a:t>. Lệnh Feed Now &amp; chiến lược khẩu phần</a:t>
             </a:r>
             <a:endParaRPr lang="en-US" sz="2600" b="0" u="none" strike="noStrike">
               <a:solidFill>
@@ -14229,10 +14874,10 @@
       </p:sp>
       <p:sp>
         <p:nvSpPr>
-          <p:cNvPr id="27" name="Text 1">
+          <p:cNvPr id="7" name="Text 1">
             <a:extLst>
               <a:ext uri="{FF2B5EF4-FFF2-40B4-BE49-F238E27FC236}">
-                <a16:creationId xmlns:a16="http://schemas.microsoft.com/office/drawing/2014/main" id="{EC37DD4C-6257-4C54-8820-8829FD3E6DE9}"/>
+                <a16:creationId xmlns:a16="http://schemas.microsoft.com/office/drawing/2014/main" id="{32DDF8D2-D518-4FD5-ADA3-3549A81579A8}"/>
               </a:ext>
             </a:extLst>
           </p:cNvPr>
@@ -14241,7 +14886,7 @@
         </p:nvSpPr>
         <p:spPr>
           <a:xfrm>
-            <a:off x="323520" y="1612948"/>
+            <a:off x="795600" y="1860582"/>
             <a:ext cx="10789560" cy="292320"/>
           </a:xfrm>
           <a:prstGeom prst="rect">
@@ -14287,7 +14932,7 @@
                 <a:uFillTx/>
                 <a:latin typeface="Aptos"/>
               </a:rPr>
-              <a:t>Điểm mạnh của V1: AI không cần thay đổi logic cấp thức ăn hiện có.</a:t>
+              <a:t>Firmware ưu tiên targetGrams trong command; nếu không hợp lệ sẽ dùng cấu hình fallback.</a:t>
             </a:r>
             <a:endParaRPr lang="en-US" sz="1150" b="0" u="none" strike="noStrike">
               <a:solidFill>
@@ -14302,10 +14947,10 @@
       </p:sp>
       <p:sp>
         <p:nvSpPr>
-          <p:cNvPr id="28" name="Shape 2">
+          <p:cNvPr id="8" name="Shape 2">
             <a:extLst>
               <a:ext uri="{FF2B5EF4-FFF2-40B4-BE49-F238E27FC236}">
-                <a16:creationId xmlns:a16="http://schemas.microsoft.com/office/drawing/2014/main" id="{5B30E450-37C6-4F06-9C60-AE2D8DB0116F}"/>
+                <a16:creationId xmlns:a16="http://schemas.microsoft.com/office/drawing/2014/main" id="{370503DC-AC37-4E67-9D00-835153CB64C5}"/>
               </a:ext>
             </a:extLst>
           </p:cNvPr>
@@ -14314,20 +14959,20 @@
         </p:nvSpPr>
         <p:spPr>
           <a:xfrm>
-            <a:off x="533760" y="2188948"/>
-            <a:ext cx="2925720" cy="2011320"/>
+            <a:off x="914400" y="2345142"/>
+            <a:ext cx="5120280" cy="3337200"/>
           </a:xfrm>
           <a:prstGeom prst="roundRect">
             <a:avLst>
-              <a:gd name="adj" fmla="val 3636"/>
+              <a:gd name="adj" fmla="val 2192"/>
             </a:avLst>
           </a:prstGeom>
           <a:solidFill>
-            <a:srgbClr val="FEF3C7"/>
+            <a:srgbClr val="0F172A"/>
           </a:solidFill>
-          <a:ln w="19050">
+          <a:ln w="12700">
             <a:solidFill>
-              <a:srgbClr val="F59E0B"/>
+              <a:srgbClr val="334155"/>
             </a:solidFill>
             <a:round/>
           </a:ln>
@@ -14352,7 +14997,7 @@
           <a:p>
             <a:endParaRPr lang="en-US" sz="1800" b="0" u="none" strike="noStrike">
               <a:solidFill>
-                <a:srgbClr val="000000"/>
+                <a:srgbClr val="FFFFFF"/>
               </a:solidFill>
               <a:effectLst/>
               <a:uFillTx/>
@@ -14363,10 +15008,10 @@
       </p:sp>
       <p:sp>
         <p:nvSpPr>
-          <p:cNvPr id="29" name="Text 3">
+          <p:cNvPr id="9" name="Text 3">
             <a:extLst>
               <a:ext uri="{FF2B5EF4-FFF2-40B4-BE49-F238E27FC236}">
-                <a16:creationId xmlns:a16="http://schemas.microsoft.com/office/drawing/2014/main" id="{A2C34E6A-84D6-4C32-9674-A6539B4E2681}"/>
+                <a16:creationId xmlns:a16="http://schemas.microsoft.com/office/drawing/2014/main" id="{0416DE33-8EB3-44F7-9A41-8256A4596364}"/>
               </a:ext>
             </a:extLst>
           </p:cNvPr>
@@ -14375,8 +15020,8 @@
         </p:nvSpPr>
         <p:spPr>
           <a:xfrm>
-            <a:off x="1036680" y="2554708"/>
-            <a:ext cx="1919880" cy="347040"/>
+            <a:off x="1207080" y="2646822"/>
+            <a:ext cx="4571640" cy="2697120"/>
           </a:xfrm>
           <a:prstGeom prst="rect">
             <a:avLst/>
@@ -14404,7 +15049,7 @@
           </a:bodyPr>
           <a:lstStyle/>
           <a:p>
-            <a:pPr algn="ctr" defTabSz="914400">
+            <a:pPr defTabSz="914400">
               <a:lnSpc>
                 <a:spcPct val="100000"/>
               </a:lnSpc>
@@ -14413,17 +15058,18 @@
               </a:tabLst>
             </a:pPr>
             <a:r>
-              <a:rPr lang="en-US" sz="2000" b="1" u="none" strike="noStrike">
+              <a:rPr lang="en-US" sz="1400" b="0" u="none" strike="noStrike">
                 <a:solidFill>
-                  <a:srgbClr val="0F172A"/>
+                  <a:srgbClr val="E2E8F0"/>
                 </a:solidFill>
                 <a:effectLst/>
                 <a:uFillTx/>
-                <a:latin typeface="Aptos"/>
+                <a:latin typeface="Courier New"/>
+                <a:ea typeface="Courier New"/>
               </a:rPr>
-              <a:t>AI Classifier</a:t>
-            </a:r>
-            <a:endParaRPr lang="en-US" sz="2000" b="0" u="none" strike="noStrike">
+              <a:t>{</a:t>
+            </a:r>
+            <a:endParaRPr lang="en-US" sz="1400" b="0" u="none" strike="noStrike">
               <a:solidFill>
                 <a:srgbClr val="000000"/>
               </a:solidFill>
@@ -14432,14 +15078,224 @@
               <a:latin typeface="Arial"/>
             </a:endParaRPr>
           </a:p>
+          <a:p>
+            <a:pPr defTabSz="914400">
+              <a:lnSpc>
+                <a:spcPct val="100000"/>
+              </a:lnSpc>
+              <a:tabLst>
+                <a:tab pos="0" algn="l"/>
+              </a:tabLst>
+            </a:pPr>
+            <a:r>
+              <a:rPr lang="en-US" sz="1400" b="0" u="none" strike="noStrike">
+                <a:solidFill>
+                  <a:srgbClr val="E2E8F0"/>
+                </a:solidFill>
+                <a:effectLst/>
+                <a:uFillTx/>
+                <a:latin typeface="Courier New"/>
+                <a:ea typeface="Courier New"/>
+              </a:rPr>
+              <a:t>  "requestId": "req-001",</a:t>
+            </a:r>
+            <a:endParaRPr lang="en-US" sz="1400" b="0" u="none" strike="noStrike">
+              <a:solidFill>
+                <a:srgbClr val="000000"/>
+              </a:solidFill>
+              <a:effectLst/>
+              <a:uFillTx/>
+              <a:latin typeface="Arial"/>
+            </a:endParaRPr>
+          </a:p>
+          <a:p>
+            <a:pPr defTabSz="914400">
+              <a:lnSpc>
+                <a:spcPct val="100000"/>
+              </a:lnSpc>
+              <a:tabLst>
+                <a:tab pos="0" algn="l"/>
+              </a:tabLst>
+            </a:pPr>
+            <a:r>
+              <a:rPr lang="en-US" sz="1400" b="0" u="none" strike="noStrike">
+                <a:solidFill>
+                  <a:srgbClr val="E2E8F0"/>
+                </a:solidFill>
+                <a:effectLst/>
+                <a:uFillTx/>
+                <a:latin typeface="Courier New"/>
+                <a:ea typeface="Courier New"/>
+              </a:rPr>
+              <a:t>  "type": "feed_now",</a:t>
+            </a:r>
+            <a:endParaRPr lang="en-US" sz="1400" b="0" u="none" strike="noStrike">
+              <a:solidFill>
+                <a:srgbClr val="000000"/>
+              </a:solidFill>
+              <a:effectLst/>
+              <a:uFillTx/>
+              <a:latin typeface="Arial"/>
+            </a:endParaRPr>
+          </a:p>
+          <a:p>
+            <a:pPr defTabSz="914400">
+              <a:lnSpc>
+                <a:spcPct val="100000"/>
+              </a:lnSpc>
+              <a:tabLst>
+                <a:tab pos="0" algn="l"/>
+              </a:tabLst>
+            </a:pPr>
+            <a:r>
+              <a:rPr lang="en-US" sz="1400" b="0" u="none" strike="noStrike">
+                <a:solidFill>
+                  <a:srgbClr val="E2E8F0"/>
+                </a:solidFill>
+                <a:effectLst/>
+                <a:uFillTx/>
+                <a:latin typeface="Courier New"/>
+                <a:ea typeface="Courier New"/>
+              </a:rPr>
+              <a:t>  "speciesId": "dog",</a:t>
+            </a:r>
+            <a:endParaRPr lang="en-US" sz="1400" b="0" u="none" strike="noStrike">
+              <a:solidFill>
+                <a:srgbClr val="000000"/>
+              </a:solidFill>
+              <a:effectLst/>
+              <a:uFillTx/>
+              <a:latin typeface="Arial"/>
+            </a:endParaRPr>
+          </a:p>
+          <a:p>
+            <a:pPr defTabSz="914400">
+              <a:lnSpc>
+                <a:spcPct val="100000"/>
+              </a:lnSpc>
+              <a:tabLst>
+                <a:tab pos="0" algn="l"/>
+              </a:tabLst>
+            </a:pPr>
+            <a:r>
+              <a:rPr lang="en-US" sz="1400" b="0" u="none" strike="noStrike">
+                <a:solidFill>
+                  <a:srgbClr val="E2E8F0"/>
+                </a:solidFill>
+                <a:effectLst/>
+                <a:uFillTx/>
+                <a:latin typeface="Courier New"/>
+                <a:ea typeface="Courier New"/>
+              </a:rPr>
+              <a:t>  "targetGrams": 80,</a:t>
+            </a:r>
+            <a:endParaRPr lang="en-US" sz="1400" b="0" u="none" strike="noStrike">
+              <a:solidFill>
+                <a:srgbClr val="000000"/>
+              </a:solidFill>
+              <a:effectLst/>
+              <a:uFillTx/>
+              <a:latin typeface="Arial"/>
+            </a:endParaRPr>
+          </a:p>
+          <a:p>
+            <a:pPr defTabSz="914400">
+              <a:lnSpc>
+                <a:spcPct val="100000"/>
+              </a:lnSpc>
+              <a:tabLst>
+                <a:tab pos="0" algn="l"/>
+              </a:tabLst>
+            </a:pPr>
+            <a:r>
+              <a:rPr lang="en-US" sz="1400" b="0" u="none" strike="noStrike">
+                <a:solidFill>
+                  <a:srgbClr val="E2E8F0"/>
+                </a:solidFill>
+                <a:effectLst/>
+                <a:uFillTx/>
+                <a:latin typeface="Courier New"/>
+                <a:ea typeface="Courier New"/>
+              </a:rPr>
+              <a:t>  "status": "pending",</a:t>
+            </a:r>
+            <a:endParaRPr lang="en-US" sz="1400" b="0" u="none" strike="noStrike">
+              <a:solidFill>
+                <a:srgbClr val="000000"/>
+              </a:solidFill>
+              <a:effectLst/>
+              <a:uFillTx/>
+              <a:latin typeface="Arial"/>
+            </a:endParaRPr>
+          </a:p>
+          <a:p>
+            <a:pPr defTabSz="914400">
+              <a:lnSpc>
+                <a:spcPct val="100000"/>
+              </a:lnSpc>
+              <a:tabLst>
+                <a:tab pos="0" algn="l"/>
+              </a:tabLst>
+            </a:pPr>
+            <a:r>
+              <a:rPr lang="en-US" sz="1400" b="0" u="none" strike="noStrike">
+                <a:solidFill>
+                  <a:srgbClr val="E2E8F0"/>
+                </a:solidFill>
+                <a:effectLst/>
+                <a:uFillTx/>
+                <a:latin typeface="Courier New"/>
+                <a:ea typeface="Courier New"/>
+              </a:rPr>
+              <a:t>  "requestedAtEpoch": 1788890000</a:t>
+            </a:r>
+            <a:endParaRPr lang="en-US" sz="1400" b="0" u="none" strike="noStrike">
+              <a:solidFill>
+                <a:srgbClr val="000000"/>
+              </a:solidFill>
+              <a:effectLst/>
+              <a:uFillTx/>
+              <a:latin typeface="Arial"/>
+            </a:endParaRPr>
+          </a:p>
+          <a:p>
+            <a:pPr defTabSz="914400">
+              <a:lnSpc>
+                <a:spcPct val="100000"/>
+              </a:lnSpc>
+              <a:tabLst>
+                <a:tab pos="0" algn="l"/>
+              </a:tabLst>
+            </a:pPr>
+            <a:r>
+              <a:rPr lang="en-US" sz="1400" b="0" u="none" strike="noStrike">
+                <a:solidFill>
+                  <a:srgbClr val="E2E8F0"/>
+                </a:solidFill>
+                <a:effectLst/>
+                <a:uFillTx/>
+                <a:latin typeface="Courier New"/>
+                <a:ea typeface="Courier New"/>
+              </a:rPr>
+              <a:t>}</a:t>
+            </a:r>
+            <a:endParaRPr lang="en-US" sz="1400" b="0" u="none" strike="noStrike">
+              <a:solidFill>
+                <a:srgbClr val="000000"/>
+              </a:solidFill>
+              <a:effectLst/>
+              <a:uFillTx/>
+              <a:latin typeface="Arial"/>
+            </a:endParaRPr>
+          </a:p>
         </p:txBody>
       </p:sp>
       <p:sp>
         <p:nvSpPr>
-          <p:cNvPr id="30" name="Text 4">
+          <p:cNvPr id="10" name="Text 4">
             <a:extLst>
               <a:ext uri="{FF2B5EF4-FFF2-40B4-BE49-F238E27FC236}">
-                <a16:creationId xmlns:a16="http://schemas.microsoft.com/office/drawing/2014/main" id="{447F667B-B94B-416D-AA9D-5AC853159872}"/>
+                <a16:creationId xmlns:a16="http://schemas.microsoft.com/office/drawing/2014/main" id="{0A34DBC5-C1CD-4898-81BA-ABA0CCF60055}"/>
               </a:ext>
             </a:extLst>
           </p:cNvPr>
@@ -14448,8 +15304,8 @@
         </p:nvSpPr>
         <p:spPr>
           <a:xfrm>
-            <a:off x="945240" y="3075988"/>
-            <a:ext cx="2102760" cy="594000"/>
+            <a:off x="6675120" y="2482302"/>
+            <a:ext cx="4114440" cy="365400"/>
           </a:xfrm>
           <a:prstGeom prst="rect">
             <a:avLst/>
@@ -14477,7 +15333,7 @@
           </a:bodyPr>
           <a:lstStyle/>
           <a:p>
-            <a:pPr algn="ctr" defTabSz="914400">
+            <a:pPr defTabSz="914400">
               <a:lnSpc>
                 <a:spcPct val="100000"/>
               </a:lnSpc>
@@ -14486,18 +15342,17 @@
               </a:tabLst>
             </a:pPr>
             <a:r>
-              <a:rPr lang="en-US" sz="1300" b="0" u="none" strike="noStrike">
+              <a:rPr lang="en-US" sz="1800" b="1" u="none" strike="noStrike">
                 <a:solidFill>
-                  <a:srgbClr val="92400E"/>
+                  <a:srgbClr val="0F172A"/>
                 </a:solidFill>
                 <a:effectLst/>
                 <a:uFillTx/>
-                <a:latin typeface="Courier New"/>
-                <a:ea typeface="Courier New"/>
+                <a:latin typeface="Aptos"/>
               </a:rPr>
-              <a:t>speciesId = "dog" / "cat"</a:t>
-            </a:r>
-            <a:endParaRPr lang="en-US" sz="1300" b="0" u="none" strike="noStrike">
+              <a:t>Quy tắc targetGrams</a:t>
+            </a:r>
+            <a:endParaRPr lang="en-US" sz="1800" b="0" u="none" strike="noStrike">
               <a:solidFill>
                 <a:srgbClr val="000000"/>
               </a:solidFill>
@@ -14506,44 +15361,14 @@
               <a:latin typeface="Arial"/>
             </a:endParaRPr>
           </a:p>
-          <a:p>
-            <a:pPr algn="ctr" defTabSz="914400">
-              <a:lnSpc>
-                <a:spcPct val="100000"/>
-              </a:lnSpc>
-              <a:tabLst>
-                <a:tab pos="0" algn="l"/>
-              </a:tabLst>
-            </a:pPr>
-            <a:r>
-              <a:rPr lang="en-US" sz="1300" b="0" u="none" strike="noStrike">
-                <a:solidFill>
-                  <a:srgbClr val="92400E"/>
-                </a:solidFill>
-                <a:effectLst/>
-                <a:uFillTx/>
-                <a:latin typeface="Courier New"/>
-                <a:ea typeface="Courier New"/>
-              </a:rPr>
-              <a:t>confidence = 0.94</a:t>
-            </a:r>
-            <a:endParaRPr lang="en-US" sz="1300" b="0" u="none" strike="noStrike">
-              <a:solidFill>
-                <a:srgbClr val="000000"/>
-              </a:solidFill>
-              <a:effectLst/>
-              <a:uFillTx/>
-              <a:latin typeface="Arial"/>
-            </a:endParaRPr>
-          </a:p>
         </p:txBody>
       </p:sp>
       <p:sp>
         <p:nvSpPr>
-          <p:cNvPr id="31" name="Shape 5">
+          <p:cNvPr id="11" name="Shape 5">
             <a:extLst>
               <a:ext uri="{FF2B5EF4-FFF2-40B4-BE49-F238E27FC236}">
-                <a16:creationId xmlns:a16="http://schemas.microsoft.com/office/drawing/2014/main" id="{2E779399-A560-43EC-B312-A56E87503F42}"/>
+                <a16:creationId xmlns:a16="http://schemas.microsoft.com/office/drawing/2014/main" id="{53624D62-1091-41CB-A24B-A78C2CED95D6}"/>
               </a:ext>
             </a:extLst>
           </p:cNvPr>
@@ -14552,18 +15377,22 @@
         </p:nvSpPr>
         <p:spPr>
           <a:xfrm>
-            <a:off x="3505560" y="3194788"/>
-            <a:ext cx="914400" cy="360"/>
+            <a:off x="6629400" y="3030942"/>
+            <a:ext cx="4297320" cy="959760"/>
           </a:xfrm>
-          <a:prstGeom prst="line">
-            <a:avLst/>
+          <a:prstGeom prst="roundRect">
+            <a:avLst>
+              <a:gd name="adj" fmla="val 5714"/>
+            </a:avLst>
           </a:prstGeom>
-          <a:ln w="25400">
+          <a:solidFill>
+            <a:srgbClr val="DCFCE7"/>
+          </a:solidFill>
+          <a:ln w="12700">
             <a:solidFill>
-              <a:srgbClr val="F59E0B"/>
+              <a:srgbClr val="E2E8F0"/>
             </a:solidFill>
             <a:round/>
-            <a:tailEnd type="triangle" w="med" len="med"/>
           </a:ln>
         </p:spPr>
         <p:style>
@@ -14579,7 +15408,7 @@
           <a:fontRef idx="minor"/>
         </p:style>
         <p:txBody>
-          <a:bodyPr lIns="90000" tIns="-44640" rIns="90000" bIns="-44640" anchor="t" anchorCtr="1">
+          <a:bodyPr lIns="90000" tIns="45000" rIns="90000" bIns="45000" anchor="t">
             <a:noAutofit/>
           </a:bodyPr>
           <a:lstStyle/>
@@ -14597,10 +15426,10 @@
       </p:sp>
       <p:sp>
         <p:nvSpPr>
-          <p:cNvPr id="32" name="Shape 6">
+          <p:cNvPr id="12" name="Shape 6">
             <a:extLst>
               <a:ext uri="{FF2B5EF4-FFF2-40B4-BE49-F238E27FC236}">
-                <a16:creationId xmlns:a16="http://schemas.microsoft.com/office/drawing/2014/main" id="{1B867D23-B83A-455F-8BC7-F8D33F9ED5B5}"/>
+                <a16:creationId xmlns:a16="http://schemas.microsoft.com/office/drawing/2014/main" id="{192D96BD-F560-4519-9C00-5E39987BA988}"/>
               </a:ext>
             </a:extLst>
           </p:cNvPr>
@@ -14609,20 +15438,18 @@
         </p:nvSpPr>
         <p:spPr>
           <a:xfrm>
-            <a:off x="4465680" y="2188948"/>
-            <a:ext cx="2925720" cy="2011320"/>
+            <a:off x="6629400" y="3030942"/>
+            <a:ext cx="54360" cy="959760"/>
           </a:xfrm>
-          <a:prstGeom prst="roundRect">
-            <a:avLst>
-              <a:gd name="adj" fmla="val 3636"/>
-            </a:avLst>
+          <a:prstGeom prst="rect">
+            <a:avLst/>
           </a:prstGeom>
           <a:solidFill>
-            <a:srgbClr val="DBEAFE"/>
+            <a:srgbClr val="16A34A"/>
           </a:solidFill>
-          <a:ln w="19050">
+          <a:ln w="12700">
             <a:solidFill>
-              <a:srgbClr val="2563EB"/>
+              <a:srgbClr val="16A34A"/>
             </a:solidFill>
             <a:round/>
           </a:ln>
@@ -14647,7 +15474,7 @@
           <a:p>
             <a:endParaRPr lang="en-US" sz="1800" b="0" u="none" strike="noStrike">
               <a:solidFill>
-                <a:srgbClr val="000000"/>
+                <a:srgbClr val="FFFFFF"/>
               </a:solidFill>
               <a:effectLst/>
               <a:uFillTx/>
@@ -14658,10 +15485,10 @@
       </p:sp>
       <p:sp>
         <p:nvSpPr>
-          <p:cNvPr id="33" name="Text 7">
+          <p:cNvPr id="13" name="Text 7">
             <a:extLst>
               <a:ext uri="{FF2B5EF4-FFF2-40B4-BE49-F238E27FC236}">
-                <a16:creationId xmlns:a16="http://schemas.microsoft.com/office/drawing/2014/main" id="{7F85303C-BAD4-4732-94FF-4BF14D4ACD93}"/>
+                <a16:creationId xmlns:a16="http://schemas.microsoft.com/office/drawing/2014/main" id="{D2E3E0F7-5B05-4F79-85D3-D08A75EC8E92}"/>
               </a:ext>
             </a:extLst>
           </p:cNvPr>
@@ -14670,8 +15497,8 @@
         </p:nvSpPr>
         <p:spPr>
           <a:xfrm>
-            <a:off x="4968600" y="2554708"/>
-            <a:ext cx="1919880" cy="347040"/>
+            <a:off x="6830640" y="3177102"/>
+            <a:ext cx="3931560" cy="273960"/>
           </a:xfrm>
           <a:prstGeom prst="rect">
             <a:avLst/>
@@ -14699,7 +15526,7 @@
           </a:bodyPr>
           <a:lstStyle/>
           <a:p>
-            <a:pPr algn="ctr" defTabSz="914400">
+            <a:pPr defTabSz="914400">
               <a:lnSpc>
                 <a:spcPct val="100000"/>
               </a:lnSpc>
@@ -14708,7 +15535,7 @@
               </a:tabLst>
             </a:pPr>
             <a:r>
-              <a:rPr lang="en-US" sz="2000" b="1" u="none" strike="noStrike">
+              <a:rPr lang="en-US" sz="1400" b="1" u="none" strike="noStrike">
                 <a:solidFill>
                   <a:srgbClr val="0F172A"/>
                 </a:solidFill>
@@ -14716,9 +15543,9 @@
                 <a:uFillTx/>
                 <a:latin typeface="Aptos"/>
               </a:rPr>
-              <a:t>Feeding API</a:t>
-            </a:r>
-            <a:endParaRPr lang="en-US" sz="2000" b="0" u="none" strike="noStrike">
+              <a:t>targetGrams &gt; 0</a:t>
+            </a:r>
+            <a:endParaRPr lang="en-US" sz="1400" b="0" u="none" strike="noStrike">
               <a:solidFill>
                 <a:srgbClr val="000000"/>
               </a:solidFill>
@@ -14731,10 +15558,10 @@
       </p:sp>
       <p:sp>
         <p:nvSpPr>
-          <p:cNvPr id="34" name="Text 8">
+          <p:cNvPr id="14" name="Text 8">
             <a:extLst>
               <a:ext uri="{FF2B5EF4-FFF2-40B4-BE49-F238E27FC236}">
-                <a16:creationId xmlns:a16="http://schemas.microsoft.com/office/drawing/2014/main" id="{E751C2CF-B536-4C8C-9D86-C040B781B80D}"/>
+                <a16:creationId xmlns:a16="http://schemas.microsoft.com/office/drawing/2014/main" id="{25CC846B-8BCF-4871-9757-6A624FDA615C}"/>
               </a:ext>
             </a:extLst>
           </p:cNvPr>
@@ -14743,8 +15570,8 @@
         </p:nvSpPr>
         <p:spPr>
           <a:xfrm>
-            <a:off x="4785720" y="3075988"/>
-            <a:ext cx="2285640" cy="594000"/>
+            <a:off x="6830640" y="3561222"/>
+            <a:ext cx="3931560" cy="301320"/>
           </a:xfrm>
           <a:prstGeom prst="rect">
             <a:avLst/>
@@ -14767,12 +15594,12 @@
           <a:fontRef idx="minor"/>
         </p:style>
         <p:txBody>
-          <a:bodyPr lIns="0" tIns="0" rIns="0" bIns="0" anchor="ctr">
-            <a:noAutofit/>
+          <a:bodyPr lIns="360" tIns="360" rIns="360" bIns="360" anchor="t">
+            <a:normAutofit/>
           </a:bodyPr>
           <a:lstStyle/>
           <a:p>
-            <a:pPr algn="ctr" defTabSz="914400">
+            <a:pPr defTabSz="914400">
               <a:lnSpc>
                 <a:spcPct val="100000"/>
               </a:lnSpc>
@@ -14781,18 +15608,17 @@
               </a:tabLst>
             </a:pPr>
             <a:r>
-              <a:rPr lang="en-US" sz="1250" b="0" u="none" strike="noStrike">
+              <a:rPr lang="en-US" sz="1120" b="0" u="none" strike="noStrike">
                 <a:solidFill>
-                  <a:srgbClr val="1E40AF"/>
+                  <a:srgbClr val="334155"/>
                 </a:solidFill>
                 <a:effectLst/>
                 <a:uFillTx/>
-                <a:latin typeface="Courier New"/>
-                <a:ea typeface="Courier New"/>
+                <a:latin typeface="Aptos"/>
               </a:rPr>
-              <a:t>feedSpecies(speciesId, 0,</a:t>
-            </a:r>
-            <a:endParaRPr lang="en-US" sz="1250" b="0" u="none" strike="noStrike">
+              <a:t>Dùng trực tiếp giá trị trong command.</a:t>
+            </a:r>
+            <a:endParaRPr lang="en-US" sz="1120" b="0" u="none" strike="noStrike">
               <a:solidFill>
                 <a:srgbClr val="000000"/>
               </a:solidFill>
@@ -14801,44 +15627,14 @@
               <a:latin typeface="Arial"/>
             </a:endParaRPr>
           </a:p>
-          <a:p>
-            <a:pPr algn="ctr" defTabSz="914400">
-              <a:lnSpc>
-                <a:spcPct val="100000"/>
-              </a:lnSpc>
-              <a:tabLst>
-                <a:tab pos="0" algn="l"/>
-              </a:tabLst>
-            </a:pPr>
-            <a:r>
-              <a:rPr lang="en-US" sz="1250" b="0" u="none" strike="noStrike">
-                <a:solidFill>
-                  <a:srgbClr val="1E40AF"/>
-                </a:solidFill>
-                <a:effectLst/>
-                <a:uFillTx/>
-                <a:latin typeface="Courier New"/>
-                <a:ea typeface="Courier New"/>
-              </a:rPr>
-              <a:t>requestId, "automatic")</a:t>
-            </a:r>
-            <a:endParaRPr lang="en-US" sz="1250" b="0" u="none" strike="noStrike">
-              <a:solidFill>
-                <a:srgbClr val="000000"/>
-              </a:solidFill>
-              <a:effectLst/>
-              <a:uFillTx/>
-              <a:latin typeface="Arial"/>
-            </a:endParaRPr>
-          </a:p>
         </p:txBody>
       </p:sp>
       <p:sp>
         <p:nvSpPr>
-          <p:cNvPr id="35" name="Shape 9">
+          <p:cNvPr id="15" name="Shape 9">
             <a:extLst>
               <a:ext uri="{FF2B5EF4-FFF2-40B4-BE49-F238E27FC236}">
-                <a16:creationId xmlns:a16="http://schemas.microsoft.com/office/drawing/2014/main" id="{C95F1AAF-36F3-46C2-9B63-A39C4445E989}"/>
+                <a16:creationId xmlns:a16="http://schemas.microsoft.com/office/drawing/2014/main" id="{D277F1E1-B780-410D-81F9-25063DF709F1}"/>
               </a:ext>
             </a:extLst>
           </p:cNvPr>
@@ -14847,309 +15643,16 @@
         </p:nvSpPr>
         <p:spPr>
           <a:xfrm>
-            <a:off x="7437480" y="3194788"/>
-            <a:ext cx="914400" cy="360"/>
-          </a:xfrm>
-          <a:prstGeom prst="line">
-            <a:avLst/>
-          </a:prstGeom>
-          <a:ln w="25400">
-            <a:solidFill>
-              <a:srgbClr val="2563EB"/>
-            </a:solidFill>
-            <a:round/>
-            <a:tailEnd type="triangle" w="med" len="med"/>
-          </a:ln>
-        </p:spPr>
-        <p:style>
-          <a:lnRef idx="0">
-            <a:scrgbClr r="0" g="0" b="0"/>
-          </a:lnRef>
-          <a:fillRef idx="0">
-            <a:scrgbClr r="0" g="0" b="0"/>
-          </a:fillRef>
-          <a:effectRef idx="0">
-            <a:scrgbClr r="0" g="0" b="0"/>
-          </a:effectRef>
-          <a:fontRef idx="minor"/>
-        </p:style>
-        <p:txBody>
-          <a:bodyPr lIns="90000" tIns="-44640" rIns="90000" bIns="-44640" anchor="t" anchorCtr="1">
-            <a:noAutofit/>
-          </a:bodyPr>
-          <a:lstStyle/>
-          <a:p>
-            <a:endParaRPr lang="en-US" sz="1800" b="0" u="none" strike="noStrike">
-              <a:solidFill>
-                <a:srgbClr val="000000"/>
-              </a:solidFill>
-              <a:effectLst/>
-              <a:uFillTx/>
-              <a:latin typeface="Arial"/>
-            </a:endParaRPr>
-          </a:p>
-        </p:txBody>
-      </p:sp>
-      <p:sp>
-        <p:nvSpPr>
-          <p:cNvPr id="36" name="Shape 10">
-            <a:extLst>
-              <a:ext uri="{FF2B5EF4-FFF2-40B4-BE49-F238E27FC236}">
-                <a16:creationId xmlns:a16="http://schemas.microsoft.com/office/drawing/2014/main" id="{7220B72E-DC78-4053-A853-EDBEB0FEE7DD}"/>
-              </a:ext>
-            </a:extLst>
-          </p:cNvPr>
-          <p:cNvSpPr/>
-          <p:nvPr/>
-        </p:nvSpPr>
-        <p:spPr>
-          <a:xfrm>
-            <a:off x="8397600" y="2188948"/>
-            <a:ext cx="2651400" cy="2011320"/>
+            <a:off x="6629400" y="4219662"/>
+            <a:ext cx="4297320" cy="959760"/>
           </a:xfrm>
           <a:prstGeom prst="roundRect">
             <a:avLst>
-              <a:gd name="adj" fmla="val 3636"/>
+              <a:gd name="adj" fmla="val 5714"/>
             </a:avLst>
           </a:prstGeom>
           <a:solidFill>
-            <a:srgbClr val="DCFCE7"/>
-          </a:solidFill>
-          <a:ln w="19050">
-            <a:solidFill>
-              <a:srgbClr val="16A34A"/>
-            </a:solidFill>
-            <a:round/>
-          </a:ln>
-        </p:spPr>
-        <p:style>
-          <a:lnRef idx="0">
-            <a:scrgbClr r="0" g="0" b="0"/>
-          </a:lnRef>
-          <a:fillRef idx="0">
-            <a:scrgbClr r="0" g="0" b="0"/>
-          </a:fillRef>
-          <a:effectRef idx="0">
-            <a:scrgbClr r="0" g="0" b="0"/>
-          </a:effectRef>
-          <a:fontRef idx="minor"/>
-        </p:style>
-        <p:txBody>
-          <a:bodyPr lIns="90000" tIns="45000" rIns="90000" bIns="45000" anchor="t">
-            <a:noAutofit/>
-          </a:bodyPr>
-          <a:lstStyle/>
-          <a:p>
-            <a:endParaRPr lang="en-US" sz="1800" b="0" u="none" strike="noStrike">
-              <a:solidFill>
-                <a:srgbClr val="000000"/>
-              </a:solidFill>
-              <a:effectLst/>
-              <a:uFillTx/>
-              <a:latin typeface="Arial"/>
-            </a:endParaRPr>
-          </a:p>
-        </p:txBody>
-      </p:sp>
-      <p:sp>
-        <p:nvSpPr>
-          <p:cNvPr id="37" name="Text 11">
-            <a:extLst>
-              <a:ext uri="{FF2B5EF4-FFF2-40B4-BE49-F238E27FC236}">
-                <a16:creationId xmlns:a16="http://schemas.microsoft.com/office/drawing/2014/main" id="{C8AC3F86-F653-49E9-8BF2-0BEDE9375EBB}"/>
-              </a:ext>
-            </a:extLst>
-          </p:cNvPr>
-          <p:cNvSpPr/>
-          <p:nvPr/>
-        </p:nvSpPr>
-        <p:spPr>
-          <a:xfrm>
-            <a:off x="8854800" y="2554708"/>
-            <a:ext cx="1737000" cy="347040"/>
-          </a:xfrm>
-          <a:prstGeom prst="rect">
-            <a:avLst/>
-          </a:prstGeom>
-          <a:noFill/>
-          <a:ln w="0">
-            <a:noFill/>
-          </a:ln>
-        </p:spPr>
-        <p:style>
-          <a:lnRef idx="0">
-            <a:scrgbClr r="0" g="0" b="0"/>
-          </a:lnRef>
-          <a:fillRef idx="0">
-            <a:scrgbClr r="0" g="0" b="0"/>
-          </a:fillRef>
-          <a:effectRef idx="0">
-            <a:scrgbClr r="0" g="0" b="0"/>
-          </a:effectRef>
-          <a:fontRef idx="minor"/>
-        </p:style>
-        <p:txBody>
-          <a:bodyPr lIns="0" tIns="0" rIns="0" bIns="0" anchor="ctr">
-            <a:noAutofit/>
-          </a:bodyPr>
-          <a:lstStyle/>
-          <a:p>
-            <a:pPr algn="ctr" defTabSz="914400">
-              <a:lnSpc>
-                <a:spcPct val="100000"/>
-              </a:lnSpc>
-              <a:tabLst>
-                <a:tab pos="0" algn="l"/>
-              </a:tabLst>
-            </a:pPr>
-            <a:r>
-              <a:rPr lang="en-US" sz="2000" b="1" u="none" strike="noStrike">
-                <a:solidFill>
-                  <a:srgbClr val="0F172A"/>
-                </a:solidFill>
-                <a:effectLst/>
-                <a:uFillTx/>
-                <a:latin typeface="Aptos"/>
-              </a:rPr>
-              <a:t>Controller V1</a:t>
-            </a:r>
-            <a:endParaRPr lang="en-US" sz="2000" b="0" u="none" strike="noStrike">
-              <a:solidFill>
-                <a:srgbClr val="000000"/>
-              </a:solidFill>
-              <a:effectLst/>
-              <a:uFillTx/>
-              <a:latin typeface="Arial"/>
-            </a:endParaRPr>
-          </a:p>
-        </p:txBody>
-      </p:sp>
-      <p:sp>
-        <p:nvSpPr>
-          <p:cNvPr id="38" name="Text 12">
-            <a:extLst>
-              <a:ext uri="{FF2B5EF4-FFF2-40B4-BE49-F238E27FC236}">
-                <a16:creationId xmlns:a16="http://schemas.microsoft.com/office/drawing/2014/main" id="{6FEF6F78-57A6-4ABF-BDCE-04302A46D075}"/>
-              </a:ext>
-            </a:extLst>
-          </p:cNvPr>
-          <p:cNvSpPr/>
-          <p:nvPr/>
-        </p:nvSpPr>
-        <p:spPr>
-          <a:xfrm>
-            <a:off x="8717640" y="3075988"/>
-            <a:ext cx="2011320" cy="594000"/>
-          </a:xfrm>
-          <a:prstGeom prst="rect">
-            <a:avLst/>
-          </a:prstGeom>
-          <a:noFill/>
-          <a:ln w="0">
-            <a:noFill/>
-          </a:ln>
-        </p:spPr>
-        <p:style>
-          <a:lnRef idx="0">
-            <a:scrgbClr r="0" g="0" b="0"/>
-          </a:lnRef>
-          <a:fillRef idx="0">
-            <a:scrgbClr r="0" g="0" b="0"/>
-          </a:fillRef>
-          <a:effectRef idx="0">
-            <a:scrgbClr r="0" g="0" b="0"/>
-          </a:effectRef>
-          <a:fontRef idx="minor"/>
-        </p:style>
-        <p:txBody>
-          <a:bodyPr lIns="0" tIns="0" rIns="0" bIns="0" anchor="ctr">
-            <a:noAutofit/>
-          </a:bodyPr>
-          <a:lstStyle/>
-          <a:p>
-            <a:pPr algn="ctr" defTabSz="914400">
-              <a:lnSpc>
-                <a:spcPct val="100000"/>
-              </a:lnSpc>
-              <a:tabLst>
-                <a:tab pos="0" algn="l"/>
-              </a:tabLst>
-            </a:pPr>
-            <a:r>
-              <a:rPr lang="en-US" sz="1300" b="0" u="none" strike="noStrike">
-                <a:solidFill>
-                  <a:srgbClr val="166534"/>
-                </a:solidFill>
-                <a:effectLst/>
-                <a:uFillTx/>
-                <a:latin typeface="Aptos"/>
-              </a:rPr>
-              <a:t>Portion → Servo → Weight</a:t>
-            </a:r>
-            <a:endParaRPr lang="en-US" sz="1300" b="0" u="none" strike="noStrike">
-              <a:solidFill>
-                <a:srgbClr val="000000"/>
-              </a:solidFill>
-              <a:effectLst/>
-              <a:uFillTx/>
-              <a:latin typeface="Arial"/>
-            </a:endParaRPr>
-          </a:p>
-          <a:p>
-            <a:pPr algn="ctr" defTabSz="914400">
-              <a:lnSpc>
-                <a:spcPct val="100000"/>
-              </a:lnSpc>
-              <a:tabLst>
-                <a:tab pos="0" algn="l"/>
-              </a:tabLst>
-            </a:pPr>
-            <a:r>
-              <a:rPr lang="en-US" sz="1300" b="0" u="none" strike="noStrike">
-                <a:solidFill>
-                  <a:srgbClr val="166534"/>
-                </a:solidFill>
-                <a:effectLst/>
-                <a:uFillTx/>
-                <a:latin typeface="Aptos"/>
-              </a:rPr>
-              <a:t>→ History → Cooldown</a:t>
-            </a:r>
-            <a:endParaRPr lang="en-US" sz="1300" b="0" u="none" strike="noStrike">
-              <a:solidFill>
-                <a:srgbClr val="000000"/>
-              </a:solidFill>
-              <a:effectLst/>
-              <a:uFillTx/>
-              <a:latin typeface="Arial"/>
-            </a:endParaRPr>
-          </a:p>
-        </p:txBody>
-      </p:sp>
-      <p:sp>
-        <p:nvSpPr>
-          <p:cNvPr id="39" name="Shape 13">
-            <a:extLst>
-              <a:ext uri="{FF2B5EF4-FFF2-40B4-BE49-F238E27FC236}">
-                <a16:creationId xmlns:a16="http://schemas.microsoft.com/office/drawing/2014/main" id="{C4D7E87C-F1D2-45C6-9411-EC34D70D9EA1}"/>
-              </a:ext>
-            </a:extLst>
-          </p:cNvPr>
-          <p:cNvSpPr/>
-          <p:nvPr/>
-        </p:nvSpPr>
-        <p:spPr>
-          <a:xfrm>
-            <a:off x="988783" y="4673732"/>
-            <a:ext cx="2971440" cy="1142640"/>
-          </a:xfrm>
-          <a:prstGeom prst="roundRect">
-            <a:avLst>
-              <a:gd name="adj" fmla="val 4800"/>
-            </a:avLst>
-          </a:prstGeom>
-          <a:solidFill>
-            <a:srgbClr val="FFFFFF"/>
+            <a:srgbClr val="DBEAFE"/>
           </a:solidFill>
           <a:ln w="12700">
             <a:solidFill>
@@ -15189,10 +15692,10 @@
       </p:sp>
       <p:sp>
         <p:nvSpPr>
-          <p:cNvPr id="40" name="Shape 14">
+          <p:cNvPr id="16" name="Shape 10">
             <a:extLst>
               <a:ext uri="{FF2B5EF4-FFF2-40B4-BE49-F238E27FC236}">
-                <a16:creationId xmlns:a16="http://schemas.microsoft.com/office/drawing/2014/main" id="{28ECD5B2-D546-4C9A-B58B-E6674B70D196}"/>
+                <a16:creationId xmlns:a16="http://schemas.microsoft.com/office/drawing/2014/main" id="{7B152308-CFDC-4A2C-8CDA-7AAFA345C79C}"/>
               </a:ext>
             </a:extLst>
           </p:cNvPr>
@@ -15201,8 +15704,8 @@
         </p:nvSpPr>
         <p:spPr>
           <a:xfrm>
-            <a:off x="988783" y="4673732"/>
-            <a:ext cx="54360" cy="1142640"/>
+            <a:off x="6629400" y="4219662"/>
+            <a:ext cx="54360" cy="959760"/>
           </a:xfrm>
           <a:prstGeom prst="rect">
             <a:avLst/>
@@ -15248,10 +15751,10 @@
       </p:sp>
       <p:sp>
         <p:nvSpPr>
-          <p:cNvPr id="41" name="Text 15">
+          <p:cNvPr id="20" name="Text 11">
             <a:extLst>
               <a:ext uri="{FF2B5EF4-FFF2-40B4-BE49-F238E27FC236}">
-                <a16:creationId xmlns:a16="http://schemas.microsoft.com/office/drawing/2014/main" id="{43CEFBAC-46A3-4887-9CEC-55891958CFF4}"/>
+                <a16:creationId xmlns:a16="http://schemas.microsoft.com/office/drawing/2014/main" id="{DA21903E-5E17-4BF4-81FE-671B6ABB94FD}"/>
               </a:ext>
             </a:extLst>
           </p:cNvPr>
@@ -15260,8 +15763,8 @@
         </p:nvSpPr>
         <p:spPr>
           <a:xfrm>
-            <a:off x="1190023" y="4819892"/>
-            <a:ext cx="2605680" cy="273960"/>
+            <a:off x="6830640" y="4365822"/>
+            <a:ext cx="3931560" cy="273960"/>
           </a:xfrm>
           <a:prstGeom prst="rect">
             <a:avLst/>
@@ -15306,7 +15809,7 @@
                 <a:uFillTx/>
                 <a:latin typeface="Aptos"/>
               </a:rPr>
-              <a:t>Ý nghĩa target = 0</a:t>
+              <a:t>targetGrams ≤ 0</a:t>
             </a:r>
             <a:endParaRPr lang="en-US" sz="1400" b="0" u="none" strike="noStrike">
               <a:solidFill>
@@ -15321,10 +15824,10 @@
       </p:sp>
       <p:sp>
         <p:nvSpPr>
-          <p:cNvPr id="42" name="Text 16">
+          <p:cNvPr id="21" name="Text 12">
             <a:extLst>
               <a:ext uri="{FF2B5EF4-FFF2-40B4-BE49-F238E27FC236}">
-                <a16:creationId xmlns:a16="http://schemas.microsoft.com/office/drawing/2014/main" id="{0108075E-4C1F-4A42-AA25-3377C821D64E}"/>
+                <a16:creationId xmlns:a16="http://schemas.microsoft.com/office/drawing/2014/main" id="{1D6BCD9A-52B3-45B8-9C66-68C53D0D3AF2}"/>
               </a:ext>
             </a:extLst>
           </p:cNvPr>
@@ -15333,8 +15836,8 @@
         </p:nvSpPr>
         <p:spPr>
           <a:xfrm>
-            <a:off x="1190023" y="5204012"/>
-            <a:ext cx="2605680" cy="484200"/>
+            <a:off x="6830640" y="4749942"/>
+            <a:ext cx="3931560" cy="301320"/>
           </a:xfrm>
           <a:prstGeom prst="rect">
             <a:avLst/>
@@ -15379,7 +15882,7 @@
                 <a:uFillTx/>
                 <a:latin typeface="Aptos"/>
               </a:rPr>
-              <a:t>Controller tự lấy portion từ Firebase hoặc default.</a:t>
+              <a:t>Đọc portionGrams từ Firebase.</a:t>
             </a:r>
             <a:endParaRPr lang="en-US" sz="1120" b="0" u="none" strike="noStrike">
               <a:solidFill>
@@ -15394,10 +15897,10 @@
       </p:sp>
       <p:sp>
         <p:nvSpPr>
-          <p:cNvPr id="43" name="Shape 17">
+          <p:cNvPr id="22" name="Shape 13">
             <a:extLst>
               <a:ext uri="{FF2B5EF4-FFF2-40B4-BE49-F238E27FC236}">
-                <a16:creationId xmlns:a16="http://schemas.microsoft.com/office/drawing/2014/main" id="{BF8EC3E9-FE56-4DFD-9534-C81F74F047F4}"/>
+                <a16:creationId xmlns:a16="http://schemas.microsoft.com/office/drawing/2014/main" id="{6CA31563-F685-4DEF-BD9B-F2B23D404D5A}"/>
               </a:ext>
             </a:extLst>
           </p:cNvPr>
@@ -15406,16 +15909,16 @@
         </p:nvSpPr>
         <p:spPr>
           <a:xfrm>
-            <a:off x="4463503" y="4673732"/>
-            <a:ext cx="2971440" cy="1142640"/>
+            <a:off x="6629400" y="5408382"/>
+            <a:ext cx="4297320" cy="959760"/>
           </a:xfrm>
           <a:prstGeom prst="roundRect">
             <a:avLst>
-              <a:gd name="adj" fmla="val 4800"/>
+              <a:gd name="adj" fmla="val 5714"/>
             </a:avLst>
           </a:prstGeom>
           <a:solidFill>
-            <a:srgbClr val="FFFFFF"/>
+            <a:srgbClr val="FFEDD5"/>
           </a:solidFill>
           <a:ln w="12700">
             <a:solidFill>
@@ -15455,10 +15958,10 @@
       </p:sp>
       <p:sp>
         <p:nvSpPr>
-          <p:cNvPr id="44" name="Shape 18">
+          <p:cNvPr id="23" name="Shape 14">
             <a:extLst>
               <a:ext uri="{FF2B5EF4-FFF2-40B4-BE49-F238E27FC236}">
-                <a16:creationId xmlns:a16="http://schemas.microsoft.com/office/drawing/2014/main" id="{A2BD4C46-FDA0-4255-BF80-5C27F28E7E6B}"/>
+                <a16:creationId xmlns:a16="http://schemas.microsoft.com/office/drawing/2014/main" id="{167A5AC2-EAFD-442B-89B7-EFBEE2159462}"/>
               </a:ext>
             </a:extLst>
           </p:cNvPr>
@@ -15467,274 +15970,8 @@
         </p:nvSpPr>
         <p:spPr>
           <a:xfrm>
-            <a:off x="4463503" y="4673732"/>
-            <a:ext cx="54360" cy="1142640"/>
-          </a:xfrm>
-          <a:prstGeom prst="rect">
-            <a:avLst/>
-          </a:prstGeom>
-          <a:solidFill>
-            <a:srgbClr val="16A34A"/>
-          </a:solidFill>
-          <a:ln w="12700">
-            <a:solidFill>
-              <a:srgbClr val="16A34A"/>
-            </a:solidFill>
-            <a:round/>
-          </a:ln>
-        </p:spPr>
-        <p:style>
-          <a:lnRef idx="0">
-            <a:scrgbClr r="0" g="0" b="0"/>
-          </a:lnRef>
-          <a:fillRef idx="0">
-            <a:scrgbClr r="0" g="0" b="0"/>
-          </a:fillRef>
-          <a:effectRef idx="0">
-            <a:scrgbClr r="0" g="0" b="0"/>
-          </a:effectRef>
-          <a:fontRef idx="minor"/>
-        </p:style>
-        <p:txBody>
-          <a:bodyPr lIns="90000" tIns="45000" rIns="90000" bIns="45000" anchor="t">
-            <a:noAutofit/>
-          </a:bodyPr>
-          <a:lstStyle/>
-          <a:p>
-            <a:endParaRPr lang="en-US" sz="1800" b="0" u="none" strike="noStrike">
-              <a:solidFill>
-                <a:srgbClr val="FFFFFF"/>
-              </a:solidFill>
-              <a:effectLst/>
-              <a:uFillTx/>
-              <a:latin typeface="Arial"/>
-            </a:endParaRPr>
-          </a:p>
-        </p:txBody>
-      </p:sp>
-      <p:sp>
-        <p:nvSpPr>
-          <p:cNvPr id="45" name="Text 19">
-            <a:extLst>
-              <a:ext uri="{FF2B5EF4-FFF2-40B4-BE49-F238E27FC236}">
-                <a16:creationId xmlns:a16="http://schemas.microsoft.com/office/drawing/2014/main" id="{04053F69-0C8A-45E9-963E-7FC419F8F8FD}"/>
-              </a:ext>
-            </a:extLst>
-          </p:cNvPr>
-          <p:cNvSpPr/>
-          <p:nvPr/>
-        </p:nvSpPr>
-        <p:spPr>
-          <a:xfrm>
-            <a:off x="4664743" y="4819892"/>
-            <a:ext cx="2605680" cy="273960"/>
-          </a:xfrm>
-          <a:prstGeom prst="rect">
-            <a:avLst/>
-          </a:prstGeom>
-          <a:noFill/>
-          <a:ln w="0">
-            <a:noFill/>
-          </a:ln>
-        </p:spPr>
-        <p:style>
-          <a:lnRef idx="0">
-            <a:scrgbClr r="0" g="0" b="0"/>
-          </a:lnRef>
-          <a:fillRef idx="0">
-            <a:scrgbClr r="0" g="0" b="0"/>
-          </a:fillRef>
-          <a:effectRef idx="0">
-            <a:scrgbClr r="0" g="0" b="0"/>
-          </a:effectRef>
-          <a:fontRef idx="minor"/>
-        </p:style>
-        <p:txBody>
-          <a:bodyPr lIns="0" tIns="0" rIns="0" bIns="0" anchor="ctr">
-            <a:noAutofit/>
-          </a:bodyPr>
-          <a:lstStyle/>
-          <a:p>
-            <a:pPr defTabSz="914400">
-              <a:lnSpc>
-                <a:spcPct val="100000"/>
-              </a:lnSpc>
-              <a:tabLst>
-                <a:tab pos="0" algn="l"/>
-              </a:tabLst>
-            </a:pPr>
-            <a:r>
-              <a:rPr lang="en-US" sz="1400" b="1" u="none" strike="noStrike">
-                <a:solidFill>
-                  <a:srgbClr val="0F172A"/>
-                </a:solidFill>
-                <a:effectLst/>
-                <a:uFillTx/>
-                <a:latin typeface="Aptos"/>
-              </a:rPr>
-              <a:t>Lợi ích</a:t>
-            </a:r>
-            <a:endParaRPr lang="en-US" sz="1400" b="0" u="none" strike="noStrike">
-              <a:solidFill>
-                <a:srgbClr val="000000"/>
-              </a:solidFill>
-              <a:effectLst/>
-              <a:uFillTx/>
-              <a:latin typeface="Arial"/>
-            </a:endParaRPr>
-          </a:p>
-        </p:txBody>
-      </p:sp>
-      <p:sp>
-        <p:nvSpPr>
-          <p:cNvPr id="46" name="Text 20">
-            <a:extLst>
-              <a:ext uri="{FF2B5EF4-FFF2-40B4-BE49-F238E27FC236}">
-                <a16:creationId xmlns:a16="http://schemas.microsoft.com/office/drawing/2014/main" id="{1759D5BF-A645-4071-8A93-CD13FE5DF499}"/>
-              </a:ext>
-            </a:extLst>
-          </p:cNvPr>
-          <p:cNvSpPr/>
-          <p:nvPr/>
-        </p:nvSpPr>
-        <p:spPr>
-          <a:xfrm>
-            <a:off x="4664743" y="5204012"/>
-            <a:ext cx="2605680" cy="484200"/>
-          </a:xfrm>
-          <a:prstGeom prst="rect">
-            <a:avLst/>
-          </a:prstGeom>
-          <a:noFill/>
-          <a:ln w="0">
-            <a:noFill/>
-          </a:ln>
-        </p:spPr>
-        <p:style>
-          <a:lnRef idx="0">
-            <a:scrgbClr r="0" g="0" b="0"/>
-          </a:lnRef>
-          <a:fillRef idx="0">
-            <a:scrgbClr r="0" g="0" b="0"/>
-          </a:fillRef>
-          <a:effectRef idx="0">
-            <a:scrgbClr r="0" g="0" b="0"/>
-          </a:effectRef>
-          <a:fontRef idx="minor"/>
-        </p:style>
-        <p:txBody>
-          <a:bodyPr lIns="360" tIns="360" rIns="360" bIns="360" anchor="t">
-            <a:normAutofit/>
-          </a:bodyPr>
-          <a:lstStyle/>
-          <a:p>
-            <a:pPr defTabSz="914400">
-              <a:lnSpc>
-                <a:spcPct val="100000"/>
-              </a:lnSpc>
-              <a:tabLst>
-                <a:tab pos="0" algn="l"/>
-              </a:tabLst>
-            </a:pPr>
-            <a:r>
-              <a:rPr lang="en-US" sz="1120" b="0" u="none" strike="noStrike">
-                <a:solidFill>
-                  <a:srgbClr val="334155"/>
-                </a:solidFill>
-                <a:effectLst/>
-                <a:uFillTx/>
-                <a:latin typeface="Aptos"/>
-              </a:rPr>
-              <a:t>AI và cơ cấu cấp thức ăn được tách rời, dễ debug.</a:t>
-            </a:r>
-            <a:endParaRPr lang="en-US" sz="1120" b="0" u="none" strike="noStrike">
-              <a:solidFill>
-                <a:srgbClr val="000000"/>
-              </a:solidFill>
-              <a:effectLst/>
-              <a:uFillTx/>
-              <a:latin typeface="Arial"/>
-            </a:endParaRPr>
-          </a:p>
-        </p:txBody>
-      </p:sp>
-      <p:sp>
-        <p:nvSpPr>
-          <p:cNvPr id="47" name="Shape 21">
-            <a:extLst>
-              <a:ext uri="{FF2B5EF4-FFF2-40B4-BE49-F238E27FC236}">
-                <a16:creationId xmlns:a16="http://schemas.microsoft.com/office/drawing/2014/main" id="{DFED10BC-7795-44E3-87ED-E708CE254D88}"/>
-              </a:ext>
-            </a:extLst>
-          </p:cNvPr>
-          <p:cNvSpPr/>
-          <p:nvPr/>
-        </p:nvSpPr>
-        <p:spPr>
-          <a:xfrm>
-            <a:off x="7938223" y="4673732"/>
-            <a:ext cx="2971440" cy="1142640"/>
-          </a:xfrm>
-          <a:prstGeom prst="roundRect">
-            <a:avLst>
-              <a:gd name="adj" fmla="val 4800"/>
-            </a:avLst>
-          </a:prstGeom>
-          <a:solidFill>
-            <a:srgbClr val="FFFFFF"/>
-          </a:solidFill>
-          <a:ln w="12700">
-            <a:solidFill>
-              <a:srgbClr val="E2E8F0"/>
-            </a:solidFill>
-            <a:round/>
-          </a:ln>
-        </p:spPr>
-        <p:style>
-          <a:lnRef idx="0">
-            <a:scrgbClr r="0" g="0" b="0"/>
-          </a:lnRef>
-          <a:fillRef idx="0">
-            <a:scrgbClr r="0" g="0" b="0"/>
-          </a:fillRef>
-          <a:effectRef idx="0">
-            <a:scrgbClr r="0" g="0" b="0"/>
-          </a:effectRef>
-          <a:fontRef idx="minor"/>
-        </p:style>
-        <p:txBody>
-          <a:bodyPr lIns="90000" tIns="45000" rIns="90000" bIns="45000" anchor="t">
-            <a:noAutofit/>
-          </a:bodyPr>
-          <a:lstStyle/>
-          <a:p>
-            <a:endParaRPr lang="en-US" sz="1800" b="0" u="none" strike="noStrike">
-              <a:solidFill>
-                <a:srgbClr val="000000"/>
-              </a:solidFill>
-              <a:effectLst/>
-              <a:uFillTx/>
-              <a:latin typeface="Arial"/>
-            </a:endParaRPr>
-          </a:p>
-        </p:txBody>
-      </p:sp>
-      <p:sp>
-        <p:nvSpPr>
-          <p:cNvPr id="48" name="Shape 22">
-            <a:extLst>
-              <a:ext uri="{FF2B5EF4-FFF2-40B4-BE49-F238E27FC236}">
-                <a16:creationId xmlns:a16="http://schemas.microsoft.com/office/drawing/2014/main" id="{7AF2E9F3-7218-4BB0-91A2-5A88D5618696}"/>
-              </a:ext>
-            </a:extLst>
-          </p:cNvPr>
-          <p:cNvSpPr/>
-          <p:nvPr/>
-        </p:nvSpPr>
-        <p:spPr>
-          <a:xfrm>
-            <a:off x="7938223" y="4673732"/>
-            <a:ext cx="54360" cy="1142640"/>
+            <a:off x="6629400" y="5408382"/>
+            <a:ext cx="54360" cy="959760"/>
           </a:xfrm>
           <a:prstGeom prst="rect">
             <a:avLst/>
@@ -15780,10 +16017,10 @@
       </p:sp>
       <p:sp>
         <p:nvSpPr>
-          <p:cNvPr id="49" name="Text 23">
+          <p:cNvPr id="24" name="Text 15">
             <a:extLst>
               <a:ext uri="{FF2B5EF4-FFF2-40B4-BE49-F238E27FC236}">
-                <a16:creationId xmlns:a16="http://schemas.microsoft.com/office/drawing/2014/main" id="{082361F4-698C-4345-9421-9ADB8D9A9DA3}"/>
+                <a16:creationId xmlns:a16="http://schemas.microsoft.com/office/drawing/2014/main" id="{5FEEE4A2-E894-4C08-8956-5C372ABB4C49}"/>
               </a:ext>
             </a:extLst>
           </p:cNvPr>
@@ -15792,8 +16029,8 @@
         </p:nvSpPr>
         <p:spPr>
           <a:xfrm>
-            <a:off x="8139463" y="4819892"/>
-            <a:ext cx="2605680" cy="273960"/>
+            <a:off x="6830640" y="5554542"/>
+            <a:ext cx="3931560" cy="273960"/>
           </a:xfrm>
           <a:prstGeom prst="rect">
             <a:avLst/>
@@ -15838,7 +16075,7 @@
                 <a:uFillTx/>
                 <a:latin typeface="Aptos"/>
               </a:rPr>
-              <a:t>Bước tiếp theo</a:t>
+              <a:t>Không có portion hợp lệ</a:t>
             </a:r>
             <a:endParaRPr lang="en-US" sz="1400" b="0" u="none" strike="noStrike">
               <a:solidFill>
@@ -15853,10 +16090,10 @@
       </p:sp>
       <p:sp>
         <p:nvSpPr>
-          <p:cNvPr id="50" name="Text 24">
+          <p:cNvPr id="25" name="Text 16">
             <a:extLst>
               <a:ext uri="{FF2B5EF4-FFF2-40B4-BE49-F238E27FC236}">
-                <a16:creationId xmlns:a16="http://schemas.microsoft.com/office/drawing/2014/main" id="{8AE0EE01-7587-4E65-930C-399A3CE067FE}"/>
+                <a16:creationId xmlns:a16="http://schemas.microsoft.com/office/drawing/2014/main" id="{8BC06F97-57A8-4A38-99D6-DC6D15729C1B}"/>
               </a:ext>
             </a:extLst>
           </p:cNvPr>
@@ -15865,8 +16102,8 @@
         </p:nvSpPr>
         <p:spPr>
           <a:xfrm>
-            <a:off x="8139463" y="5204012"/>
-            <a:ext cx="2605680" cy="484200"/>
+            <a:off x="6830640" y="5938662"/>
+            <a:ext cx="3931560" cy="301320"/>
           </a:xfrm>
           <a:prstGeom prst="rect">
             <a:avLst/>
@@ -15911,7 +16148,7 @@
                 <a:uFillTx/>
                 <a:latin typeface="Aptos"/>
               </a:rPr>
-              <a:t>Deploy classifier INT8 trên ESP32-S3 và tuning confidence threshold.</a:t>
+              <a:t>Fallback mặc định: DOG 80 g • CAT 45 g</a:t>
             </a:r>
             <a:endParaRPr lang="en-US" sz="1120" b="0" u="none" strike="noStrike">
               <a:solidFill>
@@ -15927,7 +16164,7 @@
     </p:spTree>
     <p:extLst>
       <p:ext uri="{BB962C8B-B14F-4D97-AF65-F5344CB8AC3E}">
-        <p14:creationId xmlns:p14="http://schemas.microsoft.com/office/powerpoint/2010/main" val="2068220818"/>
+        <p14:creationId xmlns:p14="http://schemas.microsoft.com/office/powerpoint/2010/main" val="4035799632"/>
       </p:ext>
     </p:extLst>
   </p:cSld>

--- a/report/15.3. Di động - Tuan3.pptx
+++ b/report/15.3. Di động - Tuan3.pptx
@@ -5,10 +5,10 @@
     <p:sldMasterId id="2147483648" r:id="rId1"/>
   </p:sldMasterIdLst>
   <p:notesMasterIdLst>
-    <p:notesMasterId r:id="rId17"/>
+    <p:notesMasterId r:id="rId18"/>
   </p:notesMasterIdLst>
   <p:handoutMasterIdLst>
-    <p:handoutMasterId r:id="rId18"/>
+    <p:handoutMasterId r:id="rId19"/>
   </p:handoutMasterIdLst>
   <p:sldIdLst>
     <p:sldId id="276" r:id="rId2"/>
@@ -22,10 +22,11 @@
     <p:sldId id="309" r:id="rId10"/>
     <p:sldId id="310" r:id="rId11"/>
     <p:sldId id="311" r:id="rId12"/>
-    <p:sldId id="313" r:id="rId13"/>
-    <p:sldId id="312" r:id="rId14"/>
-    <p:sldId id="304" r:id="rId15"/>
-    <p:sldId id="275" r:id="rId16"/>
+    <p:sldId id="315" r:id="rId13"/>
+    <p:sldId id="313" r:id="rId14"/>
+    <p:sldId id="312" r:id="rId15"/>
+    <p:sldId id="304" r:id="rId16"/>
+    <p:sldId id="275" r:id="rId17"/>
   </p:sldIdLst>
   <p:sldSz cx="12192000" cy="6858000"/>
   <p:notesSz cx="6858000" cy="9144000"/>
@@ -4862,13 +4863,970 @@
           </a:p>
           <a:p>
             <a:r>
-              <a:rPr lang="vi-VN" sz="1800"/>
-              <a:t>Bộ dữ liệu Cat and Dog Classification là một bộ dữ liệu tiêu chuẩn trong lĩnh vực thị giác máy tính (Computer Vision), được sử dụng cho bài toán phân loại hình ảnh, trong đó mô hình cần xác định một hình ảnh chứa chó (Dog) hay mèo (Cat). Bộ dữ liệu này là một tập con được trích xuất từ một bộ dữ liệu lớn hơn gồm khoảng 25.000 hình ảnh.Bộ dữ liệu bao gồm 24.998 hình ảnh, được chia thành:12.499 hình ảnh mèo (Cat)12.499 hình ảnh chó (Dog)Các hình ảnh trong tập huấn luyện (training set) được phân chia đồng đều giữa hai lớp chó và mèo, trong khi các hình ảnh thuộc tập kiểm thử (test set) không được gán nhãn. Cách tổ chức này cho phép người dùng đánh giá khả năng tổng quát hóa của mô hình trên dữ liệu chưa từng xuất hiện trong quá trình huấn luyện.</a:t>
+              <a:rPr kumimoji="0" lang="en-US" altLang="en-US" sz="1600" b="0" i="0" u="none" strike="noStrike" cap="none" normalizeH="0" baseline="0">
+                <a:ln>
+                  <a:noFill/>
+                </a:ln>
+                <a:solidFill>
+                  <a:schemeClr val="tx1"/>
+                </a:solidFill>
+                <a:effectLst/>
+                <a:latin typeface="Arial" panose="020B0604020202020204" pitchFamily="34" charset="0"/>
+                <a:ea typeface="Times New Roman" panose="02020603050405020304" pitchFamily="18" charset="0"/>
+                <a:cs typeface="Times New Roman" panose="02020603050405020304" pitchFamily="18" charset="0"/>
+              </a:rPr>
+              <a:t>Bộ dữ liệu hiện tại gồm 24.998 ảnh có nhãn, cân bằng hoàn toàn giữa hai lớp. Việc chia tập được thực hiện stratified theo lớp với seed = 42. Test được khóa trong giai đoạn chọn kiến trúc và hyperparameter; chỉ được mở một lần sau khi toàn bộ quyết định mô hình đã cố định.</a:t>
             </a:r>
-            <a:endParaRPr lang="en-US" sz="1800"/>
+            <a:endParaRPr kumimoji="0" lang="en-US" altLang="en-US" sz="1600" b="0" i="0" u="none" strike="noStrike" cap="none" normalizeH="0" baseline="0">
+              <a:ln>
+                <a:noFill/>
+              </a:ln>
+              <a:solidFill>
+                <a:schemeClr val="tx1"/>
+              </a:solidFill>
+              <a:effectLst/>
+              <a:latin typeface="Arial" panose="020B0604020202020204" pitchFamily="34" charset="0"/>
+            </a:endParaRPr>
+          </a:p>
+          <a:p>
+            <a:pPr marL="0" marR="0" lvl="0" indent="288925" algn="l" defTabSz="914400" rtl="0" eaLnBrk="0" fontAlgn="base" latinLnBrk="0" hangingPunct="0">
+              <a:lnSpc>
+                <a:spcPct val="100000"/>
+              </a:lnSpc>
+              <a:spcBef>
+                <a:spcPct val="0"/>
+              </a:spcBef>
+              <a:spcAft>
+                <a:spcPct val="0"/>
+              </a:spcAft>
+              <a:buClrTx/>
+              <a:buSzTx/>
+              <a:buFontTx/>
+              <a:buNone/>
+              <a:tabLst/>
+            </a:pPr>
+            <a:endParaRPr kumimoji="0" lang="en-US" altLang="en-US" sz="4000" b="0" i="0" u="none" strike="noStrike" cap="none" normalizeH="0" baseline="0">
+              <a:ln>
+                <a:noFill/>
+              </a:ln>
+              <a:solidFill>
+                <a:schemeClr val="tx1"/>
+              </a:solidFill>
+              <a:effectLst/>
+              <a:latin typeface="Arial" panose="020B0604020202020204" pitchFamily="34" charset="0"/>
+            </a:endParaRPr>
+          </a:p>
+          <a:p>
+            <a:endParaRPr lang="en-US"/>
           </a:p>
         </p:txBody>
       </p:sp>
+      <p:graphicFrame>
+        <p:nvGraphicFramePr>
+          <p:cNvPr id="5" name="Table 4">
+            <a:extLst>
+              <a:ext uri="{FF2B5EF4-FFF2-40B4-BE49-F238E27FC236}">
+                <a16:creationId xmlns:a16="http://schemas.microsoft.com/office/drawing/2014/main" id="{64FF63F1-CB56-4A16-B4D2-5AE945411FE2}"/>
+              </a:ext>
+            </a:extLst>
+          </p:cNvPr>
+          <p:cNvGraphicFramePr>
+            <a:graphicFrameLocks noGrp="1"/>
+          </p:cNvGraphicFramePr>
+          <p:nvPr>
+            <p:extLst>
+              <p:ext uri="{D42A27DB-BD31-4B8C-83A1-F6EECF244321}">
+                <p14:modId xmlns:p14="http://schemas.microsoft.com/office/powerpoint/2010/main" val="1377821126"/>
+              </p:ext>
+            </p:extLst>
+          </p:nvPr>
+        </p:nvGraphicFramePr>
+        <p:xfrm>
+          <a:off x="4724400" y="3914829"/>
+          <a:ext cx="6083935" cy="2306447"/>
+        </p:xfrm>
+        <a:graphic>
+          <a:graphicData uri="http://schemas.openxmlformats.org/drawingml/2006/table">
+            <a:tbl>
+              <a:tblPr firstRow="1" firstCol="1" bandRow="1">
+                <a:tableStyleId>{5C22544A-7EE6-4342-B048-85BDC9FD1C3A}</a:tableStyleId>
+              </a:tblPr>
+              <a:tblGrid>
+                <a:gridCol w="1080135">
+                  <a:extLst>
+                    <a:ext uri="{9D8B030D-6E8A-4147-A177-3AD203B41FA5}">
+                      <a16:colId xmlns:a16="http://schemas.microsoft.com/office/drawing/2014/main" val="1859991774"/>
+                    </a:ext>
+                  </a:extLst>
+                </a:gridCol>
+                <a:gridCol w="791845">
+                  <a:extLst>
+                    <a:ext uri="{9D8B030D-6E8A-4147-A177-3AD203B41FA5}">
+                      <a16:colId xmlns:a16="http://schemas.microsoft.com/office/drawing/2014/main" val="4163936885"/>
+                    </a:ext>
+                  </a:extLst>
+                </a:gridCol>
+                <a:gridCol w="791845">
+                  <a:extLst>
+                    <a:ext uri="{9D8B030D-6E8A-4147-A177-3AD203B41FA5}">
+                      <a16:colId xmlns:a16="http://schemas.microsoft.com/office/drawing/2014/main" val="4202057805"/>
+                    </a:ext>
+                  </a:extLst>
+                </a:gridCol>
+                <a:gridCol w="899795">
+                  <a:extLst>
+                    <a:ext uri="{9D8B030D-6E8A-4147-A177-3AD203B41FA5}">
+                      <a16:colId xmlns:a16="http://schemas.microsoft.com/office/drawing/2014/main" val="1796371697"/>
+                    </a:ext>
+                  </a:extLst>
+                </a:gridCol>
+                <a:gridCol w="2520315">
+                  <a:extLst>
+                    <a:ext uri="{9D8B030D-6E8A-4147-A177-3AD203B41FA5}">
+                      <a16:colId xmlns:a16="http://schemas.microsoft.com/office/drawing/2014/main" val="2826553271"/>
+                    </a:ext>
+                  </a:extLst>
+                </a:gridCol>
+              </a:tblGrid>
+              <a:tr h="0">
+                <a:tc>
+                  <a:txBody>
+                    <a:bodyPr/>
+                    <a:lstStyle/>
+                    <a:p>
+                      <a:pPr marL="0" marR="0" algn="ctr">
+                        <a:lnSpc>
+                          <a:spcPct val="115000"/>
+                        </a:lnSpc>
+                        <a:spcBef>
+                          <a:spcPts val="0"/>
+                        </a:spcBef>
+                        <a:spcAft>
+                          <a:spcPts val="0"/>
+                        </a:spcAft>
+                      </a:pPr>
+                      <a:r>
+                        <a:rPr lang="en-US" sz="1600">
+                          <a:effectLst/>
+                        </a:rPr>
+                        <a:t>Tập</a:t>
+                      </a:r>
+                      <a:endParaRPr lang="en-US" sz="2000">
+                        <a:effectLst/>
+                        <a:latin typeface="Times New Roman" panose="02020603050405020304" pitchFamily="18" charset="0"/>
+                        <a:ea typeface="Times New Roman" panose="02020603050405020304" pitchFamily="18" charset="0"/>
+                        <a:cs typeface="Times New Roman" panose="02020603050405020304" pitchFamily="18" charset="0"/>
+                      </a:endParaRPr>
+                    </a:p>
+                  </a:txBody>
+                  <a:tcPr marL="57150" marR="57150" marT="50800" marB="50800" anchor="ctr"/>
+                </a:tc>
+                <a:tc>
+                  <a:txBody>
+                    <a:bodyPr/>
+                    <a:lstStyle/>
+                    <a:p>
+                      <a:pPr marL="0" marR="0" algn="ctr">
+                        <a:lnSpc>
+                          <a:spcPct val="115000"/>
+                        </a:lnSpc>
+                        <a:spcBef>
+                          <a:spcPts val="0"/>
+                        </a:spcBef>
+                        <a:spcAft>
+                          <a:spcPts val="0"/>
+                        </a:spcAft>
+                      </a:pPr>
+                      <a:r>
+                        <a:rPr lang="en-US" sz="1600">
+                          <a:effectLst/>
+                        </a:rPr>
+                        <a:t>Cat</a:t>
+                      </a:r>
+                      <a:endParaRPr lang="en-US" sz="2000">
+                        <a:effectLst/>
+                        <a:latin typeface="Times New Roman" panose="02020603050405020304" pitchFamily="18" charset="0"/>
+                        <a:ea typeface="Times New Roman" panose="02020603050405020304" pitchFamily="18" charset="0"/>
+                        <a:cs typeface="Times New Roman" panose="02020603050405020304" pitchFamily="18" charset="0"/>
+                      </a:endParaRPr>
+                    </a:p>
+                  </a:txBody>
+                  <a:tcPr marL="57150" marR="57150" marT="50800" marB="50800" anchor="ctr"/>
+                </a:tc>
+                <a:tc>
+                  <a:txBody>
+                    <a:bodyPr/>
+                    <a:lstStyle/>
+                    <a:p>
+                      <a:pPr marL="0" marR="0" algn="ctr">
+                        <a:lnSpc>
+                          <a:spcPct val="115000"/>
+                        </a:lnSpc>
+                        <a:spcBef>
+                          <a:spcPts val="0"/>
+                        </a:spcBef>
+                        <a:spcAft>
+                          <a:spcPts val="0"/>
+                        </a:spcAft>
+                      </a:pPr>
+                      <a:r>
+                        <a:rPr lang="en-US" sz="1600">
+                          <a:effectLst/>
+                        </a:rPr>
+                        <a:t>Dog</a:t>
+                      </a:r>
+                      <a:endParaRPr lang="en-US" sz="2000">
+                        <a:effectLst/>
+                        <a:latin typeface="Times New Roman" panose="02020603050405020304" pitchFamily="18" charset="0"/>
+                        <a:ea typeface="Times New Roman" panose="02020603050405020304" pitchFamily="18" charset="0"/>
+                        <a:cs typeface="Times New Roman" panose="02020603050405020304" pitchFamily="18" charset="0"/>
+                      </a:endParaRPr>
+                    </a:p>
+                  </a:txBody>
+                  <a:tcPr marL="57150" marR="57150" marT="50800" marB="50800" anchor="ctr"/>
+                </a:tc>
+                <a:tc>
+                  <a:txBody>
+                    <a:bodyPr/>
+                    <a:lstStyle/>
+                    <a:p>
+                      <a:pPr marL="0" marR="0" algn="ctr">
+                        <a:lnSpc>
+                          <a:spcPct val="115000"/>
+                        </a:lnSpc>
+                        <a:spcBef>
+                          <a:spcPts val="0"/>
+                        </a:spcBef>
+                        <a:spcAft>
+                          <a:spcPts val="0"/>
+                        </a:spcAft>
+                      </a:pPr>
+                      <a:r>
+                        <a:rPr lang="en-US" sz="1600">
+                          <a:effectLst/>
+                        </a:rPr>
+                        <a:t>Tổng</a:t>
+                      </a:r>
+                      <a:endParaRPr lang="en-US" sz="2000">
+                        <a:effectLst/>
+                        <a:latin typeface="Times New Roman" panose="02020603050405020304" pitchFamily="18" charset="0"/>
+                        <a:ea typeface="Times New Roman" panose="02020603050405020304" pitchFamily="18" charset="0"/>
+                        <a:cs typeface="Times New Roman" panose="02020603050405020304" pitchFamily="18" charset="0"/>
+                      </a:endParaRPr>
+                    </a:p>
+                  </a:txBody>
+                  <a:tcPr marL="57150" marR="57150" marT="50800" marB="50800" anchor="ctr"/>
+                </a:tc>
+                <a:tc>
+                  <a:txBody>
+                    <a:bodyPr/>
+                    <a:lstStyle/>
+                    <a:p>
+                      <a:pPr marL="0" marR="0" algn="ctr">
+                        <a:lnSpc>
+                          <a:spcPct val="115000"/>
+                        </a:lnSpc>
+                        <a:spcBef>
+                          <a:spcPts val="0"/>
+                        </a:spcBef>
+                        <a:spcAft>
+                          <a:spcPts val="0"/>
+                        </a:spcAft>
+                      </a:pPr>
+                      <a:r>
+                        <a:rPr lang="en-US" sz="1600">
+                          <a:effectLst/>
+                        </a:rPr>
+                        <a:t>Vai trò</a:t>
+                      </a:r>
+                      <a:endParaRPr lang="en-US" sz="2000">
+                        <a:effectLst/>
+                        <a:latin typeface="Times New Roman" panose="02020603050405020304" pitchFamily="18" charset="0"/>
+                        <a:ea typeface="Times New Roman" panose="02020603050405020304" pitchFamily="18" charset="0"/>
+                        <a:cs typeface="Times New Roman" panose="02020603050405020304" pitchFamily="18" charset="0"/>
+                      </a:endParaRPr>
+                    </a:p>
+                  </a:txBody>
+                  <a:tcPr marL="57150" marR="57150" marT="50800" marB="50800" anchor="ctr"/>
+                </a:tc>
+                <a:extLst>
+                  <a:ext uri="{0D108BD9-81ED-4DB2-BD59-A6C34878D82A}">
+                    <a16:rowId xmlns:a16="http://schemas.microsoft.com/office/drawing/2014/main" val="2545566883"/>
+                  </a:ext>
+                </a:extLst>
+              </a:tr>
+              <a:tr h="0">
+                <a:tc>
+                  <a:txBody>
+                    <a:bodyPr/>
+                    <a:lstStyle/>
+                    <a:p>
+                      <a:pPr marL="0" marR="0" algn="ctr">
+                        <a:lnSpc>
+                          <a:spcPct val="115000"/>
+                        </a:lnSpc>
+                        <a:spcBef>
+                          <a:spcPts val="0"/>
+                        </a:spcBef>
+                        <a:spcAft>
+                          <a:spcPts val="0"/>
+                        </a:spcAft>
+                      </a:pPr>
+                      <a:r>
+                        <a:rPr lang="en-US" sz="1600">
+                          <a:effectLst/>
+                        </a:rPr>
+                        <a:t>Train</a:t>
+                      </a:r>
+                      <a:endParaRPr lang="en-US" sz="2000">
+                        <a:effectLst/>
+                        <a:latin typeface="Times New Roman" panose="02020603050405020304" pitchFamily="18" charset="0"/>
+                        <a:ea typeface="Times New Roman" panose="02020603050405020304" pitchFamily="18" charset="0"/>
+                        <a:cs typeface="Times New Roman" panose="02020603050405020304" pitchFamily="18" charset="0"/>
+                      </a:endParaRPr>
+                    </a:p>
+                  </a:txBody>
+                  <a:tcPr marL="53975" marR="53975" marT="44450" marB="44450" anchor="ctr"/>
+                </a:tc>
+                <a:tc>
+                  <a:txBody>
+                    <a:bodyPr/>
+                    <a:lstStyle/>
+                    <a:p>
+                      <a:pPr marL="0" marR="0">
+                        <a:lnSpc>
+                          <a:spcPct val="115000"/>
+                        </a:lnSpc>
+                        <a:spcBef>
+                          <a:spcPts val="0"/>
+                        </a:spcBef>
+                        <a:spcAft>
+                          <a:spcPts val="0"/>
+                        </a:spcAft>
+                      </a:pPr>
+                      <a:r>
+                        <a:rPr lang="en-US" sz="1600">
+                          <a:effectLst/>
+                        </a:rPr>
+                        <a:t>9.999</a:t>
+                      </a:r>
+                      <a:endParaRPr lang="en-US" sz="2000">
+                        <a:effectLst/>
+                        <a:latin typeface="Times New Roman" panose="02020603050405020304" pitchFamily="18" charset="0"/>
+                        <a:ea typeface="Times New Roman" panose="02020603050405020304" pitchFamily="18" charset="0"/>
+                        <a:cs typeface="Times New Roman" panose="02020603050405020304" pitchFamily="18" charset="0"/>
+                      </a:endParaRPr>
+                    </a:p>
+                  </a:txBody>
+                  <a:tcPr marL="53975" marR="53975" marT="44450" marB="44450" anchor="ctr"/>
+                </a:tc>
+                <a:tc>
+                  <a:txBody>
+                    <a:bodyPr/>
+                    <a:lstStyle/>
+                    <a:p>
+                      <a:pPr marL="0" marR="0">
+                        <a:lnSpc>
+                          <a:spcPct val="115000"/>
+                        </a:lnSpc>
+                        <a:spcBef>
+                          <a:spcPts val="0"/>
+                        </a:spcBef>
+                        <a:spcAft>
+                          <a:spcPts val="0"/>
+                        </a:spcAft>
+                      </a:pPr>
+                      <a:r>
+                        <a:rPr lang="en-US" sz="1600">
+                          <a:effectLst/>
+                        </a:rPr>
+                        <a:t>9.999</a:t>
+                      </a:r>
+                      <a:endParaRPr lang="en-US" sz="2000">
+                        <a:effectLst/>
+                        <a:latin typeface="Times New Roman" panose="02020603050405020304" pitchFamily="18" charset="0"/>
+                        <a:ea typeface="Times New Roman" panose="02020603050405020304" pitchFamily="18" charset="0"/>
+                        <a:cs typeface="Times New Roman" panose="02020603050405020304" pitchFamily="18" charset="0"/>
+                      </a:endParaRPr>
+                    </a:p>
+                  </a:txBody>
+                  <a:tcPr marL="53975" marR="53975" marT="44450" marB="44450" anchor="ctr"/>
+                </a:tc>
+                <a:tc>
+                  <a:txBody>
+                    <a:bodyPr/>
+                    <a:lstStyle/>
+                    <a:p>
+                      <a:pPr marL="0" marR="0">
+                        <a:lnSpc>
+                          <a:spcPct val="115000"/>
+                        </a:lnSpc>
+                        <a:spcBef>
+                          <a:spcPts val="0"/>
+                        </a:spcBef>
+                        <a:spcAft>
+                          <a:spcPts val="0"/>
+                        </a:spcAft>
+                      </a:pPr>
+                      <a:r>
+                        <a:rPr lang="en-US" sz="1600">
+                          <a:effectLst/>
+                        </a:rPr>
+                        <a:t>19.998</a:t>
+                      </a:r>
+                      <a:endParaRPr lang="en-US" sz="2000">
+                        <a:effectLst/>
+                        <a:latin typeface="Times New Roman" panose="02020603050405020304" pitchFamily="18" charset="0"/>
+                        <a:ea typeface="Times New Roman" panose="02020603050405020304" pitchFamily="18" charset="0"/>
+                        <a:cs typeface="Times New Roman" panose="02020603050405020304" pitchFamily="18" charset="0"/>
+                      </a:endParaRPr>
+                    </a:p>
+                  </a:txBody>
+                  <a:tcPr marL="53975" marR="53975" marT="44450" marB="44450" anchor="ctr"/>
+                </a:tc>
+                <a:tc>
+                  <a:txBody>
+                    <a:bodyPr/>
+                    <a:lstStyle/>
+                    <a:p>
+                      <a:pPr marL="0" marR="0">
+                        <a:lnSpc>
+                          <a:spcPct val="115000"/>
+                        </a:lnSpc>
+                        <a:spcBef>
+                          <a:spcPts val="0"/>
+                        </a:spcBef>
+                        <a:spcAft>
+                          <a:spcPts val="0"/>
+                        </a:spcAft>
+                      </a:pPr>
+                      <a:r>
+                        <a:rPr lang="en-US" sz="1600">
+                          <a:effectLst/>
+                        </a:rPr>
+                        <a:t>Tối ưu tham số mô hình.</a:t>
+                      </a:r>
+                      <a:endParaRPr lang="en-US" sz="2000">
+                        <a:effectLst/>
+                        <a:latin typeface="Times New Roman" panose="02020603050405020304" pitchFamily="18" charset="0"/>
+                        <a:ea typeface="Times New Roman" panose="02020603050405020304" pitchFamily="18" charset="0"/>
+                        <a:cs typeface="Times New Roman" panose="02020603050405020304" pitchFamily="18" charset="0"/>
+                      </a:endParaRPr>
+                    </a:p>
+                  </a:txBody>
+                  <a:tcPr marL="53975" marR="53975" marT="44450" marB="44450" anchor="ctr"/>
+                </a:tc>
+                <a:extLst>
+                  <a:ext uri="{0D108BD9-81ED-4DB2-BD59-A6C34878D82A}">
+                    <a16:rowId xmlns:a16="http://schemas.microsoft.com/office/drawing/2014/main" val="3056189952"/>
+                  </a:ext>
+                </a:extLst>
+              </a:tr>
+              <a:tr h="0">
+                <a:tc>
+                  <a:txBody>
+                    <a:bodyPr/>
+                    <a:lstStyle/>
+                    <a:p>
+                      <a:pPr marL="0" marR="0" algn="ctr">
+                        <a:lnSpc>
+                          <a:spcPct val="115000"/>
+                        </a:lnSpc>
+                        <a:spcBef>
+                          <a:spcPts val="0"/>
+                        </a:spcBef>
+                        <a:spcAft>
+                          <a:spcPts val="0"/>
+                        </a:spcAft>
+                      </a:pPr>
+                      <a:r>
+                        <a:rPr lang="en-US" sz="1600">
+                          <a:effectLst/>
+                        </a:rPr>
+                        <a:t>Validation</a:t>
+                      </a:r>
+                      <a:endParaRPr lang="en-US" sz="2000">
+                        <a:effectLst/>
+                        <a:latin typeface="Times New Roman" panose="02020603050405020304" pitchFamily="18" charset="0"/>
+                        <a:ea typeface="Times New Roman" panose="02020603050405020304" pitchFamily="18" charset="0"/>
+                        <a:cs typeface="Times New Roman" panose="02020603050405020304" pitchFamily="18" charset="0"/>
+                      </a:endParaRPr>
+                    </a:p>
+                  </a:txBody>
+                  <a:tcPr marL="53975" marR="53975" marT="44450" marB="44450" anchor="ctr"/>
+                </a:tc>
+                <a:tc>
+                  <a:txBody>
+                    <a:bodyPr/>
+                    <a:lstStyle/>
+                    <a:p>
+                      <a:pPr marL="0" marR="0">
+                        <a:lnSpc>
+                          <a:spcPct val="115000"/>
+                        </a:lnSpc>
+                        <a:spcBef>
+                          <a:spcPts val="0"/>
+                        </a:spcBef>
+                        <a:spcAft>
+                          <a:spcPts val="0"/>
+                        </a:spcAft>
+                      </a:pPr>
+                      <a:r>
+                        <a:rPr lang="en-US" sz="1600">
+                          <a:effectLst/>
+                        </a:rPr>
+                        <a:t>1.250</a:t>
+                      </a:r>
+                      <a:endParaRPr lang="en-US" sz="2000">
+                        <a:effectLst/>
+                        <a:latin typeface="Times New Roman" panose="02020603050405020304" pitchFamily="18" charset="0"/>
+                        <a:ea typeface="Times New Roman" panose="02020603050405020304" pitchFamily="18" charset="0"/>
+                        <a:cs typeface="Times New Roman" panose="02020603050405020304" pitchFamily="18" charset="0"/>
+                      </a:endParaRPr>
+                    </a:p>
+                  </a:txBody>
+                  <a:tcPr marL="53975" marR="53975" marT="44450" marB="44450" anchor="ctr"/>
+                </a:tc>
+                <a:tc>
+                  <a:txBody>
+                    <a:bodyPr/>
+                    <a:lstStyle/>
+                    <a:p>
+                      <a:pPr marL="0" marR="0">
+                        <a:lnSpc>
+                          <a:spcPct val="115000"/>
+                        </a:lnSpc>
+                        <a:spcBef>
+                          <a:spcPts val="0"/>
+                        </a:spcBef>
+                        <a:spcAft>
+                          <a:spcPts val="0"/>
+                        </a:spcAft>
+                      </a:pPr>
+                      <a:r>
+                        <a:rPr lang="en-US" sz="1600">
+                          <a:effectLst/>
+                        </a:rPr>
+                        <a:t>1.250</a:t>
+                      </a:r>
+                      <a:endParaRPr lang="en-US" sz="2000">
+                        <a:effectLst/>
+                        <a:latin typeface="Times New Roman" panose="02020603050405020304" pitchFamily="18" charset="0"/>
+                        <a:ea typeface="Times New Roman" panose="02020603050405020304" pitchFamily="18" charset="0"/>
+                        <a:cs typeface="Times New Roman" panose="02020603050405020304" pitchFamily="18" charset="0"/>
+                      </a:endParaRPr>
+                    </a:p>
+                  </a:txBody>
+                  <a:tcPr marL="53975" marR="53975" marT="44450" marB="44450" anchor="ctr"/>
+                </a:tc>
+                <a:tc>
+                  <a:txBody>
+                    <a:bodyPr/>
+                    <a:lstStyle/>
+                    <a:p>
+                      <a:pPr marL="0" marR="0">
+                        <a:lnSpc>
+                          <a:spcPct val="115000"/>
+                        </a:lnSpc>
+                        <a:spcBef>
+                          <a:spcPts val="0"/>
+                        </a:spcBef>
+                        <a:spcAft>
+                          <a:spcPts val="0"/>
+                        </a:spcAft>
+                      </a:pPr>
+                      <a:r>
+                        <a:rPr lang="en-US" sz="1600">
+                          <a:effectLst/>
+                        </a:rPr>
+                        <a:t>2.500</a:t>
+                      </a:r>
+                      <a:endParaRPr lang="en-US" sz="2000">
+                        <a:effectLst/>
+                        <a:latin typeface="Times New Roman" panose="02020603050405020304" pitchFamily="18" charset="0"/>
+                        <a:ea typeface="Times New Roman" panose="02020603050405020304" pitchFamily="18" charset="0"/>
+                        <a:cs typeface="Times New Roman" panose="02020603050405020304" pitchFamily="18" charset="0"/>
+                      </a:endParaRPr>
+                    </a:p>
+                  </a:txBody>
+                  <a:tcPr marL="53975" marR="53975" marT="44450" marB="44450" anchor="ctr"/>
+                </a:tc>
+                <a:tc>
+                  <a:txBody>
+                    <a:bodyPr/>
+                    <a:lstStyle/>
+                    <a:p>
+                      <a:pPr marL="0" marR="0">
+                        <a:lnSpc>
+                          <a:spcPct val="115000"/>
+                        </a:lnSpc>
+                        <a:spcBef>
+                          <a:spcPts val="0"/>
+                        </a:spcBef>
+                        <a:spcAft>
+                          <a:spcPts val="0"/>
+                        </a:spcAft>
+                      </a:pPr>
+                      <a:r>
+                        <a:rPr lang="en-US" sz="1600">
+                          <a:effectLst/>
+                        </a:rPr>
+                        <a:t>Chọn checkpoint, early stopping, ablation.</a:t>
+                      </a:r>
+                      <a:endParaRPr lang="en-US" sz="2000">
+                        <a:effectLst/>
+                        <a:latin typeface="Times New Roman" panose="02020603050405020304" pitchFamily="18" charset="0"/>
+                        <a:ea typeface="Times New Roman" panose="02020603050405020304" pitchFamily="18" charset="0"/>
+                        <a:cs typeface="Times New Roman" panose="02020603050405020304" pitchFamily="18" charset="0"/>
+                      </a:endParaRPr>
+                    </a:p>
+                  </a:txBody>
+                  <a:tcPr marL="53975" marR="53975" marT="44450" marB="44450" anchor="ctr"/>
+                </a:tc>
+                <a:extLst>
+                  <a:ext uri="{0D108BD9-81ED-4DB2-BD59-A6C34878D82A}">
+                    <a16:rowId xmlns:a16="http://schemas.microsoft.com/office/drawing/2014/main" val="1793375072"/>
+                  </a:ext>
+                </a:extLst>
+              </a:tr>
+              <a:tr h="0">
+                <a:tc>
+                  <a:txBody>
+                    <a:bodyPr/>
+                    <a:lstStyle/>
+                    <a:p>
+                      <a:pPr marL="0" marR="0" algn="ctr">
+                        <a:lnSpc>
+                          <a:spcPct val="115000"/>
+                        </a:lnSpc>
+                        <a:spcBef>
+                          <a:spcPts val="0"/>
+                        </a:spcBef>
+                        <a:spcAft>
+                          <a:spcPts val="0"/>
+                        </a:spcAft>
+                      </a:pPr>
+                      <a:r>
+                        <a:rPr lang="en-US" sz="1600">
+                          <a:effectLst/>
+                        </a:rPr>
+                        <a:t>Test</a:t>
+                      </a:r>
+                      <a:endParaRPr lang="en-US" sz="2000">
+                        <a:effectLst/>
+                        <a:latin typeface="Times New Roman" panose="02020603050405020304" pitchFamily="18" charset="0"/>
+                        <a:ea typeface="Times New Roman" panose="02020603050405020304" pitchFamily="18" charset="0"/>
+                        <a:cs typeface="Times New Roman" panose="02020603050405020304" pitchFamily="18" charset="0"/>
+                      </a:endParaRPr>
+                    </a:p>
+                  </a:txBody>
+                  <a:tcPr marL="53975" marR="53975" marT="44450" marB="44450" anchor="ctr"/>
+                </a:tc>
+                <a:tc>
+                  <a:txBody>
+                    <a:bodyPr/>
+                    <a:lstStyle/>
+                    <a:p>
+                      <a:pPr marL="0" marR="0">
+                        <a:lnSpc>
+                          <a:spcPct val="115000"/>
+                        </a:lnSpc>
+                        <a:spcBef>
+                          <a:spcPts val="0"/>
+                        </a:spcBef>
+                        <a:spcAft>
+                          <a:spcPts val="0"/>
+                        </a:spcAft>
+                      </a:pPr>
+                      <a:r>
+                        <a:rPr lang="en-US" sz="1600">
+                          <a:effectLst/>
+                        </a:rPr>
+                        <a:t>1.250</a:t>
+                      </a:r>
+                      <a:endParaRPr lang="en-US" sz="2000">
+                        <a:effectLst/>
+                        <a:latin typeface="Times New Roman" panose="02020603050405020304" pitchFamily="18" charset="0"/>
+                        <a:ea typeface="Times New Roman" panose="02020603050405020304" pitchFamily="18" charset="0"/>
+                        <a:cs typeface="Times New Roman" panose="02020603050405020304" pitchFamily="18" charset="0"/>
+                      </a:endParaRPr>
+                    </a:p>
+                  </a:txBody>
+                  <a:tcPr marL="53975" marR="53975" marT="44450" marB="44450" anchor="ctr"/>
+                </a:tc>
+                <a:tc>
+                  <a:txBody>
+                    <a:bodyPr/>
+                    <a:lstStyle/>
+                    <a:p>
+                      <a:pPr marL="0" marR="0">
+                        <a:lnSpc>
+                          <a:spcPct val="115000"/>
+                        </a:lnSpc>
+                        <a:spcBef>
+                          <a:spcPts val="0"/>
+                        </a:spcBef>
+                        <a:spcAft>
+                          <a:spcPts val="0"/>
+                        </a:spcAft>
+                      </a:pPr>
+                      <a:r>
+                        <a:rPr lang="en-US" sz="1600">
+                          <a:effectLst/>
+                        </a:rPr>
+                        <a:t>1.250</a:t>
+                      </a:r>
+                      <a:endParaRPr lang="en-US" sz="2000">
+                        <a:effectLst/>
+                        <a:latin typeface="Times New Roman" panose="02020603050405020304" pitchFamily="18" charset="0"/>
+                        <a:ea typeface="Times New Roman" panose="02020603050405020304" pitchFamily="18" charset="0"/>
+                        <a:cs typeface="Times New Roman" panose="02020603050405020304" pitchFamily="18" charset="0"/>
+                      </a:endParaRPr>
+                    </a:p>
+                  </a:txBody>
+                  <a:tcPr marL="53975" marR="53975" marT="44450" marB="44450" anchor="ctr"/>
+                </a:tc>
+                <a:tc>
+                  <a:txBody>
+                    <a:bodyPr/>
+                    <a:lstStyle/>
+                    <a:p>
+                      <a:pPr marL="0" marR="0">
+                        <a:lnSpc>
+                          <a:spcPct val="115000"/>
+                        </a:lnSpc>
+                        <a:spcBef>
+                          <a:spcPts val="0"/>
+                        </a:spcBef>
+                        <a:spcAft>
+                          <a:spcPts val="0"/>
+                        </a:spcAft>
+                      </a:pPr>
+                      <a:r>
+                        <a:rPr lang="en-US" sz="1600">
+                          <a:effectLst/>
+                        </a:rPr>
+                        <a:t>2.500</a:t>
+                      </a:r>
+                      <a:endParaRPr lang="en-US" sz="2000">
+                        <a:effectLst/>
+                        <a:latin typeface="Times New Roman" panose="02020603050405020304" pitchFamily="18" charset="0"/>
+                        <a:ea typeface="Times New Roman" panose="02020603050405020304" pitchFamily="18" charset="0"/>
+                        <a:cs typeface="Times New Roman" panose="02020603050405020304" pitchFamily="18" charset="0"/>
+                      </a:endParaRPr>
+                    </a:p>
+                  </a:txBody>
+                  <a:tcPr marL="53975" marR="53975" marT="44450" marB="44450" anchor="ctr"/>
+                </a:tc>
+                <a:tc>
+                  <a:txBody>
+                    <a:bodyPr/>
+                    <a:lstStyle/>
+                    <a:p>
+                      <a:pPr marL="0" marR="0">
+                        <a:lnSpc>
+                          <a:spcPct val="115000"/>
+                        </a:lnSpc>
+                        <a:spcBef>
+                          <a:spcPts val="0"/>
+                        </a:spcBef>
+                        <a:spcAft>
+                          <a:spcPts val="0"/>
+                        </a:spcAft>
+                      </a:pPr>
+                      <a:r>
+                        <a:rPr lang="en-US" sz="1600">
+                          <a:effectLst/>
+                        </a:rPr>
+                        <a:t>Đánh giá cuối cùng; không dùng để tuning.</a:t>
+                      </a:r>
+                      <a:endParaRPr lang="en-US" sz="2000">
+                        <a:effectLst/>
+                        <a:latin typeface="Times New Roman" panose="02020603050405020304" pitchFamily="18" charset="0"/>
+                        <a:ea typeface="Times New Roman" panose="02020603050405020304" pitchFamily="18" charset="0"/>
+                        <a:cs typeface="Times New Roman" panose="02020603050405020304" pitchFamily="18" charset="0"/>
+                      </a:endParaRPr>
+                    </a:p>
+                  </a:txBody>
+                  <a:tcPr marL="53975" marR="53975" marT="44450" marB="44450" anchor="ctr"/>
+                </a:tc>
+                <a:extLst>
+                  <a:ext uri="{0D108BD9-81ED-4DB2-BD59-A6C34878D82A}">
+                    <a16:rowId xmlns:a16="http://schemas.microsoft.com/office/drawing/2014/main" val="3101485505"/>
+                  </a:ext>
+                </a:extLst>
+              </a:tr>
+              <a:tr h="0">
+                <a:tc>
+                  <a:txBody>
+                    <a:bodyPr/>
+                    <a:lstStyle/>
+                    <a:p>
+                      <a:pPr marL="0" marR="0" algn="ctr">
+                        <a:lnSpc>
+                          <a:spcPct val="115000"/>
+                        </a:lnSpc>
+                        <a:spcBef>
+                          <a:spcPts val="0"/>
+                        </a:spcBef>
+                        <a:spcAft>
+                          <a:spcPts val="0"/>
+                        </a:spcAft>
+                      </a:pPr>
+                      <a:r>
+                        <a:rPr lang="en-US" sz="1600">
+                          <a:effectLst/>
+                        </a:rPr>
+                        <a:t>Tổng</a:t>
+                      </a:r>
+                      <a:endParaRPr lang="en-US" sz="2000">
+                        <a:effectLst/>
+                        <a:latin typeface="Times New Roman" panose="02020603050405020304" pitchFamily="18" charset="0"/>
+                        <a:ea typeface="Times New Roman" panose="02020603050405020304" pitchFamily="18" charset="0"/>
+                        <a:cs typeface="Times New Roman" panose="02020603050405020304" pitchFamily="18" charset="0"/>
+                      </a:endParaRPr>
+                    </a:p>
+                  </a:txBody>
+                  <a:tcPr marL="53975" marR="53975" marT="44450" marB="44450" anchor="ctr"/>
+                </a:tc>
+                <a:tc>
+                  <a:txBody>
+                    <a:bodyPr/>
+                    <a:lstStyle/>
+                    <a:p>
+                      <a:pPr marL="0" marR="0">
+                        <a:lnSpc>
+                          <a:spcPct val="115000"/>
+                        </a:lnSpc>
+                        <a:spcBef>
+                          <a:spcPts val="0"/>
+                        </a:spcBef>
+                        <a:spcAft>
+                          <a:spcPts val="0"/>
+                        </a:spcAft>
+                      </a:pPr>
+                      <a:r>
+                        <a:rPr lang="en-US" sz="1600">
+                          <a:effectLst/>
+                        </a:rPr>
+                        <a:t>12.499</a:t>
+                      </a:r>
+                      <a:endParaRPr lang="en-US" sz="2000">
+                        <a:effectLst/>
+                        <a:latin typeface="Times New Roman" panose="02020603050405020304" pitchFamily="18" charset="0"/>
+                        <a:ea typeface="Times New Roman" panose="02020603050405020304" pitchFamily="18" charset="0"/>
+                        <a:cs typeface="Times New Roman" panose="02020603050405020304" pitchFamily="18" charset="0"/>
+                      </a:endParaRPr>
+                    </a:p>
+                  </a:txBody>
+                  <a:tcPr marL="53975" marR="53975" marT="44450" marB="44450" anchor="ctr"/>
+                </a:tc>
+                <a:tc>
+                  <a:txBody>
+                    <a:bodyPr/>
+                    <a:lstStyle/>
+                    <a:p>
+                      <a:pPr marL="0" marR="0">
+                        <a:lnSpc>
+                          <a:spcPct val="115000"/>
+                        </a:lnSpc>
+                        <a:spcBef>
+                          <a:spcPts val="0"/>
+                        </a:spcBef>
+                        <a:spcAft>
+                          <a:spcPts val="0"/>
+                        </a:spcAft>
+                      </a:pPr>
+                      <a:r>
+                        <a:rPr lang="en-US" sz="1600">
+                          <a:effectLst/>
+                        </a:rPr>
+                        <a:t>12.499</a:t>
+                      </a:r>
+                      <a:endParaRPr lang="en-US" sz="2000">
+                        <a:effectLst/>
+                        <a:latin typeface="Times New Roman" panose="02020603050405020304" pitchFamily="18" charset="0"/>
+                        <a:ea typeface="Times New Roman" panose="02020603050405020304" pitchFamily="18" charset="0"/>
+                        <a:cs typeface="Times New Roman" panose="02020603050405020304" pitchFamily="18" charset="0"/>
+                      </a:endParaRPr>
+                    </a:p>
+                  </a:txBody>
+                  <a:tcPr marL="53975" marR="53975" marT="44450" marB="44450" anchor="ctr"/>
+                </a:tc>
+                <a:tc>
+                  <a:txBody>
+                    <a:bodyPr/>
+                    <a:lstStyle/>
+                    <a:p>
+                      <a:pPr marL="0" marR="0">
+                        <a:lnSpc>
+                          <a:spcPct val="115000"/>
+                        </a:lnSpc>
+                        <a:spcBef>
+                          <a:spcPts val="0"/>
+                        </a:spcBef>
+                        <a:spcAft>
+                          <a:spcPts val="0"/>
+                        </a:spcAft>
+                      </a:pPr>
+                      <a:r>
+                        <a:rPr lang="en-US" sz="1600">
+                          <a:effectLst/>
+                        </a:rPr>
+                        <a:t>24.998</a:t>
+                      </a:r>
+                      <a:endParaRPr lang="en-US" sz="2000">
+                        <a:effectLst/>
+                        <a:latin typeface="Times New Roman" panose="02020603050405020304" pitchFamily="18" charset="0"/>
+                        <a:ea typeface="Times New Roman" panose="02020603050405020304" pitchFamily="18" charset="0"/>
+                        <a:cs typeface="Times New Roman" panose="02020603050405020304" pitchFamily="18" charset="0"/>
+                      </a:endParaRPr>
+                    </a:p>
+                  </a:txBody>
+                  <a:tcPr marL="53975" marR="53975" marT="44450" marB="44450" anchor="ctr"/>
+                </a:tc>
+                <a:tc>
+                  <a:txBody>
+                    <a:bodyPr/>
+                    <a:lstStyle/>
+                    <a:p>
+                      <a:pPr marL="0" marR="0">
+                        <a:lnSpc>
+                          <a:spcPct val="115000"/>
+                        </a:lnSpc>
+                        <a:spcBef>
+                          <a:spcPts val="0"/>
+                        </a:spcBef>
+                        <a:spcAft>
+                          <a:spcPts val="0"/>
+                        </a:spcAft>
+                      </a:pPr>
+                      <a:r>
+                        <a:rPr lang="en-US" sz="1600">
+                          <a:effectLst/>
+                        </a:rPr>
+                        <a:t>Dữ liệu có nhãn.</a:t>
+                      </a:r>
+                      <a:endParaRPr lang="en-US" sz="2000">
+                        <a:effectLst/>
+                        <a:latin typeface="Times New Roman" panose="02020603050405020304" pitchFamily="18" charset="0"/>
+                        <a:ea typeface="Times New Roman" panose="02020603050405020304" pitchFamily="18" charset="0"/>
+                        <a:cs typeface="Times New Roman" panose="02020603050405020304" pitchFamily="18" charset="0"/>
+                      </a:endParaRPr>
+                    </a:p>
+                  </a:txBody>
+                  <a:tcPr marL="53975" marR="53975" marT="44450" marB="44450" anchor="ctr"/>
+                </a:tc>
+                <a:extLst>
+                  <a:ext uri="{0D108BD9-81ED-4DB2-BD59-A6C34878D82A}">
+                    <a16:rowId xmlns:a16="http://schemas.microsoft.com/office/drawing/2014/main" val="365121541"/>
+                  </a:ext>
+                </a:extLst>
+              </a:tr>
+            </a:tbl>
+          </a:graphicData>
+        </a:graphic>
+      </p:graphicFrame>
     </p:spTree>
     <p:extLst>
       <p:ext uri="{BB962C8B-B14F-4D97-AF65-F5344CB8AC3E}">
@@ -4945,8 +5903,132 @@
         </p:nvSpPr>
         <p:spPr>
           <a:xfrm>
-            <a:off x="508000" y="1295400"/>
-            <a:ext cx="11074400" cy="4724400"/>
+            <a:off x="228601" y="1020764"/>
+            <a:ext cx="3073400" cy="503236"/>
+          </a:xfrm>
+        </p:spPr>
+        <p:txBody>
+          <a:bodyPr/>
+          <a:lstStyle/>
+          <a:p>
+            <a:pPr marL="0" indent="0">
+              <a:buNone/>
+            </a:pPr>
+            <a:r>
+              <a:rPr lang="en-US"/>
+              <a:t>Related work</a:t>
+            </a:r>
+          </a:p>
+        </p:txBody>
+      </p:sp>
+      <p:pic>
+        <p:nvPicPr>
+          <p:cNvPr id="5" name="Picture 4">
+            <a:extLst>
+              <a:ext uri="{FF2B5EF4-FFF2-40B4-BE49-F238E27FC236}">
+                <a16:creationId xmlns:a16="http://schemas.microsoft.com/office/drawing/2014/main" id="{ABD22FF7-6303-4FD3-BFEC-2B4E3452C0CB}"/>
+              </a:ext>
+            </a:extLst>
+          </p:cNvPr>
+          <p:cNvPicPr>
+            <a:picLocks noChangeAspect="1"/>
+          </p:cNvPicPr>
+          <p:nvPr/>
+        </p:nvPicPr>
+        <p:blipFill>
+          <a:blip r:embed="rId2"/>
+          <a:stretch>
+            <a:fillRect/>
+          </a:stretch>
+        </p:blipFill>
+        <p:spPr>
+          <a:xfrm>
+            <a:off x="3296920" y="1143000"/>
+            <a:ext cx="7980679" cy="4642524"/>
+          </a:xfrm>
+          <a:prstGeom prst="rect">
+            <a:avLst/>
+          </a:prstGeom>
+        </p:spPr>
+      </p:pic>
+    </p:spTree>
+    <p:extLst>
+      <p:ext uri="{BB962C8B-B14F-4D97-AF65-F5344CB8AC3E}">
+        <p14:creationId xmlns:p14="http://schemas.microsoft.com/office/powerpoint/2010/main" val="1379045275"/>
+      </p:ext>
+    </p:extLst>
+  </p:cSld>
+  <p:clrMapOvr>
+    <a:masterClrMapping/>
+  </p:clrMapOvr>
+</p:sld>
+</file>
+
+<file path=ppt/slides/slide13.xml><?xml version="1.0" encoding="utf-8"?>
+<p:sld xmlns:a="http://schemas.openxmlformats.org/drawingml/2006/main" xmlns:r="http://schemas.openxmlformats.org/officeDocument/2006/relationships" xmlns:p="http://schemas.openxmlformats.org/presentationml/2006/main">
+  <p:cSld>
+    <p:spTree>
+      <p:nvGrpSpPr>
+        <p:cNvPr id="1" name=""/>
+        <p:cNvGrpSpPr/>
+        <p:nvPr/>
+      </p:nvGrpSpPr>
+      <p:grpSpPr>
+        <a:xfrm>
+          <a:off x="0" y="0"/>
+          <a:ext cx="0" cy="0"/>
+          <a:chOff x="0" y="0"/>
+          <a:chExt cx="0" cy="0"/>
+        </a:xfrm>
+      </p:grpSpPr>
+      <p:sp>
+        <p:nvSpPr>
+          <p:cNvPr id="2" name="Title 1">
+            <a:extLst>
+              <a:ext uri="{FF2B5EF4-FFF2-40B4-BE49-F238E27FC236}">
+                <a16:creationId xmlns:a16="http://schemas.microsoft.com/office/drawing/2014/main" id="{8EB3062A-B583-4BF2-B6BF-0593EEBF68AF}"/>
+              </a:ext>
+            </a:extLst>
+          </p:cNvPr>
+          <p:cNvSpPr>
+            <a:spLocks noGrp="1"/>
+          </p:cNvSpPr>
+          <p:nvPr>
+            <p:ph type="title"/>
+          </p:nvPr>
+        </p:nvSpPr>
+        <p:spPr/>
+        <p:txBody>
+          <a:bodyPr/>
+          <a:lstStyle/>
+          <a:p>
+            <a:r>
+              <a:rPr lang="en-US"/>
+              <a:t>2. Report mỗi tuần</a:t>
+            </a:r>
+          </a:p>
+        </p:txBody>
+      </p:sp>
+      <p:sp>
+        <p:nvSpPr>
+          <p:cNvPr id="51" name="Content Placeholder 2">
+            <a:extLst>
+              <a:ext uri="{FF2B5EF4-FFF2-40B4-BE49-F238E27FC236}">
+                <a16:creationId xmlns:a16="http://schemas.microsoft.com/office/drawing/2014/main" id="{7E3D7437-29CF-43A9-9A4E-F1201877204B}"/>
+              </a:ext>
+            </a:extLst>
+          </p:cNvPr>
+          <p:cNvSpPr>
+            <a:spLocks noGrp="1"/>
+          </p:cNvSpPr>
+          <p:nvPr>
+            <p:ph idx="1"/>
+          </p:nvPr>
+        </p:nvSpPr>
+        <p:spPr>
+          <a:xfrm>
+            <a:off x="228601" y="1020764"/>
+            <a:ext cx="3073400" cy="1524000"/>
           </a:xfrm>
         </p:spPr>
         <p:txBody>
@@ -4961,8 +6043,850 @@
               <a:t>Propose Model</a:t>
             </a:r>
           </a:p>
+          <a:p>
+            <a:pPr marL="0" indent="0">
+              <a:buNone/>
+            </a:pPr>
+            <a:r>
+              <a:rPr lang="en-US" sz="1800">
+                <a:effectLst/>
+                <a:latin typeface="Times New Roman" panose="02020603050405020304" pitchFamily="18" charset="0"/>
+                <a:ea typeface="Times New Roman" panose="02020603050405020304" pitchFamily="18" charset="0"/>
+              </a:rPr>
+              <a:t>SSR-UnrollNet-S3 (Shared-Specific Sparse Unrolling Network for ESP32-S3). </a:t>
+            </a:r>
+            <a:endParaRPr lang="en-US"/>
+          </a:p>
         </p:txBody>
       </p:sp>
+      <p:pic>
+        <p:nvPicPr>
+          <p:cNvPr id="4" name="Picture 3">
+            <a:extLst>
+              <a:ext uri="{FF2B5EF4-FFF2-40B4-BE49-F238E27FC236}">
+                <a16:creationId xmlns:a16="http://schemas.microsoft.com/office/drawing/2014/main" id="{EAD6C97C-2295-4BB8-BACE-7337CF7E26ED}"/>
+              </a:ext>
+            </a:extLst>
+          </p:cNvPr>
+          <p:cNvPicPr/>
+          <p:nvPr/>
+        </p:nvPicPr>
+        <p:blipFill>
+          <a:blip r:embed="rId2"/>
+          <a:stretch>
+            <a:fillRect/>
+          </a:stretch>
+        </p:blipFill>
+        <p:spPr>
+          <a:xfrm>
+            <a:off x="3048000" y="1020764"/>
+            <a:ext cx="8915399" cy="5163818"/>
+          </a:xfrm>
+          <a:prstGeom prst="rect">
+            <a:avLst/>
+          </a:prstGeom>
+        </p:spPr>
+      </p:pic>
+      <p:sp>
+        <p:nvSpPr>
+          <p:cNvPr id="6" name="TextBox 5">
+            <a:extLst>
+              <a:ext uri="{FF2B5EF4-FFF2-40B4-BE49-F238E27FC236}">
+                <a16:creationId xmlns:a16="http://schemas.microsoft.com/office/drawing/2014/main" id="{DDF03A4C-64FC-4716-8E10-F9D4D858BE59}"/>
+              </a:ext>
+            </a:extLst>
+          </p:cNvPr>
+          <p:cNvSpPr txBox="1"/>
+          <p:nvPr/>
+        </p:nvSpPr>
+        <p:spPr>
+          <a:xfrm>
+            <a:off x="304800" y="2499808"/>
+            <a:ext cx="2743200" cy="1754326"/>
+          </a:xfrm>
+          <a:prstGeom prst="rect">
+            <a:avLst/>
+          </a:prstGeom>
+          <a:noFill/>
+        </p:spPr>
+        <p:txBody>
+          <a:bodyPr wrap="square">
+            <a:spAutoFit/>
+          </a:bodyPr>
+          <a:lstStyle/>
+          <a:p>
+            <a:r>
+              <a:rPr lang="en-US" sz="1800">
+                <a:effectLst/>
+                <a:latin typeface="Times New Roman" panose="02020603050405020304" pitchFamily="18" charset="0"/>
+                <a:ea typeface="Times New Roman" panose="02020603050405020304" pitchFamily="18" charset="0"/>
+              </a:rPr>
+              <a:t>Kết quả validation sơ bộ của student có KD đạt Accuracy = 93,08% và Macro-F1 = 93,08% với 20.607 tham số và 10,284M MACs</a:t>
+            </a:r>
+            <a:endParaRPr lang="en-US"/>
+          </a:p>
+        </p:txBody>
+      </p:sp>
+      <p:graphicFrame>
+        <p:nvGraphicFramePr>
+          <p:cNvPr id="5" name="Table 4">
+            <a:extLst>
+              <a:ext uri="{FF2B5EF4-FFF2-40B4-BE49-F238E27FC236}">
+                <a16:creationId xmlns:a16="http://schemas.microsoft.com/office/drawing/2014/main" id="{89603A60-5844-4073-8B5E-FA4BCF24423F}"/>
+              </a:ext>
+            </a:extLst>
+          </p:cNvPr>
+          <p:cNvGraphicFramePr>
+            <a:graphicFrameLocks noGrp="1"/>
+          </p:cNvGraphicFramePr>
+          <p:nvPr>
+            <p:extLst>
+              <p:ext uri="{D42A27DB-BD31-4B8C-83A1-F6EECF244321}">
+                <p14:modId xmlns:p14="http://schemas.microsoft.com/office/powerpoint/2010/main" val="3615522086"/>
+              </p:ext>
+            </p:extLst>
+          </p:nvPr>
+        </p:nvGraphicFramePr>
+        <p:xfrm>
+          <a:off x="-3733800" y="2707317"/>
+          <a:ext cx="3240405" cy="3512825"/>
+        </p:xfrm>
+        <a:graphic>
+          <a:graphicData uri="http://schemas.openxmlformats.org/drawingml/2006/table">
+            <a:tbl>
+              <a:tblPr firstRow="1" firstCol="1" bandRow="1">
+                <a:tableStyleId>{5C22544A-7EE6-4342-B048-85BDC9FD1C3A}</a:tableStyleId>
+              </a:tblPr>
+              <a:tblGrid>
+                <a:gridCol w="1080135">
+                  <a:extLst>
+                    <a:ext uri="{9D8B030D-6E8A-4147-A177-3AD203B41FA5}">
+                      <a16:colId xmlns:a16="http://schemas.microsoft.com/office/drawing/2014/main" val="753416517"/>
+                    </a:ext>
+                  </a:extLst>
+                </a:gridCol>
+                <a:gridCol w="2160270">
+                  <a:extLst>
+                    <a:ext uri="{9D8B030D-6E8A-4147-A177-3AD203B41FA5}">
+                      <a16:colId xmlns:a16="http://schemas.microsoft.com/office/drawing/2014/main" val="216993978"/>
+                    </a:ext>
+                  </a:extLst>
+                </a:gridCol>
+              </a:tblGrid>
+              <a:tr h="0">
+                <a:tc>
+                  <a:txBody>
+                    <a:bodyPr/>
+                    <a:lstStyle/>
+                    <a:p>
+                      <a:pPr marL="0" marR="0" algn="ctr">
+                        <a:lnSpc>
+                          <a:spcPct val="115000"/>
+                        </a:lnSpc>
+                        <a:spcBef>
+                          <a:spcPts val="0"/>
+                        </a:spcBef>
+                        <a:spcAft>
+                          <a:spcPts val="0"/>
+                        </a:spcAft>
+                      </a:pPr>
+                      <a:r>
+                        <a:rPr lang="en-US" sz="1050">
+                          <a:effectLst/>
+                        </a:rPr>
+                        <a:t>Cơ chế</a:t>
+                      </a:r>
+                      <a:endParaRPr lang="en-US" sz="1200">
+                        <a:effectLst/>
+                        <a:latin typeface="Times New Roman" panose="02020603050405020304" pitchFamily="18" charset="0"/>
+                        <a:ea typeface="Times New Roman" panose="02020603050405020304" pitchFamily="18" charset="0"/>
+                        <a:cs typeface="Times New Roman" panose="02020603050405020304" pitchFamily="18" charset="0"/>
+                      </a:endParaRPr>
+                    </a:p>
+                  </a:txBody>
+                  <a:tcPr marL="57150" marR="57150" marT="50800" marB="50800" anchor="ctr"/>
+                </a:tc>
+                <a:tc>
+                  <a:txBody>
+                    <a:bodyPr/>
+                    <a:lstStyle/>
+                    <a:p>
+                      <a:pPr marL="0" marR="0" algn="ctr">
+                        <a:lnSpc>
+                          <a:spcPct val="115000"/>
+                        </a:lnSpc>
+                        <a:spcBef>
+                          <a:spcPts val="0"/>
+                        </a:spcBef>
+                        <a:spcAft>
+                          <a:spcPts val="0"/>
+                        </a:spcAft>
+                      </a:pPr>
+                      <a:r>
+                        <a:rPr lang="en-US" sz="1050">
+                          <a:effectLst/>
+                        </a:rPr>
+                        <a:t>Thiết lập / nguyên tắc</a:t>
+                      </a:r>
+                      <a:endParaRPr lang="en-US" sz="1200">
+                        <a:effectLst/>
+                        <a:latin typeface="Times New Roman" panose="02020603050405020304" pitchFamily="18" charset="0"/>
+                        <a:ea typeface="Times New Roman" panose="02020603050405020304" pitchFamily="18" charset="0"/>
+                        <a:cs typeface="Times New Roman" panose="02020603050405020304" pitchFamily="18" charset="0"/>
+                      </a:endParaRPr>
+                    </a:p>
+                  </a:txBody>
+                  <a:tcPr marL="57150" marR="57150" marT="50800" marB="50800" anchor="ctr"/>
+                </a:tc>
+                <a:extLst>
+                  <a:ext uri="{0D108BD9-81ED-4DB2-BD59-A6C34878D82A}">
+                    <a16:rowId xmlns:a16="http://schemas.microsoft.com/office/drawing/2014/main" val="339374686"/>
+                  </a:ext>
+                </a:extLst>
+              </a:tr>
+              <a:tr h="0">
+                <a:tc>
+                  <a:txBody>
+                    <a:bodyPr/>
+                    <a:lstStyle/>
+                    <a:p>
+                      <a:pPr marL="0" marR="0" algn="ctr">
+                        <a:lnSpc>
+                          <a:spcPct val="115000"/>
+                        </a:lnSpc>
+                        <a:spcBef>
+                          <a:spcPts val="0"/>
+                        </a:spcBef>
+                        <a:spcAft>
+                          <a:spcPts val="0"/>
+                        </a:spcAft>
+                      </a:pPr>
+                      <a:r>
+                        <a:rPr lang="en-US" sz="1050">
+                          <a:effectLst/>
+                        </a:rPr>
+                        <a:t>Stratified split</a:t>
+                      </a:r>
+                      <a:endParaRPr lang="en-US" sz="1200">
+                        <a:effectLst/>
+                        <a:latin typeface="Times New Roman" panose="02020603050405020304" pitchFamily="18" charset="0"/>
+                        <a:ea typeface="Times New Roman" panose="02020603050405020304" pitchFamily="18" charset="0"/>
+                        <a:cs typeface="Times New Roman" panose="02020603050405020304" pitchFamily="18" charset="0"/>
+                      </a:endParaRPr>
+                    </a:p>
+                  </a:txBody>
+                  <a:tcPr marL="53975" marR="53975" marT="44450" marB="44450" anchor="ctr"/>
+                </a:tc>
+                <a:tc>
+                  <a:txBody>
+                    <a:bodyPr/>
+                    <a:lstStyle/>
+                    <a:p>
+                      <a:pPr marL="0" marR="0">
+                        <a:lnSpc>
+                          <a:spcPct val="115000"/>
+                        </a:lnSpc>
+                        <a:spcBef>
+                          <a:spcPts val="0"/>
+                        </a:spcBef>
+                        <a:spcAft>
+                          <a:spcPts val="0"/>
+                        </a:spcAft>
+                      </a:pPr>
+                      <a:r>
+                        <a:rPr lang="en-US" sz="1050">
+                          <a:effectLst/>
+                        </a:rPr>
+                        <a:t>80/10/10, seed 42</a:t>
+                      </a:r>
+                      <a:endParaRPr lang="en-US" sz="1200">
+                        <a:effectLst/>
+                        <a:latin typeface="Times New Roman" panose="02020603050405020304" pitchFamily="18" charset="0"/>
+                        <a:ea typeface="Times New Roman" panose="02020603050405020304" pitchFamily="18" charset="0"/>
+                        <a:cs typeface="Times New Roman" panose="02020603050405020304" pitchFamily="18" charset="0"/>
+                      </a:endParaRPr>
+                    </a:p>
+                  </a:txBody>
+                  <a:tcPr marL="53975" marR="53975" marT="44450" marB="44450" anchor="ctr"/>
+                </a:tc>
+                <a:extLst>
+                  <a:ext uri="{0D108BD9-81ED-4DB2-BD59-A6C34878D82A}">
+                    <a16:rowId xmlns:a16="http://schemas.microsoft.com/office/drawing/2014/main" val="2027633858"/>
+                  </a:ext>
+                </a:extLst>
+              </a:tr>
+              <a:tr h="0">
+                <a:tc>
+                  <a:txBody>
+                    <a:bodyPr/>
+                    <a:lstStyle/>
+                    <a:p>
+                      <a:pPr marL="0" marR="0" algn="ctr">
+                        <a:lnSpc>
+                          <a:spcPct val="115000"/>
+                        </a:lnSpc>
+                        <a:spcBef>
+                          <a:spcPts val="0"/>
+                        </a:spcBef>
+                        <a:spcAft>
+                          <a:spcPts val="0"/>
+                        </a:spcAft>
+                      </a:pPr>
+                      <a:r>
+                        <a:rPr lang="en-US" sz="1050">
+                          <a:effectLst/>
+                        </a:rPr>
+                        <a:t>Test lock</a:t>
+                      </a:r>
+                      <a:endParaRPr lang="en-US" sz="1200">
+                        <a:effectLst/>
+                        <a:latin typeface="Times New Roman" panose="02020603050405020304" pitchFamily="18" charset="0"/>
+                        <a:ea typeface="Times New Roman" panose="02020603050405020304" pitchFamily="18" charset="0"/>
+                        <a:cs typeface="Times New Roman" panose="02020603050405020304" pitchFamily="18" charset="0"/>
+                      </a:endParaRPr>
+                    </a:p>
+                  </a:txBody>
+                  <a:tcPr marL="53975" marR="53975" marT="44450" marB="44450" anchor="ctr"/>
+                </a:tc>
+                <a:tc>
+                  <a:txBody>
+                    <a:bodyPr/>
+                    <a:lstStyle/>
+                    <a:p>
+                      <a:pPr marL="0" marR="0">
+                        <a:lnSpc>
+                          <a:spcPct val="115000"/>
+                        </a:lnSpc>
+                        <a:spcBef>
+                          <a:spcPts val="0"/>
+                        </a:spcBef>
+                        <a:spcAft>
+                          <a:spcPts val="0"/>
+                        </a:spcAft>
+                      </a:pPr>
+                      <a:r>
+                        <a:rPr lang="en-US" sz="1050">
+                          <a:effectLst/>
+                        </a:rPr>
+                        <a:t>Không đánh giá test trong model selection</a:t>
+                      </a:r>
+                      <a:endParaRPr lang="en-US" sz="1200">
+                        <a:effectLst/>
+                        <a:latin typeface="Times New Roman" panose="02020603050405020304" pitchFamily="18" charset="0"/>
+                        <a:ea typeface="Times New Roman" panose="02020603050405020304" pitchFamily="18" charset="0"/>
+                        <a:cs typeface="Times New Roman" panose="02020603050405020304" pitchFamily="18" charset="0"/>
+                      </a:endParaRPr>
+                    </a:p>
+                  </a:txBody>
+                  <a:tcPr marL="53975" marR="53975" marT="44450" marB="44450" anchor="ctr"/>
+                </a:tc>
+                <a:extLst>
+                  <a:ext uri="{0D108BD9-81ED-4DB2-BD59-A6C34878D82A}">
+                    <a16:rowId xmlns:a16="http://schemas.microsoft.com/office/drawing/2014/main" val="1171388300"/>
+                  </a:ext>
+                </a:extLst>
+              </a:tr>
+              <a:tr h="0">
+                <a:tc>
+                  <a:txBody>
+                    <a:bodyPr/>
+                    <a:lstStyle/>
+                    <a:p>
+                      <a:pPr marL="0" marR="0" algn="ctr">
+                        <a:lnSpc>
+                          <a:spcPct val="115000"/>
+                        </a:lnSpc>
+                        <a:spcBef>
+                          <a:spcPts val="0"/>
+                        </a:spcBef>
+                        <a:spcAft>
+                          <a:spcPts val="0"/>
+                        </a:spcAft>
+                      </a:pPr>
+                      <a:r>
+                        <a:rPr lang="en-US" sz="1050">
+                          <a:effectLst/>
+                        </a:rPr>
+                        <a:t>Augmentation</a:t>
+                      </a:r>
+                      <a:endParaRPr lang="en-US" sz="1200">
+                        <a:effectLst/>
+                        <a:latin typeface="Times New Roman" panose="02020603050405020304" pitchFamily="18" charset="0"/>
+                        <a:ea typeface="Times New Roman" panose="02020603050405020304" pitchFamily="18" charset="0"/>
+                        <a:cs typeface="Times New Roman" panose="02020603050405020304" pitchFamily="18" charset="0"/>
+                      </a:endParaRPr>
+                    </a:p>
+                  </a:txBody>
+                  <a:tcPr marL="53975" marR="53975" marT="44450" marB="44450" anchor="ctr"/>
+                </a:tc>
+                <a:tc>
+                  <a:txBody>
+                    <a:bodyPr/>
+                    <a:lstStyle/>
+                    <a:p>
+                      <a:pPr marL="0" marR="0">
+                        <a:lnSpc>
+                          <a:spcPct val="115000"/>
+                        </a:lnSpc>
+                        <a:spcBef>
+                          <a:spcPts val="0"/>
+                        </a:spcBef>
+                        <a:spcAft>
+                          <a:spcPts val="0"/>
+                        </a:spcAft>
+                      </a:pPr>
+                      <a:r>
+                        <a:rPr lang="en-US" sz="1050">
+                          <a:effectLst/>
+                        </a:rPr>
+                        <a:t>Crop, flip, jitter, rotation; erasing off ban đầu</a:t>
+                      </a:r>
+                      <a:endParaRPr lang="en-US" sz="1200">
+                        <a:effectLst/>
+                        <a:latin typeface="Times New Roman" panose="02020603050405020304" pitchFamily="18" charset="0"/>
+                        <a:ea typeface="Times New Roman" panose="02020603050405020304" pitchFamily="18" charset="0"/>
+                        <a:cs typeface="Times New Roman" panose="02020603050405020304" pitchFamily="18" charset="0"/>
+                      </a:endParaRPr>
+                    </a:p>
+                  </a:txBody>
+                  <a:tcPr marL="53975" marR="53975" marT="44450" marB="44450" anchor="ctr"/>
+                </a:tc>
+                <a:extLst>
+                  <a:ext uri="{0D108BD9-81ED-4DB2-BD59-A6C34878D82A}">
+                    <a16:rowId xmlns:a16="http://schemas.microsoft.com/office/drawing/2014/main" val="2219381193"/>
+                  </a:ext>
+                </a:extLst>
+              </a:tr>
+              <a:tr h="0">
+                <a:tc>
+                  <a:txBody>
+                    <a:bodyPr/>
+                    <a:lstStyle/>
+                    <a:p>
+                      <a:pPr marL="0" marR="0" algn="ctr">
+                        <a:lnSpc>
+                          <a:spcPct val="115000"/>
+                        </a:lnSpc>
+                        <a:spcBef>
+                          <a:spcPts val="0"/>
+                        </a:spcBef>
+                        <a:spcAft>
+                          <a:spcPts val="0"/>
+                        </a:spcAft>
+                      </a:pPr>
+                      <a:r>
+                        <a:rPr lang="en-US" sz="1050">
+                          <a:effectLst/>
+                        </a:rPr>
+                        <a:t>Weight decay</a:t>
+                      </a:r>
+                      <a:endParaRPr lang="en-US" sz="1200">
+                        <a:effectLst/>
+                        <a:latin typeface="Times New Roman" panose="02020603050405020304" pitchFamily="18" charset="0"/>
+                        <a:ea typeface="Times New Roman" panose="02020603050405020304" pitchFamily="18" charset="0"/>
+                        <a:cs typeface="Times New Roman" panose="02020603050405020304" pitchFamily="18" charset="0"/>
+                      </a:endParaRPr>
+                    </a:p>
+                  </a:txBody>
+                  <a:tcPr marL="53975" marR="53975" marT="44450" marB="44450" anchor="ctr"/>
+                </a:tc>
+                <a:tc>
+                  <a:txBody>
+                    <a:bodyPr/>
+                    <a:lstStyle/>
+                    <a:p>
+                      <a:pPr marL="0" marR="0">
+                        <a:lnSpc>
+                          <a:spcPct val="115000"/>
+                        </a:lnSpc>
+                        <a:spcBef>
+                          <a:spcPts val="0"/>
+                        </a:spcBef>
+                        <a:spcAft>
+                          <a:spcPts val="0"/>
+                        </a:spcAft>
+                      </a:pPr>
+                      <a:r>
+                        <a:rPr lang="en-US" sz="1050">
+                          <a:effectLst/>
+                        </a:rPr>
+                        <a:t>5e−4</a:t>
+                      </a:r>
+                      <a:endParaRPr lang="en-US" sz="1200">
+                        <a:effectLst/>
+                        <a:latin typeface="Times New Roman" panose="02020603050405020304" pitchFamily="18" charset="0"/>
+                        <a:ea typeface="Times New Roman" panose="02020603050405020304" pitchFamily="18" charset="0"/>
+                        <a:cs typeface="Times New Roman" panose="02020603050405020304" pitchFamily="18" charset="0"/>
+                      </a:endParaRPr>
+                    </a:p>
+                  </a:txBody>
+                  <a:tcPr marL="53975" marR="53975" marT="44450" marB="44450" anchor="ctr"/>
+                </a:tc>
+                <a:extLst>
+                  <a:ext uri="{0D108BD9-81ED-4DB2-BD59-A6C34878D82A}">
+                    <a16:rowId xmlns:a16="http://schemas.microsoft.com/office/drawing/2014/main" val="2438755378"/>
+                  </a:ext>
+                </a:extLst>
+              </a:tr>
+              <a:tr h="0">
+                <a:tc>
+                  <a:txBody>
+                    <a:bodyPr/>
+                    <a:lstStyle/>
+                    <a:p>
+                      <a:pPr marL="0" marR="0" algn="ctr">
+                        <a:lnSpc>
+                          <a:spcPct val="115000"/>
+                        </a:lnSpc>
+                        <a:spcBef>
+                          <a:spcPts val="0"/>
+                        </a:spcBef>
+                        <a:spcAft>
+                          <a:spcPts val="0"/>
+                        </a:spcAft>
+                      </a:pPr>
+                      <a:r>
+                        <a:rPr lang="en-US" sz="1050">
+                          <a:effectLst/>
+                        </a:rPr>
+                        <a:t>Label smoothing</a:t>
+                      </a:r>
+                      <a:endParaRPr lang="en-US" sz="1200">
+                        <a:effectLst/>
+                        <a:latin typeface="Times New Roman" panose="02020603050405020304" pitchFamily="18" charset="0"/>
+                        <a:ea typeface="Times New Roman" panose="02020603050405020304" pitchFamily="18" charset="0"/>
+                        <a:cs typeface="Times New Roman" panose="02020603050405020304" pitchFamily="18" charset="0"/>
+                      </a:endParaRPr>
+                    </a:p>
+                  </a:txBody>
+                  <a:tcPr marL="53975" marR="53975" marT="44450" marB="44450" anchor="ctr"/>
+                </a:tc>
+                <a:tc>
+                  <a:txBody>
+                    <a:bodyPr/>
+                    <a:lstStyle/>
+                    <a:p>
+                      <a:pPr marL="0" marR="0">
+                        <a:lnSpc>
+                          <a:spcPct val="115000"/>
+                        </a:lnSpc>
+                        <a:spcBef>
+                          <a:spcPts val="0"/>
+                        </a:spcBef>
+                        <a:spcAft>
+                          <a:spcPts val="0"/>
+                        </a:spcAft>
+                      </a:pPr>
+                      <a:r>
+                        <a:rPr lang="en-US" sz="1050">
+                          <a:effectLst/>
+                        </a:rPr>
+                        <a:t>0.05</a:t>
+                      </a:r>
+                      <a:endParaRPr lang="en-US" sz="1200">
+                        <a:effectLst/>
+                        <a:latin typeface="Times New Roman" panose="02020603050405020304" pitchFamily="18" charset="0"/>
+                        <a:ea typeface="Times New Roman" panose="02020603050405020304" pitchFamily="18" charset="0"/>
+                        <a:cs typeface="Times New Roman" panose="02020603050405020304" pitchFamily="18" charset="0"/>
+                      </a:endParaRPr>
+                    </a:p>
+                  </a:txBody>
+                  <a:tcPr marL="53975" marR="53975" marT="44450" marB="44450" anchor="ctr"/>
+                </a:tc>
+                <a:extLst>
+                  <a:ext uri="{0D108BD9-81ED-4DB2-BD59-A6C34878D82A}">
+                    <a16:rowId xmlns:a16="http://schemas.microsoft.com/office/drawing/2014/main" val="1484052695"/>
+                  </a:ext>
+                </a:extLst>
+              </a:tr>
+              <a:tr h="0">
+                <a:tc>
+                  <a:txBody>
+                    <a:bodyPr/>
+                    <a:lstStyle/>
+                    <a:p>
+                      <a:pPr marL="0" marR="0" algn="ctr">
+                        <a:lnSpc>
+                          <a:spcPct val="115000"/>
+                        </a:lnSpc>
+                        <a:spcBef>
+                          <a:spcPts val="0"/>
+                        </a:spcBef>
+                        <a:spcAft>
+                          <a:spcPts val="0"/>
+                        </a:spcAft>
+                      </a:pPr>
+                      <a:r>
+                        <a:rPr lang="en-US" sz="1050">
+                          <a:effectLst/>
+                        </a:rPr>
+                        <a:t>EMA</a:t>
+                      </a:r>
+                      <a:endParaRPr lang="en-US" sz="1200">
+                        <a:effectLst/>
+                        <a:latin typeface="Times New Roman" panose="02020603050405020304" pitchFamily="18" charset="0"/>
+                        <a:ea typeface="Times New Roman" panose="02020603050405020304" pitchFamily="18" charset="0"/>
+                        <a:cs typeface="Times New Roman" panose="02020603050405020304" pitchFamily="18" charset="0"/>
+                      </a:endParaRPr>
+                    </a:p>
+                  </a:txBody>
+                  <a:tcPr marL="53975" marR="53975" marT="44450" marB="44450" anchor="ctr"/>
+                </a:tc>
+                <a:tc>
+                  <a:txBody>
+                    <a:bodyPr/>
+                    <a:lstStyle/>
+                    <a:p>
+                      <a:pPr marL="0" marR="0">
+                        <a:lnSpc>
+                          <a:spcPct val="115000"/>
+                        </a:lnSpc>
+                        <a:spcBef>
+                          <a:spcPts val="0"/>
+                        </a:spcBef>
+                        <a:spcAft>
+                          <a:spcPts val="0"/>
+                        </a:spcAft>
+                      </a:pPr>
+                      <a:r>
+                        <a:rPr lang="en-US" sz="1050">
+                          <a:effectLst/>
+                        </a:rPr>
+                        <a:t>0.999</a:t>
+                      </a:r>
+                      <a:endParaRPr lang="en-US" sz="1200">
+                        <a:effectLst/>
+                        <a:latin typeface="Times New Roman" panose="02020603050405020304" pitchFamily="18" charset="0"/>
+                        <a:ea typeface="Times New Roman" panose="02020603050405020304" pitchFamily="18" charset="0"/>
+                        <a:cs typeface="Times New Roman" panose="02020603050405020304" pitchFamily="18" charset="0"/>
+                      </a:endParaRPr>
+                    </a:p>
+                  </a:txBody>
+                  <a:tcPr marL="53975" marR="53975" marT="44450" marB="44450" anchor="ctr"/>
+                </a:tc>
+                <a:extLst>
+                  <a:ext uri="{0D108BD9-81ED-4DB2-BD59-A6C34878D82A}">
+                    <a16:rowId xmlns:a16="http://schemas.microsoft.com/office/drawing/2014/main" val="2070068398"/>
+                  </a:ext>
+                </a:extLst>
+              </a:tr>
+              <a:tr h="0">
+                <a:tc>
+                  <a:txBody>
+                    <a:bodyPr/>
+                    <a:lstStyle/>
+                    <a:p>
+                      <a:pPr marL="0" marR="0" algn="ctr">
+                        <a:lnSpc>
+                          <a:spcPct val="115000"/>
+                        </a:lnSpc>
+                        <a:spcBef>
+                          <a:spcPts val="0"/>
+                        </a:spcBef>
+                        <a:spcAft>
+                          <a:spcPts val="0"/>
+                        </a:spcAft>
+                      </a:pPr>
+                      <a:r>
+                        <a:rPr lang="en-US" sz="1050">
+                          <a:effectLst/>
+                        </a:rPr>
+                        <a:t>Early stopping</a:t>
+                      </a:r>
+                      <a:endParaRPr lang="en-US" sz="1200">
+                        <a:effectLst/>
+                        <a:latin typeface="Times New Roman" panose="02020603050405020304" pitchFamily="18" charset="0"/>
+                        <a:ea typeface="Times New Roman" panose="02020603050405020304" pitchFamily="18" charset="0"/>
+                        <a:cs typeface="Times New Roman" panose="02020603050405020304" pitchFamily="18" charset="0"/>
+                      </a:endParaRPr>
+                    </a:p>
+                  </a:txBody>
+                  <a:tcPr marL="53975" marR="53975" marT="44450" marB="44450" anchor="ctr"/>
+                </a:tc>
+                <a:tc>
+                  <a:txBody>
+                    <a:bodyPr/>
+                    <a:lstStyle/>
+                    <a:p>
+                      <a:pPr marL="0" marR="0">
+                        <a:lnSpc>
+                          <a:spcPct val="115000"/>
+                        </a:lnSpc>
+                        <a:spcBef>
+                          <a:spcPts val="0"/>
+                        </a:spcBef>
+                        <a:spcAft>
+                          <a:spcPts val="0"/>
+                        </a:spcAft>
+                      </a:pPr>
+                      <a:r>
+                        <a:rPr lang="en-US" sz="1050">
+                          <a:effectLst/>
+                        </a:rPr>
+                        <a:t>Patience 8; min_delta 0.001 macro-F1</a:t>
+                      </a:r>
+                      <a:endParaRPr lang="en-US" sz="1200">
+                        <a:effectLst/>
+                        <a:latin typeface="Times New Roman" panose="02020603050405020304" pitchFamily="18" charset="0"/>
+                        <a:ea typeface="Times New Roman" panose="02020603050405020304" pitchFamily="18" charset="0"/>
+                        <a:cs typeface="Times New Roman" panose="02020603050405020304" pitchFamily="18" charset="0"/>
+                      </a:endParaRPr>
+                    </a:p>
+                  </a:txBody>
+                  <a:tcPr marL="53975" marR="53975" marT="44450" marB="44450" anchor="ctr"/>
+                </a:tc>
+                <a:extLst>
+                  <a:ext uri="{0D108BD9-81ED-4DB2-BD59-A6C34878D82A}">
+                    <a16:rowId xmlns:a16="http://schemas.microsoft.com/office/drawing/2014/main" val="3059611354"/>
+                  </a:ext>
+                </a:extLst>
+              </a:tr>
+              <a:tr h="0">
+                <a:tc>
+                  <a:txBody>
+                    <a:bodyPr/>
+                    <a:lstStyle/>
+                    <a:p>
+                      <a:pPr marL="0" marR="0" algn="ctr">
+                        <a:lnSpc>
+                          <a:spcPct val="115000"/>
+                        </a:lnSpc>
+                        <a:spcBef>
+                          <a:spcPts val="0"/>
+                        </a:spcBef>
+                        <a:spcAft>
+                          <a:spcPts val="0"/>
+                        </a:spcAft>
+                      </a:pPr>
+                      <a:r>
+                        <a:rPr lang="en-US" sz="1050">
+                          <a:effectLst/>
+                        </a:rPr>
+                        <a:t>KD ramp</a:t>
+                      </a:r>
+                      <a:endParaRPr lang="en-US" sz="1200">
+                        <a:effectLst/>
+                        <a:latin typeface="Times New Roman" panose="02020603050405020304" pitchFamily="18" charset="0"/>
+                        <a:ea typeface="Times New Roman" panose="02020603050405020304" pitchFamily="18" charset="0"/>
+                        <a:cs typeface="Times New Roman" panose="02020603050405020304" pitchFamily="18" charset="0"/>
+                      </a:endParaRPr>
+                    </a:p>
+                  </a:txBody>
+                  <a:tcPr marL="53975" marR="53975" marT="44450" marB="44450" anchor="ctr"/>
+                </a:tc>
+                <a:tc>
+                  <a:txBody>
+                    <a:bodyPr/>
+                    <a:lstStyle/>
+                    <a:p>
+                      <a:pPr marL="0" marR="0">
+                        <a:lnSpc>
+                          <a:spcPct val="115000"/>
+                        </a:lnSpc>
+                        <a:spcBef>
+                          <a:spcPts val="0"/>
+                        </a:spcBef>
+                        <a:spcAft>
+                          <a:spcPts val="0"/>
+                        </a:spcAft>
+                      </a:pPr>
+                      <a:r>
+                        <a:rPr lang="en-US" sz="1050">
+                          <a:effectLst/>
+                        </a:rPr>
+                        <a:t>Tăng dần KD weight</a:t>
+                      </a:r>
+                      <a:endParaRPr lang="en-US" sz="1200">
+                        <a:effectLst/>
+                        <a:latin typeface="Times New Roman" panose="02020603050405020304" pitchFamily="18" charset="0"/>
+                        <a:ea typeface="Times New Roman" panose="02020603050405020304" pitchFamily="18" charset="0"/>
+                        <a:cs typeface="Times New Roman" panose="02020603050405020304" pitchFamily="18" charset="0"/>
+                      </a:endParaRPr>
+                    </a:p>
+                  </a:txBody>
+                  <a:tcPr marL="53975" marR="53975" marT="44450" marB="44450" anchor="ctr"/>
+                </a:tc>
+                <a:extLst>
+                  <a:ext uri="{0D108BD9-81ED-4DB2-BD59-A6C34878D82A}">
+                    <a16:rowId xmlns:a16="http://schemas.microsoft.com/office/drawing/2014/main" val="1277492168"/>
+                  </a:ext>
+                </a:extLst>
+              </a:tr>
+              <a:tr h="0">
+                <a:tc>
+                  <a:txBody>
+                    <a:bodyPr/>
+                    <a:lstStyle/>
+                    <a:p>
+                      <a:pPr marL="0" marR="0" algn="ctr">
+                        <a:lnSpc>
+                          <a:spcPct val="115000"/>
+                        </a:lnSpc>
+                        <a:spcBef>
+                          <a:spcPts val="0"/>
+                        </a:spcBef>
+                        <a:spcAft>
+                          <a:spcPts val="0"/>
+                        </a:spcAft>
+                      </a:pPr>
+                      <a:r>
+                        <a:rPr lang="en-US" sz="1050">
+                          <a:effectLst/>
+                        </a:rPr>
+                        <a:t>Numerical guard</a:t>
+                      </a:r>
+                      <a:endParaRPr lang="en-US" sz="1200">
+                        <a:effectLst/>
+                        <a:latin typeface="Times New Roman" panose="02020603050405020304" pitchFamily="18" charset="0"/>
+                        <a:ea typeface="Times New Roman" panose="02020603050405020304" pitchFamily="18" charset="0"/>
+                        <a:cs typeface="Times New Roman" panose="02020603050405020304" pitchFamily="18" charset="0"/>
+                      </a:endParaRPr>
+                    </a:p>
+                  </a:txBody>
+                  <a:tcPr marL="53975" marR="53975" marT="44450" marB="44450" anchor="ctr"/>
+                </a:tc>
+                <a:tc>
+                  <a:txBody>
+                    <a:bodyPr/>
+                    <a:lstStyle/>
+                    <a:p>
+                      <a:pPr marL="0" marR="0">
+                        <a:lnSpc>
+                          <a:spcPct val="115000"/>
+                        </a:lnSpc>
+                        <a:spcBef>
+                          <a:spcPts val="0"/>
+                        </a:spcBef>
+                        <a:spcAft>
+                          <a:spcPts val="0"/>
+                        </a:spcAft>
+                      </a:pPr>
+                      <a:r>
+                        <a:rPr lang="en-US" sz="1050">
+                          <a:effectLst/>
+                        </a:rPr>
+                        <a:t>Margin FP32 + epsilon &gt;=1e−6</a:t>
+                      </a:r>
+                      <a:endParaRPr lang="en-US" sz="1200">
+                        <a:effectLst/>
+                        <a:latin typeface="Times New Roman" panose="02020603050405020304" pitchFamily="18" charset="0"/>
+                        <a:ea typeface="Times New Roman" panose="02020603050405020304" pitchFamily="18" charset="0"/>
+                        <a:cs typeface="Times New Roman" panose="02020603050405020304" pitchFamily="18" charset="0"/>
+                      </a:endParaRPr>
+                    </a:p>
+                  </a:txBody>
+                  <a:tcPr marL="53975" marR="53975" marT="44450" marB="44450" anchor="ctr"/>
+                </a:tc>
+                <a:extLst>
+                  <a:ext uri="{0D108BD9-81ED-4DB2-BD59-A6C34878D82A}">
+                    <a16:rowId xmlns:a16="http://schemas.microsoft.com/office/drawing/2014/main" val="3417597638"/>
+                  </a:ext>
+                </a:extLst>
+              </a:tr>
+            </a:tbl>
+          </a:graphicData>
+        </a:graphic>
+      </p:graphicFrame>
     </p:spTree>
     <p:extLst>
       <p:ext uri="{BB962C8B-B14F-4D97-AF65-F5344CB8AC3E}">
@@ -4976,7 +6900,7 @@
 </p:sld>
 </file>
 
-<file path=ppt/slides/slide13.xml><?xml version="1.0" encoding="utf-8"?>
+<file path=ppt/slides/slide14.xml><?xml version="1.0" encoding="utf-8"?>
 <p:sld xmlns:a="http://schemas.openxmlformats.org/drawingml/2006/main" xmlns:r="http://schemas.openxmlformats.org/officeDocument/2006/relationships" xmlns:p="http://schemas.openxmlformats.org/presentationml/2006/main">
   <p:cSld>
     <p:spTree>
@@ -6947,7 +8871,7 @@
 </p:sld>
 </file>
 
-<file path=ppt/slides/slide14.xml><?xml version="1.0" encoding="utf-8"?>
+<file path=ppt/slides/slide15.xml><?xml version="1.0" encoding="utf-8"?>
 <p:sld xmlns:a="http://schemas.openxmlformats.org/drawingml/2006/main" xmlns:r="http://schemas.openxmlformats.org/officeDocument/2006/relationships" xmlns:p="http://schemas.openxmlformats.org/presentationml/2006/main">
   <p:cSld>
     <p:spTree>
@@ -7129,7 +9053,7 @@
 </p:sld>
 </file>
 
-<file path=ppt/slides/slide15.xml><?xml version="1.0" encoding="utf-8"?>
+<file path=ppt/slides/slide16.xml><?xml version="1.0" encoding="utf-8"?>
 <p:sld xmlns:a="http://schemas.openxmlformats.org/drawingml/2006/main" xmlns:r="http://schemas.openxmlformats.org/officeDocument/2006/relationships" xmlns:p="http://schemas.openxmlformats.org/presentationml/2006/main">
   <p:cSld>
     <p:spTree>
